--- a/attached_assets/VaughnMartin_Pitch_Deck_FINAL_Wednesday.pptx
+++ b/attached_assets/VaughnMartin_Pitch_Deck_FINAL_Wednesday.pptx
@@ -6,19 +6,13 @@
   </p:sldMasterIdLst>
   <p:sldIdLst>
     <p:sldId id="256" r:id="rId7"/>
-    <p:sldId id="257" r:id="rId9"/>
-    <p:sldId id="258" r:id="rId10"/>
-    <p:sldId id="259" r:id="rId11"/>
-    <p:sldId id="260" r:id="rId12"/>
-    <p:sldId id="261" r:id="rId13"/>
-    <p:sldId id="262" r:id="rId14"/>
-    <p:sldId id="263" r:id="rId15"/>
-    <p:sldId id="264" r:id="rId16"/>
-    <p:sldId id="265" r:id="rId17"/>
-    <p:sldId id="266" r:id="rId18"/>
-    <p:sldId id="267" r:id="rId19"/>
+    <p:sldId id="257" r:id="rId8"/>
+    <p:sldId id="258" r:id="rId9"/>
+    <p:sldId id="259" r:id="rId10"/>
+    <p:sldId id="260" r:id="rId11"/>
+    <p:sldId id="261" r:id="rId12"/>
   </p:sldIdLst>
-  <p:sldSz cx="9144000" cy="5143500" type="screen4x3"/>
+  <p:sldSz cx="12188952" cy="6858000" type="screen4x3"/>
   <p:notesSz cx="6858000" cy="9144000"/>
   <p:defaultTextStyle>
     <a:defPPr>
@@ -118,1511 +112,6 @@
 </p:presentation>
 </file>
 
-<file path=ppt/notesMasters/notesMaster1.xml><?xml version="1.0" encoding="utf-8"?>
-<p:notesMaster xmlns:a="http://schemas.openxmlformats.org/drawingml/2006/main" xmlns:p="http://schemas.openxmlformats.org/presentationml/2006/main" xmlns:r="http://schemas.openxmlformats.org/officeDocument/2006/relationships">
-  <p:cSld>
-    <p:bg>
-      <p:bgRef idx="1001">
-        <a:schemeClr val="bg1"/>
-      </p:bgRef>
-    </p:bg>
-    <p:spTree>
-      <p:nvGrpSpPr>
-        <p:cNvPr id="1" name=""/>
-        <p:cNvGrpSpPr/>
-        <p:nvPr/>
-      </p:nvGrpSpPr>
-      <p:grpSpPr>
-        <a:xfrm>
-          <a:off x="0" y="0"/>
-          <a:ext cx="0" cy="0"/>
-          <a:chOff x="0" y="0"/>
-          <a:chExt cx="0" cy="0"/>
-        </a:xfrm>
-      </p:grpSpPr>
-      <p:sp>
-        <p:nvSpPr>
-          <p:cNvPr id="2" name="Header Placeholder 1"/>
-          <p:cNvSpPr>
-            <a:spLocks noGrp="1"/>
-          </p:cNvSpPr>
-          <p:nvPr>
-            <p:ph type="hdr" sz="quarter"/>
-          </p:nvPr>
-        </p:nvSpPr>
-        <p:spPr>
-          <a:xfrm>
-            <a:off x="0" y="0"/>
-            <a:ext cx="2971800" cy="457200"/>
-          </a:xfrm>
-          <a:prstGeom prst="rect">
-            <a:avLst/>
-          </a:prstGeom>
-        </p:spPr>
-        <p:txBody>
-          <a:bodyPr vert="horz" lIns="91440" tIns="45720" rIns="91440" bIns="45720" rtlCol="0"/>
-          <a:lstStyle>
-            <a:lvl1pPr algn="l">
-              <a:defRPr sz="1200"/>
-            </a:lvl1pPr>
-          </a:lstStyle>
-          <a:p>
-            <a:endParaRPr lang="en-US"/>
-          </a:p>
-        </p:txBody>
-      </p:sp>
-      <p:sp>
-        <p:nvSpPr>
-          <p:cNvPr id="3" name="Date Placeholder 2"/>
-          <p:cNvSpPr>
-            <a:spLocks noGrp="1"/>
-          </p:cNvSpPr>
-          <p:nvPr>
-            <p:ph type="dt" idx="1"/>
-          </p:nvPr>
-        </p:nvSpPr>
-        <p:spPr>
-          <a:xfrm>
-            <a:off x="3884613" y="0"/>
-            <a:ext cx="2971800" cy="457200"/>
-          </a:xfrm>
-          <a:prstGeom prst="rect">
-            <a:avLst/>
-          </a:prstGeom>
-        </p:spPr>
-        <p:txBody>
-          <a:bodyPr vert="horz" lIns="91440" tIns="45720" rIns="91440" bIns="45720" rtlCol="0"/>
-          <a:lstStyle>
-            <a:lvl1pPr algn="r">
-              <a:defRPr sz="1200"/>
-            </a:lvl1pPr>
-          </a:lstStyle>
-          <a:p>
-            <a:fld id="{0F89C1C7-3DCD-1040-A9CF-14679D8B5DDD}" type="datetimeFigureOut">
-              <a:rPr lang="en-US" smtClean="0"/>
-              <a:t>10/17/16</a:t>
-            </a:fld>
-            <a:endParaRPr lang="en-US"/>
-          </a:p>
-        </p:txBody>
-      </p:sp>
-      <p:sp>
-        <p:nvSpPr>
-          <p:cNvPr id="4" name="Slide Image Placeholder 3"/>
-          <p:cNvSpPr>
-            <a:spLocks noGrp="1" noRot="1" noChangeAspect="1"/>
-          </p:cNvSpPr>
-          <p:nvPr>
-            <p:ph type="sldImg" idx="2"/>
-          </p:nvPr>
-        </p:nvSpPr>
-        <p:spPr>
-          <a:xfrm>
-            <a:off x="1143000" y="685800"/>
-            <a:ext cx="4572000" cy="3429000"/>
-          </a:xfrm>
-          <a:prstGeom prst="rect">
-            <a:avLst/>
-          </a:prstGeom>
-          <a:noFill/>
-          <a:ln w="12700">
-            <a:solidFill>
-              <a:prstClr val="black"/>
-            </a:solidFill>
-          </a:ln>
-        </p:spPr>
-        <p:txBody>
-          <a:bodyPr vert="horz" lIns="91440" tIns="45720" rIns="91440" bIns="45720" rtlCol="0" anchor="ctr"/>
-          <a:lstStyle/>
-          <a:p>
-            <a:endParaRPr lang="en-US"/>
-          </a:p>
-        </p:txBody>
-      </p:sp>
-      <p:sp>
-        <p:nvSpPr>
-          <p:cNvPr id="5" name="Notes Placeholder 4"/>
-          <p:cNvSpPr>
-            <a:spLocks noGrp="1"/>
-          </p:cNvSpPr>
-          <p:nvPr>
-            <p:ph type="body" sz="quarter" idx="3"/>
-          </p:nvPr>
-        </p:nvSpPr>
-        <p:spPr>
-          <a:xfrm>
-            <a:off x="685800" y="4343400"/>
-            <a:ext cx="5486400" cy="4114800"/>
-          </a:xfrm>
-          <a:prstGeom prst="rect">
-            <a:avLst/>
-          </a:prstGeom>
-        </p:spPr>
-        <p:txBody>
-          <a:bodyPr vert="horz" lIns="91440" tIns="45720" rIns="91440" bIns="45720" rtlCol="0"/>
-          <a:lstStyle/>
-          <a:p>
-            <a:pPr lvl="0"/>
-            <a:r>
-              <a:rPr lang="en-US" smtClean="0"/>
-              <a:t>Click to edit Master text styles</a:t>
-            </a:r>
-          </a:p>
-          <a:p>
-            <a:pPr lvl="1"/>
-            <a:r>
-              <a:rPr lang="en-US" smtClean="0"/>
-              <a:t>Second level</a:t>
-            </a:r>
-          </a:p>
-          <a:p>
-            <a:pPr lvl="2"/>
-            <a:r>
-              <a:rPr lang="en-US" smtClean="0"/>
-              <a:t>Third level</a:t>
-            </a:r>
-          </a:p>
-          <a:p>
-            <a:pPr lvl="3"/>
-            <a:r>
-              <a:rPr lang="en-US" smtClean="0"/>
-              <a:t>Fourth level</a:t>
-            </a:r>
-          </a:p>
-          <a:p>
-            <a:pPr lvl="4"/>
-            <a:r>
-              <a:rPr lang="en-US" smtClean="0"/>
-              <a:t>Fifth level</a:t>
-            </a:r>
-            <a:endParaRPr lang="en-US"/>
-          </a:p>
-        </p:txBody>
-      </p:sp>
-      <p:sp>
-        <p:nvSpPr>
-          <p:cNvPr id="6" name="Footer Placeholder 5"/>
-          <p:cNvSpPr>
-            <a:spLocks noGrp="1"/>
-          </p:cNvSpPr>
-          <p:nvPr>
-            <p:ph type="ftr" sz="quarter" idx="4"/>
-          </p:nvPr>
-        </p:nvSpPr>
-        <p:spPr>
-          <a:xfrm>
-            <a:off x="0" y="8685213"/>
-            <a:ext cx="2971800" cy="457200"/>
-          </a:xfrm>
-          <a:prstGeom prst="rect">
-            <a:avLst/>
-          </a:prstGeom>
-        </p:spPr>
-        <p:txBody>
-          <a:bodyPr vert="horz" lIns="91440" tIns="45720" rIns="91440" bIns="45720" rtlCol="0" anchor="b"/>
-          <a:lstStyle>
-            <a:lvl1pPr algn="l">
-              <a:defRPr sz="1200"/>
-            </a:lvl1pPr>
-          </a:lstStyle>
-          <a:p>
-            <a:endParaRPr lang="en-US"/>
-          </a:p>
-        </p:txBody>
-      </p:sp>
-      <p:sp>
-        <p:nvSpPr>
-          <p:cNvPr id="7" name="Slide Number Placeholder 6"/>
-          <p:cNvSpPr>
-            <a:spLocks noGrp="1"/>
-          </p:cNvSpPr>
-          <p:nvPr>
-            <p:ph type="sldNum" sz="quarter" idx="5"/>
-          </p:nvPr>
-        </p:nvSpPr>
-        <p:spPr>
-          <a:xfrm>
-            <a:off x="3884613" y="8685213"/>
-            <a:ext cx="2971800" cy="457200"/>
-          </a:xfrm>
-          <a:prstGeom prst="rect">
-            <a:avLst/>
-          </a:prstGeom>
-        </p:spPr>
-        <p:txBody>
-          <a:bodyPr vert="horz" lIns="91440" tIns="45720" rIns="91440" bIns="45720" rtlCol="0" anchor="b"/>
-          <a:lstStyle>
-            <a:lvl1pPr algn="r">
-              <a:defRPr sz="1200"/>
-            </a:lvl1pPr>
-          </a:lstStyle>
-          <a:p>
-            <a:fld id="{BB5E49A5-4136-284D-997B-48E1D791AD67}" type="slidenum">
-              <a:rPr lang="en-US" smtClean="0"/>
-              <a:t>‹#›</a:t>
-            </a:fld>
-            <a:endParaRPr lang="en-US"/>
-          </a:p>
-        </p:txBody>
-      </p:sp>
-    </p:spTree>
-    <p:extLst>
-      <p:ext uri="{BB962C8B-B14F-4D97-AF65-F5344CB8AC3E}">
-        <p14:creationId xmlns:p14="http://schemas.microsoft.com/office/powerpoint/2010/main" val="2623252185"/>
-      </p:ext>
-    </p:extLst>
-  </p:cSld>
-  <p:clrMap bg1="lt1" tx1="dk1" bg2="lt2" tx2="dk2" accent1="accent1" accent2="accent2" accent3="accent3" accent4="accent4" accent5="accent5" accent6="accent6" hlink="hlink" folHlink="folHlink"/>
-  <p:notesStyle>
-    <a:lvl1pPr marL="0" algn="l" defTabSz="457200" rtl="0" eaLnBrk="1" latinLnBrk="0" hangingPunct="1">
-      <a:defRPr sz="1200" kern="1200">
-        <a:solidFill>
-          <a:schemeClr val="tx1"/>
-        </a:solidFill>
-        <a:latin typeface="+mn-lt"/>
-        <a:ea typeface="+mn-ea"/>
-        <a:cs typeface="+mn-cs"/>
-      </a:defRPr>
-    </a:lvl1pPr>
-    <a:lvl2pPr marL="457200" algn="l" defTabSz="457200" rtl="0" eaLnBrk="1" latinLnBrk="0" hangingPunct="1">
-      <a:defRPr sz="1200" kern="1200">
-        <a:solidFill>
-          <a:schemeClr val="tx1"/>
-        </a:solidFill>
-        <a:latin typeface="+mn-lt"/>
-        <a:ea typeface="+mn-ea"/>
-        <a:cs typeface="+mn-cs"/>
-      </a:defRPr>
-    </a:lvl2pPr>
-    <a:lvl3pPr marL="914400" algn="l" defTabSz="457200" rtl="0" eaLnBrk="1" latinLnBrk="0" hangingPunct="1">
-      <a:defRPr sz="1200" kern="1200">
-        <a:solidFill>
-          <a:schemeClr val="tx1"/>
-        </a:solidFill>
-        <a:latin typeface="+mn-lt"/>
-        <a:ea typeface="+mn-ea"/>
-        <a:cs typeface="+mn-cs"/>
-      </a:defRPr>
-    </a:lvl3pPr>
-    <a:lvl4pPr marL="1371600" algn="l" defTabSz="457200" rtl="0" eaLnBrk="1" latinLnBrk="0" hangingPunct="1">
-      <a:defRPr sz="1200" kern="1200">
-        <a:solidFill>
-          <a:schemeClr val="tx1"/>
-        </a:solidFill>
-        <a:latin typeface="+mn-lt"/>
-        <a:ea typeface="+mn-ea"/>
-        <a:cs typeface="+mn-cs"/>
-      </a:defRPr>
-    </a:lvl4pPr>
-    <a:lvl5pPr marL="1828800" algn="l" defTabSz="457200" rtl="0" eaLnBrk="1" latinLnBrk="0" hangingPunct="1">
-      <a:defRPr sz="1200" kern="1200">
-        <a:solidFill>
-          <a:schemeClr val="tx1"/>
-        </a:solidFill>
-        <a:latin typeface="+mn-lt"/>
-        <a:ea typeface="+mn-ea"/>
-        <a:cs typeface="+mn-cs"/>
-      </a:defRPr>
-    </a:lvl5pPr>
-    <a:lvl6pPr marL="2286000" algn="l" defTabSz="457200" rtl="0" eaLnBrk="1" latinLnBrk="0" hangingPunct="1">
-      <a:defRPr sz="1200" kern="1200">
-        <a:solidFill>
-          <a:schemeClr val="tx1"/>
-        </a:solidFill>
-        <a:latin typeface="+mn-lt"/>
-        <a:ea typeface="+mn-ea"/>
-        <a:cs typeface="+mn-cs"/>
-      </a:defRPr>
-    </a:lvl6pPr>
-    <a:lvl7pPr marL="2743200" algn="l" defTabSz="457200" rtl="0" eaLnBrk="1" latinLnBrk="0" hangingPunct="1">
-      <a:defRPr sz="1200" kern="1200">
-        <a:solidFill>
-          <a:schemeClr val="tx1"/>
-        </a:solidFill>
-        <a:latin typeface="+mn-lt"/>
-        <a:ea typeface="+mn-ea"/>
-        <a:cs typeface="+mn-cs"/>
-      </a:defRPr>
-    </a:lvl7pPr>
-    <a:lvl8pPr marL="3200400" algn="l" defTabSz="457200" rtl="0" eaLnBrk="1" latinLnBrk="0" hangingPunct="1">
-      <a:defRPr sz="1200" kern="1200">
-        <a:solidFill>
-          <a:schemeClr val="tx1"/>
-        </a:solidFill>
-        <a:latin typeface="+mn-lt"/>
-        <a:ea typeface="+mn-ea"/>
-        <a:cs typeface="+mn-cs"/>
-      </a:defRPr>
-    </a:lvl8pPr>
-    <a:lvl9pPr marL="3657600" algn="l" defTabSz="457200" rtl="0" eaLnBrk="1" latinLnBrk="0" hangingPunct="1">
-      <a:defRPr sz="1200" kern="1200">
-        <a:solidFill>
-          <a:schemeClr val="tx1"/>
-        </a:solidFill>
-        <a:latin typeface="+mn-lt"/>
-        <a:ea typeface="+mn-ea"/>
-        <a:cs typeface="+mn-cs"/>
-      </a:defRPr>
-    </a:lvl9pPr>
-  </p:notesStyle>
-</p:notesMaster>
-</file>
-
-<file path=ppt/notesSlides/notesSlide1.xml><?xml version="1.0" encoding="utf-8"?>
-<p:notes xmlns:a="http://schemas.openxmlformats.org/drawingml/2006/main" xmlns:p="http://schemas.openxmlformats.org/presentationml/2006/main" xmlns:r="http://schemas.openxmlformats.org/officeDocument/2006/relationships">
-  <p:cSld>
-    <p:spTree>
-      <p:nvGrpSpPr>
-        <p:cNvPr id="1" name=""/>
-        <p:cNvGrpSpPr/>
-        <p:nvPr/>
-      </p:nvGrpSpPr>
-      <p:grpSpPr>
-        <a:xfrm>
-          <a:off x="0" y="0"/>
-          <a:ext cx="0" cy="0"/>
-          <a:chOff x="0" y="0"/>
-          <a:chExt cx="0" cy="0"/>
-        </a:xfrm>
-      </p:grpSpPr>
-      <p:sp>
-        <p:nvSpPr>
-          <p:cNvPr id="2" name="Slide Image Placeholder 1"/>
-          <p:cNvSpPr>
-            <a:spLocks noGrp="1"/>
-          </p:cNvSpPr>
-          <p:nvPr>
-            <p:ph type="sldImg" idx="2"/>
-          </p:nvPr>
-        </p:nvSpPr>
-        <p:spPr/>
-      </p:sp>
-      <p:sp>
-        <p:nvSpPr>
-          <p:cNvPr id="3" name="Notes Placeholder 2"/>
-          <p:cNvSpPr>
-            <a:spLocks noGrp="1"/>
-          </p:cNvSpPr>
-          <p:nvPr>
-            <p:ph type="body" idx="3" sz="quarter"/>
-          </p:nvPr>
-        </p:nvSpPr>
-        <p:spPr/>
-        <p:txBody>
-          <a:bodyPr/>
-          <a:lstStyle/>
-          <a:p>
-            <a:r>
-              <a:t>FIRST 45 SEC | PAIN + THESIS</a:t>
-            </a:r>
-          </a:p>
-          <a:p>
-            <a:r>
-              <a:t>"When a strategic trigger fires in your organization today — who calls who? Where's the brief? Who owns it? Who authorizes?"</a:t>
-            </a:r>
-          </a:p>
-          <a:p>
-            <a:r>
-              <a:t>"Most Fortune 1000s spend 30 days figuring that out. While the window closes. The regulator moves. The competitor acts."</a:t>
-            </a:r>
-          </a:p>
-          <a:p>
-            <a:r>
-              <a:t>[Point RIGHT] "This is Readiness OS. What you're looking at is a live Command Tower — 221 triggers armed, 20 active detections."</a:t>
-            </a:r>
-          </a:p>
-          <a:p>
-            <a:r>
-              <a:t>[Point LEFT] "The old model. We replace it."</a:t>
-            </a:r>
-          </a:p>
-          <a:p>
-            <a:r>
-              <a:t>Pause. Let the visual contrast land.</a:t>
-            </a:r>
-          </a:p>
-        </p:txBody>
-      </p:sp>
-      <p:sp>
-        <p:nvSpPr>
-          <p:cNvPr id="4" name="Slide Number Placeholder 3"/>
-          <p:cNvSpPr>
-            <a:spLocks noGrp="1"/>
-          </p:cNvSpPr>
-          <p:nvPr>
-            <p:ph type="sldNum" idx="5" sz="quarter"/>
-          </p:nvPr>
-        </p:nvSpPr>
-        <p:spPr/>
-      </p:sp>
-    </p:spTree>
-  </p:cSld>
-  <p:clrMapOvr>
-    <a:masterClrMapping/>
-  </p:clrMapOvr>
-</p:notes>
-</file>
-
-<file path=ppt/notesSlides/notesSlide10.xml><?xml version="1.0" encoding="utf-8"?>
-<p:notes xmlns:a="http://schemas.openxmlformats.org/drawingml/2006/main" xmlns:p="http://schemas.openxmlformats.org/presentationml/2006/main" xmlns:r="http://schemas.openxmlformats.org/officeDocument/2006/relationships">
-  <p:cSld>
-    <p:spTree>
-      <p:nvGrpSpPr>
-        <p:cNvPr id="1" name=""/>
-        <p:cNvGrpSpPr/>
-        <p:nvPr/>
-      </p:nvGrpSpPr>
-      <p:grpSpPr>
-        <a:xfrm>
-          <a:off x="0" y="0"/>
-          <a:ext cx="0" cy="0"/>
-          <a:chOff x="0" y="0"/>
-          <a:chExt cx="0" cy="0"/>
-        </a:xfrm>
-      </p:grpSpPr>
-      <p:sp>
-        <p:nvSpPr>
-          <p:cNvPr id="2" name="Slide Image Placeholder 1"/>
-          <p:cNvSpPr>
-            <a:spLocks noGrp="1"/>
-          </p:cNvSpPr>
-          <p:nvPr>
-            <p:ph type="sldImg" idx="2"/>
-          </p:nvPr>
-        </p:nvSpPr>
-        <p:spPr/>
-      </p:sp>
-      <p:sp>
-        <p:nvSpPr>
-          <p:cNvPr id="3" name="Notes Placeholder 2"/>
-          <p:cNvSpPr>
-            <a:spLocks noGrp="1"/>
-          </p:cNvSpPr>
-          <p:nvPr>
-            <p:ph type="body" idx="3" sz="quarter"/>
-          </p:nvPr>
-        </p:nvSpPr>
-        <p:spPr/>
-        <p:txBody>
-          <a:bodyPr/>
-          <a:lstStyle/>
-          <a:p>
-            <a:r>
-              <a:t>NEXT 60 SEC — PROOF OF REALITY</a:t>
-            </a:r>
-          </a:p>
-          <a:p>
-            <a:r>
-              <a:t>"What you're looking at are four live production surfaces. Not mockups. Not demos."</a:t>
-            </a:r>
-          </a:p>
-          <a:p>
-            <a:r>
-              <a:t>"You can visit vaughnmartin.com right now and walk through each one."</a:t>
-            </a:r>
-          </a:p>
-          <a:p>
-            <a:r>
-              <a:t>[Check 1] "Onboarding is live — four phases, go-live readiness score."</a:t>
-            </a:r>
-          </a:p>
-          <a:p>
-            <a:r>
-              <a:t>[Check 2] "Protocol flow is live — 170 protocols browsable, 3 full previews without sign-in."</a:t>
-            </a:r>
-          </a:p>
-          <a:p>
-            <a:r>
-              <a:t>[Check 3] "Buyer packet is live — board-ready executive brief, printable in one click."</a:t>
-            </a:r>
-          </a:p>
-          <a:p>
-            <a:r>
-              <a:t>"Production software. Active use paths. Now." </a:t>
-            </a:r>
-          </a:p>
-        </p:txBody>
-      </p:sp>
-      <p:sp>
-        <p:nvSpPr>
-          <p:cNvPr id="4" name="Slide Number Placeholder 3"/>
-          <p:cNvSpPr>
-            <a:spLocks noGrp="1"/>
-          </p:cNvSpPr>
-          <p:nvPr>
-            <p:ph type="sldNum" idx="5" sz="quarter"/>
-          </p:nvPr>
-        </p:nvSpPr>
-        <p:spPr/>
-      </p:sp>
-    </p:spTree>
-  </p:cSld>
-  <p:clrMapOvr>
-    <a:masterClrMapping/>
-  </p:clrMapOvr>
-</p:notes>
-</file>
-
-<file path=ppt/notesSlides/notesSlide11.xml><?xml version="1.0" encoding="utf-8"?>
-<p:notes xmlns:a="http://schemas.openxmlformats.org/drawingml/2006/main" xmlns:p="http://schemas.openxmlformats.org/presentationml/2006/main" xmlns:r="http://schemas.openxmlformats.org/officeDocument/2006/relationships">
-  <p:cSld>
-    <p:spTree>
-      <p:nvGrpSpPr>
-        <p:cNvPr id="1" name=""/>
-        <p:cNvGrpSpPr/>
-        <p:nvPr/>
-      </p:nvGrpSpPr>
-      <p:grpSpPr>
-        <a:xfrm>
-          <a:off x="0" y="0"/>
-          <a:ext cx="0" cy="0"/>
-          <a:chOff x="0" y="0"/>
-          <a:chExt cx="0" cy="0"/>
-        </a:xfrm>
-      </p:grpSpPr>
-      <p:sp>
-        <p:nvSpPr>
-          <p:cNvPr id="2" name="Slide Image Placeholder 1"/>
-          <p:cNvSpPr>
-            <a:spLocks noGrp="1"/>
-          </p:cNvSpPr>
-          <p:nvPr>
-            <p:ph type="sldImg" idx="2"/>
-          </p:nvPr>
-        </p:nvSpPr>
-        <p:spPr/>
-      </p:sp>
-      <p:sp>
-        <p:nvSpPr>
-          <p:cNvPr id="3" name="Notes Placeholder 2"/>
-          <p:cNvSpPr>
-            <a:spLocks noGrp="1"/>
-          </p:cNvSpPr>
-          <p:nvPr>
-            <p:ph type="body" idx="3" sz="quarter"/>
-          </p:nvPr>
-        </p:nvSpPr>
-        <p:spPr/>
-        <p:txBody>
-          <a:bodyPr/>
-          <a:lstStyle/>
-          <a:p>
-            <a:r>
-              <a:t>FINAL 30 SEC — COMMERCIAL MOTION</a:t>
-            </a:r>
-          </a:p>
-          <a:p>
-            <a:r>
-              <a:t>[ICP column] "We are laser-focused on Fortune 1000 with 3+ strategic domains and reactive coordination history."</a:t>
-            </a:r>
-          </a:p>
-          <a:p>
-            <a:r>
-              <a:t>[Engagement column] "12 Founding Partner slots. $75K–$250K. 90-day validation structure."</a:t>
-            </a:r>
-          </a:p>
-          <a:p>
-            <a:r>
-              <a:t>[Outcome column] "Success by day 90: first activation complete, response compressed, ROI baseline established."</a:t>
-            </a:r>
-          </a:p>
-          <a:p>
-            <a:r>
-              <a:t>"We're raising up to $1M. Product hardening, enterprise controls, Founding Partner GTM."</a:t>
-            </a:r>
-          </a:p>
-          <a:p>
-            <a:r>
-              <a:t>"12 slots. The program closes when they're full." </a:t>
-            </a:r>
-          </a:p>
-        </p:txBody>
-      </p:sp>
-      <p:sp>
-        <p:nvSpPr>
-          <p:cNvPr id="4" name="Slide Number Placeholder 3"/>
-          <p:cNvSpPr>
-            <a:spLocks noGrp="1"/>
-          </p:cNvSpPr>
-          <p:nvPr>
-            <p:ph type="sldNum" idx="5" sz="quarter"/>
-          </p:nvPr>
-        </p:nvSpPr>
-        <p:spPr/>
-      </p:sp>
-    </p:spTree>
-  </p:cSld>
-  <p:clrMapOvr>
-    <a:masterClrMapping/>
-  </p:clrMapOvr>
-</p:notes>
-</file>
-
-<file path=ppt/notesSlides/notesSlide12.xml><?xml version="1.0" encoding="utf-8"?>
-<p:notes xmlns:a="http://schemas.openxmlformats.org/drawingml/2006/main" xmlns:p="http://schemas.openxmlformats.org/presentationml/2006/main" xmlns:r="http://schemas.openxmlformats.org/officeDocument/2006/relationships">
-  <p:cSld>
-    <p:spTree>
-      <p:nvGrpSpPr>
-        <p:cNvPr id="1" name=""/>
-        <p:cNvGrpSpPr/>
-        <p:nvPr/>
-      </p:nvGrpSpPr>
-      <p:grpSpPr>
-        <a:xfrm>
-          <a:off x="0" y="0"/>
-          <a:ext cx="0" cy="0"/>
-          <a:chOff x="0" y="0"/>
-          <a:chExt cx="0" cy="0"/>
-        </a:xfrm>
-      </p:grpSpPr>
-      <p:sp>
-        <p:nvSpPr>
-          <p:cNvPr id="2" name="Slide Image Placeholder 1"/>
-          <p:cNvSpPr>
-            <a:spLocks noGrp="1"/>
-          </p:cNvSpPr>
-          <p:nvPr>
-            <p:ph type="sldImg" idx="2"/>
-          </p:nvPr>
-        </p:nvSpPr>
-        <p:spPr/>
-      </p:sp>
-      <p:sp>
-        <p:nvSpPr>
-          <p:cNvPr id="3" name="Notes Placeholder 2"/>
-          <p:cNvSpPr>
-            <a:spLocks noGrp="1"/>
-          </p:cNvSpPr>
-          <p:nvPr>
-            <p:ph type="body" idx="3" sz="quarter"/>
-          </p:nvPr>
-        </p:nvSpPr>
-        <p:spPr/>
-        <p:txBody>
-          <a:bodyPr/>
-          <a:lstStyle/>
-          <a:p>
-            <a:r>
-              <a:t>FINAL 30 SEC — THE ASK</a:t>
-            </a:r>
-          </a:p>
-          <a:p>
-            <a:r>
-              <a:t>[Read the headline one time, slowly]</a:t>
-            </a:r>
-          </a:p>
-          <a:p>
-            <a:r>
-              <a:t>"The response is ready before the trigger fires."</a:t>
-            </a:r>
-          </a:p>
-          <a:p>
-            <a:r>
-              <a:t>[Pause 3 seconds]</a:t>
-            </a:r>
-          </a:p>
-          <a:p>
-            <a:r>
-              <a:t>"We are seeking 12 Founding Partners and aligned investors for scaled rollout."</a:t>
-            </a:r>
-          </a:p>
-          <a:p>
-            <a:r>
-              <a:t>"vaughnmartin.com/founding-partner — or reach me directly after this session."</a:t>
-            </a:r>
-          </a:p>
-          <a:p>
-            <a:r>
-              <a:t>[Final line] "If advantage belongs to teams that see earlier and execute decisively — let's partner."</a:t>
-            </a:r>
-          </a:p>
-          <a:p>
-            <a:r>
-              <a:t>[Sit down. Don't add anything. Let it land.]</a:t>
-            </a:r>
-          </a:p>
-        </p:txBody>
-      </p:sp>
-      <p:sp>
-        <p:nvSpPr>
-          <p:cNvPr id="4" name="Slide Number Placeholder 3"/>
-          <p:cNvSpPr>
-            <a:spLocks noGrp="1"/>
-          </p:cNvSpPr>
-          <p:nvPr>
-            <p:ph type="sldNum" idx="5" sz="quarter"/>
-          </p:nvPr>
-        </p:nvSpPr>
-        <p:spPr/>
-      </p:sp>
-    </p:spTree>
-  </p:cSld>
-  <p:clrMapOvr>
-    <a:masterClrMapping/>
-  </p:clrMapOvr>
-</p:notes>
-</file>
-
-<file path=ppt/notesSlides/notesSlide2.xml><?xml version="1.0" encoding="utf-8"?>
-<p:notes xmlns:a="http://schemas.openxmlformats.org/drawingml/2006/main" xmlns:p="http://schemas.openxmlformats.org/presentationml/2006/main" xmlns:r="http://schemas.openxmlformats.org/officeDocument/2006/relationships">
-  <p:cSld>
-    <p:spTree>
-      <p:nvGrpSpPr>
-        <p:cNvPr id="1" name=""/>
-        <p:cNvGrpSpPr/>
-        <p:nvPr/>
-      </p:nvGrpSpPr>
-      <p:grpSpPr>
-        <a:xfrm>
-          <a:off x="0" y="0"/>
-          <a:ext cx="0" cy="0"/>
-          <a:chOff x="0" y="0"/>
-          <a:chExt cx="0" cy="0"/>
-        </a:xfrm>
-      </p:grpSpPr>
-      <p:sp>
-        <p:nvSpPr>
-          <p:cNvPr id="2" name="Slide Image Placeholder 1"/>
-          <p:cNvSpPr>
-            <a:spLocks noGrp="1"/>
-          </p:cNvSpPr>
-          <p:nvPr>
-            <p:ph type="sldImg" idx="2"/>
-          </p:nvPr>
-        </p:nvSpPr>
-        <p:spPr/>
-      </p:sp>
-      <p:sp>
-        <p:nvSpPr>
-          <p:cNvPr id="3" name="Notes Placeholder 2"/>
-          <p:cNvSpPr>
-            <a:spLocks noGrp="1"/>
-          </p:cNvSpPr>
-          <p:nvPr>
-            <p:ph type="body" idx="3" sz="quarter"/>
-          </p:nvPr>
-        </p:nvSpPr>
-        <p:spPr/>
-        <p:txBody>
-          <a:bodyPr/>
-          <a:lstStyle/>
-          <a:p>
-            <a:r>
-              <a:t>FIRST 45 SEC CONTINUED</a:t>
-            </a:r>
-          </a:p>
-          <a:p>
-            <a:r>
-              <a:t>Walk the three bullets.</a:t>
-            </a:r>
-          </a:p>
-          <a:p>
-            <a:r>
-              <a:t>"These three failures are sequential — and they compound. You cannot fix the third without solving the first."</a:t>
-            </a:r>
-          </a:p>
-          <a:p>
-            <a:r>
-              <a:t>"Trigger noticed too late. Authority unclear. Coordination starts after the window closes."</a:t>
-            </a:r>
-          </a:p>
-          <a:p>
-            <a:r>
-              <a:t>"The cost is not effort. The cost is sequence. We change the sequence."</a:t>
-            </a:r>
-          </a:p>
-          <a:p>
-            <a:r>
-              <a:t>Transition: "Here's how." </a:t>
-            </a:r>
-          </a:p>
-        </p:txBody>
-      </p:sp>
-      <p:sp>
-        <p:nvSpPr>
-          <p:cNvPr id="4" name="Slide Number Placeholder 3"/>
-          <p:cNvSpPr>
-            <a:spLocks noGrp="1"/>
-          </p:cNvSpPr>
-          <p:nvPr>
-            <p:ph type="sldNum" idx="5" sz="quarter"/>
-          </p:nvPr>
-        </p:nvSpPr>
-        <p:spPr/>
-      </p:sp>
-    </p:spTree>
-  </p:cSld>
-  <p:clrMapOvr>
-    <a:masterClrMapping/>
-  </p:clrMapOvr>
-</p:notes>
-</file>
-
-<file path=ppt/notesSlides/notesSlide3.xml><?xml version="1.0" encoding="utf-8"?>
-<p:notes xmlns:a="http://schemas.openxmlformats.org/drawingml/2006/main" xmlns:p="http://schemas.openxmlformats.org/presentationml/2006/main" xmlns:r="http://schemas.openxmlformats.org/officeDocument/2006/relationships">
-  <p:cSld>
-    <p:spTree>
-      <p:nvGrpSpPr>
-        <p:cNvPr id="1" name=""/>
-        <p:cNvGrpSpPr/>
-        <p:nvPr/>
-      </p:nvGrpSpPr>
-      <p:grpSpPr>
-        <a:xfrm>
-          <a:off x="0" y="0"/>
-          <a:ext cx="0" cy="0"/>
-          <a:chOff x="0" y="0"/>
-          <a:chExt cx="0" cy="0"/>
-        </a:xfrm>
-      </p:grpSpPr>
-      <p:sp>
-        <p:nvSpPr>
-          <p:cNvPr id="2" name="Slide Image Placeholder 1"/>
-          <p:cNvSpPr>
-            <a:spLocks noGrp="1"/>
-          </p:cNvSpPr>
-          <p:nvPr>
-            <p:ph type="sldImg" idx="2"/>
-          </p:nvPr>
-        </p:nvSpPr>
-        <p:spPr/>
-      </p:sp>
-      <p:sp>
-        <p:nvSpPr>
-          <p:cNvPr id="3" name="Notes Placeholder 2"/>
-          <p:cNvSpPr>
-            <a:spLocks noGrp="1"/>
-          </p:cNvSpPr>
-          <p:nvPr>
-            <p:ph type="body" idx="3" sz="quarter"/>
-          </p:nvPr>
-        </p:nvSpPr>
-        <p:spPr/>
-        <p:txBody>
-          <a:bodyPr/>
-          <a:lstStyle/>
-          <a:p>
-            <a:r>
-              <a:t>FIRST 45 SEC — THESIS LANDING (must land hard)</a:t>
-            </a:r>
-          </a:p>
-          <a:p>
-            <a:r>
-              <a:t>[Formula visible on screen] "Signal Lead Time + Mobilization Compression = Compounding Advantage."</a:t>
-            </a:r>
-          </a:p>
-          <a:p>
-            <a:r>
-              <a:t>"We give you both stages. Stage one: you see it earlier. Stage two: you act in 12 minutes."</a:t>
-            </a:r>
-          </a:p>
-          <a:p>
-            <a:r>
-              <a:t>"But signal advantage must come first. You cannot execute what you haven't detected."</a:t>
-            </a:r>
-          </a:p>
-          <a:p>
-            <a:r>
-              <a:t>"248+ data points. 221 customer-defined triggers. 170 protocols pre-staged. 9 domains."</a:t>
-            </a:r>
-          </a:p>
-          <a:p>
-            <a:r>
-              <a:t>"Let me show you what this looks like in the product." </a:t>
-            </a:r>
-          </a:p>
-        </p:txBody>
-      </p:sp>
-      <p:sp>
-        <p:nvSpPr>
-          <p:cNvPr id="4" name="Slide Number Placeholder 3"/>
-          <p:cNvSpPr>
-            <a:spLocks noGrp="1"/>
-          </p:cNvSpPr>
-          <p:nvPr>
-            <p:ph type="sldNum" idx="5" sz="quarter"/>
-          </p:nvPr>
-        </p:nvSpPr>
-        <p:spPr/>
-      </p:sp>
-    </p:spTree>
-  </p:cSld>
-  <p:clrMapOvr>
-    <a:masterClrMapping/>
-  </p:clrMapOvr>
-</p:notes>
-</file>
-
-<file path=ppt/notesSlides/notesSlide4.xml><?xml version="1.0" encoding="utf-8"?>
-<p:notes xmlns:a="http://schemas.openxmlformats.org/drawingml/2006/main" xmlns:p="http://schemas.openxmlformats.org/presentationml/2006/main" xmlns:r="http://schemas.openxmlformats.org/officeDocument/2006/relationships">
-  <p:cSld>
-    <p:spTree>
-      <p:nvGrpSpPr>
-        <p:cNvPr id="1" name=""/>
-        <p:cNvGrpSpPr/>
-        <p:nvPr/>
-      </p:nvGrpSpPr>
-      <p:grpSpPr>
-        <a:xfrm>
-          <a:off x="0" y="0"/>
-          <a:ext cx="0" cy="0"/>
-          <a:chOff x="0" y="0"/>
-          <a:chExt cx="0" cy="0"/>
-        </a:xfrm>
-      </p:grpSpPr>
-      <p:sp>
-        <p:nvSpPr>
-          <p:cNvPr id="2" name="Slide Image Placeholder 1"/>
-          <p:cNvSpPr>
-            <a:spLocks noGrp="1"/>
-          </p:cNvSpPr>
-          <p:nvPr>
-            <p:ph type="sldImg" idx="2"/>
-          </p:nvPr>
-        </p:nvSpPr>
-        <p:spPr/>
-      </p:sp>
-      <p:sp>
-        <p:nvSpPr>
-          <p:cNvPr id="3" name="Notes Placeholder 2"/>
-          <p:cNvSpPr>
-            <a:spLocks noGrp="1"/>
-          </p:cNvSpPr>
-          <p:nvPr>
-            <p:ph type="body" idx="3" sz="quarter"/>
-          </p:nvPr>
-        </p:nvSpPr>
-        <p:spPr/>
-        <p:txBody>
-          <a:bodyPr/>
-          <a:lstStyle/>
-          <a:p>
-            <a:r>
-              <a:t>NEXT 2 MIN — PRODUCT PROOF</a:t>
-            </a:r>
-          </a:p>
-          <a:p>
-            <a:r>
-              <a:t>[Point to CRITICAL alert callout] "Right now, there is a CRITICAL cybersecurity breach signal — 97% confidence. The system detected it."</a:t>
-            </a:r>
-          </a:p>
-          <a:p>
-            <a:r>
-              <a:t>[Point to Decision Window callout] "The decision window is open. Leadership can see what is forming."</a:t>
-            </a:r>
-          </a:p>
-          <a:p>
-            <a:r>
-              <a:t>[Point to Protocol Path callout] "The recommended protocol is already matched. Pre-staged. Waiting only for authorization."</a:t>
-            </a:r>
-          </a:p>
-          <a:p>
-            <a:r>
-              <a:t>"This is the Command Tower. The executive live display. Auto-refreshing. Board-accessible."</a:t>
-            </a:r>
-          </a:p>
-          <a:p>
-            <a:r>
-              <a:t>"Leadership sees what is forming — and what to do about it — before anyone else knows." </a:t>
-            </a:r>
-          </a:p>
-        </p:txBody>
-      </p:sp>
-      <p:sp>
-        <p:nvSpPr>
-          <p:cNvPr id="4" name="Slide Number Placeholder 3"/>
-          <p:cNvSpPr>
-            <a:spLocks noGrp="1"/>
-          </p:cNvSpPr>
-          <p:nvPr>
-            <p:ph type="sldNum" idx="5" sz="quarter"/>
-          </p:nvPr>
-        </p:nvSpPr>
-        <p:spPr/>
-      </p:sp>
-    </p:spTree>
-  </p:cSld>
-  <p:clrMapOvr>
-    <a:masterClrMapping/>
-  </p:clrMapOvr>
-</p:notes>
-</file>
-
-<file path=ppt/notesSlides/notesSlide5.xml><?xml version="1.0" encoding="utf-8"?>
-<p:notes xmlns:a="http://schemas.openxmlformats.org/drawingml/2006/main" xmlns:p="http://schemas.openxmlformats.org/presentationml/2006/main" xmlns:r="http://schemas.openxmlformats.org/officeDocument/2006/relationships">
-  <p:cSld>
-    <p:spTree>
-      <p:nvGrpSpPr>
-        <p:cNvPr id="1" name=""/>
-        <p:cNvGrpSpPr/>
-        <p:nvPr/>
-      </p:nvGrpSpPr>
-      <p:grpSpPr>
-        <a:xfrm>
-          <a:off x="0" y="0"/>
-          <a:ext cx="0" cy="0"/>
-          <a:chOff x="0" y="0"/>
-          <a:chExt cx="0" cy="0"/>
-        </a:xfrm>
-      </p:grpSpPr>
-      <p:sp>
-        <p:nvSpPr>
-          <p:cNvPr id="2" name="Slide Image Placeholder 1"/>
-          <p:cNvSpPr>
-            <a:spLocks noGrp="1"/>
-          </p:cNvSpPr>
-          <p:nvPr>
-            <p:ph type="sldImg" idx="2"/>
-          </p:nvPr>
-        </p:nvSpPr>
-        <p:spPr/>
-      </p:sp>
-      <p:sp>
-        <p:nvSpPr>
-          <p:cNvPr id="3" name="Notes Placeholder 2"/>
-          <p:cNvSpPr>
-            <a:spLocks noGrp="1"/>
-          </p:cNvSpPr>
-          <p:nvPr>
-            <p:ph type="body" idx="3" sz="quarter"/>
-          </p:nvPr>
-        </p:nvSpPr>
-        <p:spPr/>
-        <p:txBody>
-          <a:bodyPr/>
-          <a:lstStyle/>
-          <a:p>
-            <a:r>
-              <a:t>NEXT 2 MIN — PRODUCT PROOF CONTINUED</a:t>
-            </a:r>
-          </a:p>
-          <a:p>
-            <a:r>
-              <a:t>[Point to Threshold callout] "The customer defines the exact threshold. Not a vendor default."</a:t>
-            </a:r>
-          </a:p>
-          <a:p>
-            <a:r>
-              <a:t>[Point to Escalation callout] "And the escalation path — who gets alerted, in what order, at what confidence level."</a:t>
-            </a:r>
-          </a:p>
-          <a:p>
-            <a:r>
-              <a:t>"248 data points. 9 domains. Every 15 minutes. Continuously."</a:t>
-            </a:r>
-          </a:p>
-          <a:p>
-            <a:r>
-              <a:t>"Detection happens on customer terms. That's the core of signal advantage." </a:t>
-            </a:r>
-          </a:p>
-        </p:txBody>
-      </p:sp>
-      <p:sp>
-        <p:nvSpPr>
-          <p:cNvPr id="4" name="Slide Number Placeholder 3"/>
-          <p:cNvSpPr>
-            <a:spLocks noGrp="1"/>
-          </p:cNvSpPr>
-          <p:nvPr>
-            <p:ph type="sldNum" idx="5" sz="quarter"/>
-          </p:nvPr>
-        </p:nvSpPr>
-        <p:spPr/>
-      </p:sp>
-    </p:spTree>
-  </p:cSld>
-  <p:clrMapOvr>
-    <a:masterClrMapping/>
-  </p:clrMapOvr>
-</p:notes>
-</file>
-
-<file path=ppt/notesSlides/notesSlide6.xml><?xml version="1.0" encoding="utf-8"?>
-<p:notes xmlns:a="http://schemas.openxmlformats.org/drawingml/2006/main" xmlns:p="http://schemas.openxmlformats.org/presentationml/2006/main" xmlns:r="http://schemas.openxmlformats.org/officeDocument/2006/relationships">
-  <p:cSld>
-    <p:spTree>
-      <p:nvGrpSpPr>
-        <p:cNvPr id="1" name=""/>
-        <p:cNvGrpSpPr/>
-        <p:nvPr/>
-      </p:nvGrpSpPr>
-      <p:grpSpPr>
-        <a:xfrm>
-          <a:off x="0" y="0"/>
-          <a:ext cx="0" cy="0"/>
-          <a:chOff x="0" y="0"/>
-          <a:chExt cx="0" cy="0"/>
-        </a:xfrm>
-      </p:grpSpPr>
-      <p:sp>
-        <p:nvSpPr>
-          <p:cNvPr id="2" name="Slide Image Placeholder 1"/>
-          <p:cNvSpPr>
-            <a:spLocks noGrp="1"/>
-          </p:cNvSpPr>
-          <p:nvPr>
-            <p:ph type="sldImg" idx="2"/>
-          </p:nvPr>
-        </p:nvSpPr>
-        <p:spPr/>
-      </p:sp>
-      <p:sp>
-        <p:nvSpPr>
-          <p:cNvPr id="3" name="Notes Placeholder 2"/>
-          <p:cNvSpPr>
-            <a:spLocks noGrp="1"/>
-          </p:cNvSpPr>
-          <p:nvPr>
-            <p:ph type="body" idx="3" sz="quarter"/>
-          </p:nvPr>
-        </p:nvSpPr>
-        <p:spPr/>
-        <p:txBody>
-          <a:bodyPr/>
-          <a:lstStyle/>
-          <a:p>
-            <a:r>
-              <a:t>NEXT 2 MIN — PRODUCT PROOF CONTINUED</a:t>
-            </a:r>
-          </a:p>
-          <a:p>
-            <a:r>
-              <a:t>[Bold headline visible] "AI monitors. Executives authorize."</a:t>
-            </a:r>
-          </a:p>
-          <a:p>
-            <a:r>
-              <a:t>[Point to Governance block] "Every authorization is timestamped, logged, and board-exportable. Audit trail is active."</a:t>
-            </a:r>
-          </a:p>
-          <a:p>
-            <a:r>
-              <a:t>"Four choices at every gate: Authorize. Stand Down. Delegate. Defer."</a:t>
-            </a:r>
-          </a:p>
-          <a:p>
-            <a:r>
-              <a:t>"No action deploys without sign-off. Ever. This is not autonomous execution."</a:t>
-            </a:r>
-          </a:p>
-          <a:p>
-            <a:r>
-              <a:t>"The preparation compresses the mobilization cycle. The decision remains human." </a:t>
-            </a:r>
-          </a:p>
-        </p:txBody>
-      </p:sp>
-      <p:sp>
-        <p:nvSpPr>
-          <p:cNvPr id="4" name="Slide Number Placeholder 3"/>
-          <p:cNvSpPr>
-            <a:spLocks noGrp="1"/>
-          </p:cNvSpPr>
-          <p:nvPr>
-            <p:ph type="sldNum" idx="5" sz="quarter"/>
-          </p:nvPr>
-        </p:nvSpPr>
-        <p:spPr/>
-      </p:sp>
-    </p:spTree>
-  </p:cSld>
-  <p:clrMapOvr>
-    <a:masterClrMapping/>
-  </p:clrMapOvr>
-</p:notes>
-</file>
-
-<file path=ppt/notesSlides/notesSlide7.xml><?xml version="1.0" encoding="utf-8"?>
-<p:notes xmlns:a="http://schemas.openxmlformats.org/drawingml/2006/main" xmlns:p="http://schemas.openxmlformats.org/presentationml/2006/main" xmlns:r="http://schemas.openxmlformats.org/officeDocument/2006/relationships">
-  <p:cSld>
-    <p:spTree>
-      <p:nvGrpSpPr>
-        <p:cNvPr id="1" name=""/>
-        <p:cNvGrpSpPr/>
-        <p:nvPr/>
-      </p:nvGrpSpPr>
-      <p:grpSpPr>
-        <a:xfrm>
-          <a:off x="0" y="0"/>
-          <a:ext cx="0" cy="0"/>
-          <a:chOff x="0" y="0"/>
-          <a:chExt cx="0" cy="0"/>
-        </a:xfrm>
-      </p:grpSpPr>
-      <p:sp>
-        <p:nvSpPr>
-          <p:cNvPr id="2" name="Slide Image Placeholder 1"/>
-          <p:cNvSpPr>
-            <a:spLocks noGrp="1"/>
-          </p:cNvSpPr>
-          <p:nvPr>
-            <p:ph type="sldImg" idx="2"/>
-          </p:nvPr>
-        </p:nvSpPr>
-        <p:spPr/>
-      </p:sp>
-      <p:sp>
-        <p:nvSpPr>
-          <p:cNvPr id="3" name="Notes Placeholder 2"/>
-          <p:cNvSpPr>
-            <a:spLocks noGrp="1"/>
-          </p:cNvSpPr>
-          <p:nvPr>
-            <p:ph type="body" idx="3" sz="quarter"/>
-          </p:nvPr>
-        </p:nvSpPr>
-        <p:spPr/>
-        <p:txBody>
-          <a:bodyPr/>
-          <a:lstStyle/>
-          <a:p>
-            <a:r>
-              <a:t>NEXT 2 MIN — PRODUCT PROOF CONTINUED</a:t>
-            </a:r>
-          </a:p>
-          <a:p>
-            <a:r>
-              <a:t>"Authorization triggers coordination across four dimensions simultaneously."</a:t>
-            </a:r>
-          </a:p>
-          <a:p>
-            <a:r>
-              <a:t>[Point to Roles] "Roles: every person already knows their assignment."</a:t>
-            </a:r>
-          </a:p>
-          <a:p>
-            <a:r>
-              <a:t>[Point to Budget] "Budget: pre-allocated authority releases at authorization."</a:t>
-            </a:r>
-          </a:p>
-          <a:p>
-            <a:r>
-              <a:t>[Point to Internal] "Internal comms: leadership team alerted in parallel."</a:t>
-            </a:r>
-          </a:p>
-          <a:p>
-            <a:r>
-              <a:t>[Point to External] "External comms: board, counsel, regulators — notified immediately."</a:t>
-            </a:r>
-          </a:p>
-          <a:p>
-            <a:r>
-              <a:t>"12 minutes. Not 30 days. Because everything was pre-staged." </a:t>
-            </a:r>
-          </a:p>
-        </p:txBody>
-      </p:sp>
-      <p:sp>
-        <p:nvSpPr>
-          <p:cNvPr id="4" name="Slide Number Placeholder 3"/>
-          <p:cNvSpPr>
-            <a:spLocks noGrp="1"/>
-          </p:cNvSpPr>
-          <p:nvPr>
-            <p:ph type="sldNum" idx="5" sz="quarter"/>
-          </p:nvPr>
-        </p:nvSpPr>
-        <p:spPr/>
-      </p:sp>
-    </p:spTree>
-  </p:cSld>
-  <p:clrMapOvr>
-    <a:masterClrMapping/>
-  </p:clrMapOvr>
-</p:notes>
-</file>
-
-<file path=ppt/notesSlides/notesSlide8.xml><?xml version="1.0" encoding="utf-8"?>
-<p:notes xmlns:a="http://schemas.openxmlformats.org/drawingml/2006/main" xmlns:p="http://schemas.openxmlformats.org/presentationml/2006/main" xmlns:r="http://schemas.openxmlformats.org/officeDocument/2006/relationships">
-  <p:cSld>
-    <p:spTree>
-      <p:nvGrpSpPr>
-        <p:cNvPr id="1" name=""/>
-        <p:cNvGrpSpPr/>
-        <p:nvPr/>
-      </p:nvGrpSpPr>
-      <p:grpSpPr>
-        <a:xfrm>
-          <a:off x="0" y="0"/>
-          <a:ext cx="0" cy="0"/>
-          <a:chOff x="0" y="0"/>
-          <a:chExt cx="0" cy="0"/>
-        </a:xfrm>
-      </p:grpSpPr>
-      <p:sp>
-        <p:nvSpPr>
-          <p:cNvPr id="2" name="Slide Image Placeholder 1"/>
-          <p:cNvSpPr>
-            <a:spLocks noGrp="1"/>
-          </p:cNvSpPr>
-          <p:nvPr>
-            <p:ph type="sldImg" idx="2"/>
-          </p:nvPr>
-        </p:nvSpPr>
-        <p:spPr/>
-      </p:sp>
-      <p:sp>
-        <p:nvSpPr>
-          <p:cNvPr id="3" name="Notes Placeholder 2"/>
-          <p:cNvSpPr>
-            <a:spLocks noGrp="1"/>
-          </p:cNvSpPr>
-          <p:nvPr>
-            <p:ph type="body" idx="3" sz="quarter"/>
-          </p:nvPr>
-        </p:nvSpPr>
-        <p:spPr/>
-        <p:txBody>
-          <a:bodyPr/>
-          <a:lstStyle/>
-          <a:p>
-            <a:r>
-              <a:t>NEXT 60 SEC — WHY THIS WINS (Learning)</a:t>
-            </a:r>
-          </a:p>
-          <a:p>
-            <a:r>
-              <a:t>[Read the headline]: "Every activation updates future readiness protocols."</a:t>
-            </a:r>
-          </a:p>
-          <a:p>
-            <a:r>
-              <a:t>"Each cycle encodes what worked. Signal weights refine. Protocol paths improve."</a:t>
-            </a:r>
-          </a:p>
-          <a:p>
-            <a:r>
-              <a:t>"+18% readiness improvement per activation cycle — measured, not estimated."</a:t>
-            </a:r>
-          </a:p>
-          <a:p>
-            <a:r>
-              <a:t>"The organization that runs Readiness OS for 12 months is categorically more prepared than the one that just signed up."</a:t>
-            </a:r>
-          </a:p>
-          <a:p>
-            <a:r>
-              <a:t>"That's the compounding moat." </a:t>
-            </a:r>
-          </a:p>
-        </p:txBody>
-      </p:sp>
-      <p:sp>
-        <p:nvSpPr>
-          <p:cNvPr id="4" name="Slide Number Placeholder 3"/>
-          <p:cNvSpPr>
-            <a:spLocks noGrp="1"/>
-          </p:cNvSpPr>
-          <p:nvPr>
-            <p:ph type="sldNum" idx="5" sz="quarter"/>
-          </p:nvPr>
-        </p:nvSpPr>
-        <p:spPr/>
-      </p:sp>
-    </p:spTree>
-  </p:cSld>
-  <p:clrMapOvr>
-    <a:masterClrMapping/>
-  </p:clrMapOvr>
-</p:notes>
-</file>
-
-<file path=ppt/notesSlides/notesSlide9.xml><?xml version="1.0" encoding="utf-8"?>
-<p:notes xmlns:a="http://schemas.openxmlformats.org/drawingml/2006/main" xmlns:p="http://schemas.openxmlformats.org/presentationml/2006/main" xmlns:r="http://schemas.openxmlformats.org/officeDocument/2006/relationships">
-  <p:cSld>
-    <p:spTree>
-      <p:nvGrpSpPr>
-        <p:cNvPr id="1" name=""/>
-        <p:cNvGrpSpPr/>
-        <p:nvPr/>
-      </p:nvGrpSpPr>
-      <p:grpSpPr>
-        <a:xfrm>
-          <a:off x="0" y="0"/>
-          <a:ext cx="0" cy="0"/>
-          <a:chOff x="0" y="0"/>
-          <a:chExt cx="0" cy="0"/>
-        </a:xfrm>
-      </p:grpSpPr>
-      <p:sp>
-        <p:nvSpPr>
-          <p:cNvPr id="2" name="Slide Image Placeholder 1"/>
-          <p:cNvSpPr>
-            <a:spLocks noGrp="1"/>
-          </p:cNvSpPr>
-          <p:nvPr>
-            <p:ph type="sldImg" idx="2"/>
-          </p:nvPr>
-        </p:nvSpPr>
-        <p:spPr/>
-      </p:sp>
-      <p:sp>
-        <p:nvSpPr>
-          <p:cNvPr id="3" name="Notes Placeholder 2"/>
-          <p:cNvSpPr>
-            <a:spLocks noGrp="1"/>
-          </p:cNvSpPr>
-          <p:nvPr>
-            <p:ph type="body" idx="3" sz="quarter"/>
-          </p:nvPr>
-        </p:nvSpPr>
-        <p:spPr/>
-        <p:txBody>
-          <a:bodyPr/>
-          <a:lstStyle/>
-          <a:p>
-            <a:r>
-              <a:t>NEXT 60 SEC — WHY THIS WINS (Killer Scenario)</a:t>
-            </a:r>
-          </a:p>
-          <a:p>
-            <a:r>
-              <a:t>"Let me make this concrete. One scenario. Two outcomes. The only variable: preparation."</a:t>
-            </a:r>
-          </a:p>
-          <a:p>
-            <a:r>
-              <a:t>[Walk the left column] "Without Readiness OS: Signal at T+0. CISO notified at 72 hours. War room on day 3. Plan drafted day 8. Coordination complete day 30."</a:t>
-            </a:r>
-          </a:p>
-          <a:p>
-            <a:r>
-              <a:t>[Walk the right column] "With Readiness OS: T+0 detected. T+2 protocol matched. T+8 authorized. T+12 full coordinated response."</a:t>
-            </a:r>
-          </a:p>
-          <a:p>
-            <a:r>
-              <a:t>"$47M regulatory exposure. Averted. Board notified before markets opened."</a:t>
-            </a:r>
-          </a:p>
-          <a:p>
-            <a:r>
-              <a:t>[Pause] "Same trigger. Entirely different outcome." </a:t>
-            </a:r>
-          </a:p>
-        </p:txBody>
-      </p:sp>
-      <p:sp>
-        <p:nvSpPr>
-          <p:cNvPr id="4" name="Slide Number Placeholder 3"/>
-          <p:cNvSpPr>
-            <a:spLocks noGrp="1"/>
-          </p:cNvSpPr>
-          <p:nvPr>
-            <p:ph type="sldNum" idx="5" sz="quarter"/>
-          </p:nvPr>
-        </p:nvSpPr>
-        <p:spPr/>
-      </p:sp>
-    </p:spTree>
-  </p:cSld>
-  <p:clrMapOvr>
-    <a:masterClrMapping/>
-  </p:clrMapOvr>
-</p:notes>
-</file>
-
 <file path=ppt/slideLayouts/slideLayout1.xml><?xml version="1.0" encoding="utf-8"?>
 <p:sldLayout xmlns:a="http://schemas.openxmlformats.org/drawingml/2006/main" xmlns:r="http://schemas.openxmlformats.org/officeDocument/2006/relationships" xmlns:p="http://schemas.openxmlformats.org/presentationml/2006/main" type="title" preserve="1">
   <p:cSld name="Title Slide">
@@ -4604,9 +3093,773 @@
         <p:nvPr/>
       </p:nvGrpSpPr>
       <p:grpSpPr/>
+      <p:sp>
+        <p:nvSpPr>
+          <p:cNvPr id="2" name="Rectangle 1"/>
+          <p:cNvSpPr/>
+          <p:nvPr/>
+        </p:nvSpPr>
+        <p:spPr>
+          <a:xfrm>
+            <a:off x="0" y="0"/>
+            <a:ext cx="5120640" cy="6858000"/>
+          </a:xfrm>
+          <a:prstGeom prst="rect">
+            <a:avLst/>
+          </a:prstGeom>
+          <a:solidFill>
+            <a:srgbClr val="0A0F2E"/>
+          </a:solidFill>
+          <a:ln>
+            <a:noFill/>
+          </a:ln>
+        </p:spPr>
+        <p:style>
+          <a:lnRef idx="1">
+            <a:schemeClr val="accent1"/>
+          </a:lnRef>
+          <a:fillRef idx="3">
+            <a:schemeClr val="accent1"/>
+          </a:fillRef>
+          <a:effectRef idx="2">
+            <a:schemeClr val="accent1"/>
+          </a:effectRef>
+          <a:fontRef idx="minor">
+            <a:schemeClr val="lt1"/>
+          </a:fontRef>
+        </p:style>
+        <p:txBody>
+          <a:bodyPr rtlCol="0" anchor="ctr"/>
+          <a:lstStyle/>
+          <a:p>
+            <a:pPr algn="ctr"/>
+          </a:p>
+        </p:txBody>
+      </p:sp>
+      <p:sp>
+        <p:nvSpPr>
+          <p:cNvPr id="3" name="Rectangle 2"/>
+          <p:cNvSpPr/>
+          <p:nvPr/>
+        </p:nvSpPr>
+        <p:spPr>
+          <a:xfrm>
+            <a:off x="0" y="0"/>
+            <a:ext cx="54864" cy="6858000"/>
+          </a:xfrm>
+          <a:prstGeom prst="rect">
+            <a:avLst/>
+          </a:prstGeom>
+          <a:solidFill>
+            <a:srgbClr val="C9A84C"/>
+          </a:solidFill>
+          <a:ln>
+            <a:noFill/>
+          </a:ln>
+        </p:spPr>
+        <p:style>
+          <a:lnRef idx="1">
+            <a:schemeClr val="accent1"/>
+          </a:lnRef>
+          <a:fillRef idx="3">
+            <a:schemeClr val="accent1"/>
+          </a:fillRef>
+          <a:effectRef idx="2">
+            <a:schemeClr val="accent1"/>
+          </a:effectRef>
+          <a:fontRef idx="minor">
+            <a:schemeClr val="lt1"/>
+          </a:fontRef>
+        </p:style>
+        <p:txBody>
+          <a:bodyPr rtlCol="0" anchor="ctr"/>
+          <a:lstStyle/>
+          <a:p>
+            <a:pPr algn="ctr"/>
+          </a:p>
+        </p:txBody>
+      </p:sp>
+      <p:sp>
+        <p:nvSpPr>
+          <p:cNvPr id="4" name="Rectangle 3"/>
+          <p:cNvSpPr/>
+          <p:nvPr/>
+        </p:nvSpPr>
+        <p:spPr>
+          <a:xfrm>
+            <a:off x="5129784" y="0"/>
+            <a:ext cx="7059168" cy="6858000"/>
+          </a:xfrm>
+          <a:prstGeom prst="rect">
+            <a:avLst/>
+          </a:prstGeom>
+          <a:solidFill>
+            <a:srgbClr val="0D1436"/>
+          </a:solidFill>
+          <a:ln>
+            <a:noFill/>
+          </a:ln>
+        </p:spPr>
+        <p:style>
+          <a:lnRef idx="1">
+            <a:schemeClr val="accent1"/>
+          </a:lnRef>
+          <a:fillRef idx="3">
+            <a:schemeClr val="accent1"/>
+          </a:fillRef>
+          <a:effectRef idx="2">
+            <a:schemeClr val="accent1"/>
+          </a:effectRef>
+          <a:fontRef idx="minor">
+            <a:schemeClr val="lt1"/>
+          </a:fontRef>
+        </p:style>
+        <p:txBody>
+          <a:bodyPr rtlCol="0" anchor="ctr"/>
+          <a:lstStyle/>
+          <a:p>
+            <a:pPr algn="ctr"/>
+          </a:p>
+        </p:txBody>
+      </p:sp>
+      <p:sp>
+        <p:nvSpPr>
+          <p:cNvPr id="5" name="TextBox 4"/>
+          <p:cNvSpPr txBox="1"/>
+          <p:nvPr/>
+        </p:nvSpPr>
+        <p:spPr>
+          <a:xfrm>
+            <a:off x="457200" y="292608"/>
+            <a:ext cx="1828800" cy="274320"/>
+          </a:xfrm>
+          <a:prstGeom prst="rect">
+            <a:avLst/>
+          </a:prstGeom>
+          <a:noFill/>
+        </p:spPr>
+        <p:txBody>
+          <a:bodyPr wrap="square">
+            <a:spAutoFit/>
+          </a:bodyPr>
+          <a:lstStyle/>
+          <a:p>
+            <a:pPr algn="l"/>
+            <a:r>
+              <a:rPr sz="800" b="0" i="0">
+                <a:solidFill>
+                  <a:srgbClr val="807850"/>
+                </a:solidFill>
+                <a:latin typeface="Calibri"/>
+              </a:rPr>
+              <a:t>01 / 06</a:t>
+            </a:r>
+          </a:p>
+        </p:txBody>
+      </p:sp>
+      <p:sp>
+        <p:nvSpPr>
+          <p:cNvPr id="6" name="TextBox 5"/>
+          <p:cNvSpPr txBox="1"/>
+          <p:nvPr/>
+        </p:nvSpPr>
+        <p:spPr>
+          <a:xfrm>
+            <a:off x="457200" y="566928"/>
+            <a:ext cx="4114800" cy="320040"/>
+          </a:xfrm>
+          <a:prstGeom prst="rect">
+            <a:avLst/>
+          </a:prstGeom>
+          <a:noFill/>
+        </p:spPr>
+        <p:txBody>
+          <a:bodyPr wrap="square">
+            <a:spAutoFit/>
+          </a:bodyPr>
+          <a:lstStyle/>
+          <a:p>
+            <a:pPr algn="l"/>
+            <a:r>
+              <a:rPr sz="900" b="1" i="0">
+                <a:solidFill>
+                  <a:srgbClr val="C9A84C"/>
+                </a:solidFill>
+                <a:latin typeface="Calibri"/>
+              </a:rPr>
+              <a:t>THE PROBLEM</a:t>
+            </a:r>
+          </a:p>
+        </p:txBody>
+      </p:sp>
+      <p:sp>
+        <p:nvSpPr>
+          <p:cNvPr id="7" name="Rectangle 6"/>
+          <p:cNvSpPr/>
+          <p:nvPr/>
+        </p:nvSpPr>
+        <p:spPr>
+          <a:xfrm>
+            <a:off x="457200" y="886968"/>
+            <a:ext cx="457200" cy="36576"/>
+          </a:xfrm>
+          <a:prstGeom prst="rect">
+            <a:avLst/>
+          </a:prstGeom>
+          <a:solidFill>
+            <a:srgbClr val="C9A84C"/>
+          </a:solidFill>
+          <a:ln>
+            <a:noFill/>
+          </a:ln>
+        </p:spPr>
+        <p:style>
+          <a:lnRef idx="1">
+            <a:schemeClr val="accent1"/>
+          </a:lnRef>
+          <a:fillRef idx="3">
+            <a:schemeClr val="accent1"/>
+          </a:fillRef>
+          <a:effectRef idx="2">
+            <a:schemeClr val="accent1"/>
+          </a:effectRef>
+          <a:fontRef idx="minor">
+            <a:schemeClr val="lt1"/>
+          </a:fontRef>
+        </p:style>
+        <p:txBody>
+          <a:bodyPr rtlCol="0" anchor="ctr"/>
+          <a:lstStyle/>
+          <a:p>
+            <a:pPr algn="ctr"/>
+          </a:p>
+        </p:txBody>
+      </p:sp>
+      <p:sp>
+        <p:nvSpPr>
+          <p:cNvPr id="8" name="TextBox 7"/>
+          <p:cNvSpPr txBox="1"/>
+          <p:nvPr/>
+        </p:nvSpPr>
+        <p:spPr>
+          <a:xfrm>
+            <a:off x="457200" y="1005840"/>
+            <a:ext cx="4480560" cy="1737360"/>
+          </a:xfrm>
+          <a:prstGeom prst="rect">
+            <a:avLst/>
+          </a:prstGeom>
+          <a:noFill/>
+        </p:spPr>
+        <p:txBody>
+          <a:bodyPr wrap="square">
+            <a:spAutoFit/>
+          </a:bodyPr>
+          <a:lstStyle/>
+          <a:p>
+            <a:r>
+              <a:rPr sz="2400" b="1">
+                <a:solidFill>
+                  <a:srgbClr val="FFFFFF"/>
+                </a:solidFill>
+                <a:latin typeface="Calibri"/>
+              </a:rPr>
+              <a:t>The trigger fires in seconds.</a:t>
+            </a:r>
+          </a:p>
+          <a:p>
+            <a:r>
+              <a:rPr sz="2400" b="1">
+                <a:solidFill>
+                  <a:srgbClr val="FFFFFF"/>
+                </a:solidFill>
+                <a:latin typeface="Calibri"/>
+              </a:rPr>
+              <a:t>Mobilization takes 30 days.</a:t>
+            </a:r>
+          </a:p>
+        </p:txBody>
+      </p:sp>
+      <p:sp>
+        <p:nvSpPr>
+          <p:cNvPr id="9" name="Rectangle 8"/>
+          <p:cNvSpPr/>
+          <p:nvPr/>
+        </p:nvSpPr>
+        <p:spPr>
+          <a:xfrm>
+            <a:off x="457200" y="2788920"/>
+            <a:ext cx="457200" cy="45720"/>
+          </a:xfrm>
+          <a:prstGeom prst="rect">
+            <a:avLst/>
+          </a:prstGeom>
+          <a:solidFill>
+            <a:srgbClr val="C9A84C"/>
+          </a:solidFill>
+          <a:ln>
+            <a:noFill/>
+          </a:ln>
+        </p:spPr>
+        <p:style>
+          <a:lnRef idx="1">
+            <a:schemeClr val="accent1"/>
+          </a:lnRef>
+          <a:fillRef idx="3">
+            <a:schemeClr val="accent1"/>
+          </a:fillRef>
+          <a:effectRef idx="2">
+            <a:schemeClr val="accent1"/>
+          </a:effectRef>
+          <a:fontRef idx="minor">
+            <a:schemeClr val="lt1"/>
+          </a:fontRef>
+        </p:style>
+        <p:txBody>
+          <a:bodyPr rtlCol="0" anchor="ctr"/>
+          <a:lstStyle/>
+          <a:p>
+            <a:pPr algn="ctr"/>
+          </a:p>
+        </p:txBody>
+      </p:sp>
+      <p:sp>
+        <p:nvSpPr>
+          <p:cNvPr id="10" name="TextBox 9"/>
+          <p:cNvSpPr txBox="1"/>
+          <p:nvPr/>
+        </p:nvSpPr>
+        <p:spPr>
+          <a:xfrm>
+            <a:off x="457200" y="2907792"/>
+            <a:ext cx="4480560" cy="1920240"/>
+          </a:xfrm>
+          <a:prstGeom prst="rect">
+            <a:avLst/>
+          </a:prstGeom>
+          <a:noFill/>
+        </p:spPr>
+        <p:txBody>
+          <a:bodyPr wrap="square">
+            <a:spAutoFit/>
+          </a:bodyPr>
+          <a:lstStyle/>
+          <a:p>
+            <a:pPr>
+              <a:spcAft>
+                <a:spcPts val="500"/>
+              </a:spcAft>
+            </a:pPr>
+            <a:r>
+              <a:rPr sz="1100">
+                <a:solidFill>
+                  <a:srgbClr val="CCCFD8"/>
+                </a:solidFill>
+                <a:latin typeface="Calibri"/>
+              </a:rPr>
+              <a:t>▶  Fortune 1000 organizations detect strategic triggers quickly</a:t>
+            </a:r>
+          </a:p>
+          <a:p>
+            <a:pPr>
+              <a:spcAft>
+                <a:spcPts val="500"/>
+              </a:spcAft>
+            </a:pPr>
+            <a:r>
+              <a:rPr sz="1100">
+                <a:solidFill>
+                  <a:srgbClr val="CCCFD8"/>
+                </a:solidFill>
+                <a:latin typeface="Calibri"/>
+              </a:rPr>
+              <a:t>▶  Most still spend weeks aligning ownership, authority, and sequence</a:t>
+            </a:r>
+          </a:p>
+          <a:p>
+            <a:pPr>
+              <a:spcAft>
+                <a:spcPts val="500"/>
+              </a:spcAft>
+            </a:pPr>
+            <a:r>
+              <a:rPr sz="1100">
+                <a:solidFill>
+                  <a:srgbClr val="CCCFD8"/>
+                </a:solidFill>
+                <a:latin typeface="Calibri"/>
+              </a:rPr>
+              <a:t>▶  The delay is not execution — it is mobilization</a:t>
+            </a:r>
+          </a:p>
+        </p:txBody>
+      </p:sp>
+      <p:sp>
+        <p:nvSpPr>
+          <p:cNvPr id="11" name="TextBox 10"/>
+          <p:cNvSpPr txBox="1"/>
+          <p:nvPr/>
+        </p:nvSpPr>
+        <p:spPr>
+          <a:xfrm>
+            <a:off x="457200" y="5349240"/>
+            <a:ext cx="4480560" cy="960120"/>
+          </a:xfrm>
+          <a:prstGeom prst="rect">
+            <a:avLst/>
+          </a:prstGeom>
+          <a:noFill/>
+        </p:spPr>
+        <p:txBody>
+          <a:bodyPr wrap="square">
+            <a:spAutoFit/>
+          </a:bodyPr>
+          <a:lstStyle/>
+          <a:p>
+            <a:pPr algn="l"/>
+            <a:r>
+              <a:rPr sz="900" b="0" i="1">
+                <a:solidFill>
+                  <a:srgbClr val="888EA4"/>
+                </a:solidFill>
+                <a:latin typeface="Georgia"/>
+              </a:rPr>
+              <a:t>"Most organizations do not have a strategy problem. They have a mobilization problem. When a trigger fires, the first weeks are spent figuring out who decides and who owns the response."</a:t>
+            </a:r>
+          </a:p>
+        </p:txBody>
+      </p:sp>
+      <p:sp>
+        <p:nvSpPr>
+          <p:cNvPr id="12" name="Rectangle 11"/>
+          <p:cNvSpPr/>
+          <p:nvPr/>
+        </p:nvSpPr>
+        <p:spPr>
+          <a:xfrm>
+            <a:off x="0" y="6492240"/>
+            <a:ext cx="5120640" cy="365760"/>
+          </a:xfrm>
+          <a:prstGeom prst="rect">
+            <a:avLst/>
+          </a:prstGeom>
+          <a:solidFill>
+            <a:srgbClr val="06091E"/>
+          </a:solidFill>
+          <a:ln>
+            <a:noFill/>
+          </a:ln>
+        </p:spPr>
+        <p:style>
+          <a:lnRef idx="1">
+            <a:schemeClr val="accent1"/>
+          </a:lnRef>
+          <a:fillRef idx="3">
+            <a:schemeClr val="accent1"/>
+          </a:fillRef>
+          <a:effectRef idx="2">
+            <a:schemeClr val="accent1"/>
+          </a:effectRef>
+          <a:fontRef idx="minor">
+            <a:schemeClr val="lt1"/>
+          </a:fontRef>
+        </p:style>
+        <p:txBody>
+          <a:bodyPr rtlCol="0" anchor="ctr"/>
+          <a:lstStyle/>
+          <a:p>
+            <a:pPr algn="ctr"/>
+          </a:p>
+        </p:txBody>
+      </p:sp>
+      <p:sp>
+        <p:nvSpPr>
+          <p:cNvPr id="13" name="TextBox 12"/>
+          <p:cNvSpPr txBox="1"/>
+          <p:nvPr/>
+        </p:nvSpPr>
+        <p:spPr>
+          <a:xfrm>
+            <a:off x="457200" y="6510528"/>
+            <a:ext cx="4114800" cy="292608"/>
+          </a:xfrm>
+          <a:prstGeom prst="rect">
+            <a:avLst/>
+          </a:prstGeom>
+          <a:noFill/>
+        </p:spPr>
+        <p:txBody>
+          <a:bodyPr wrap="square">
+            <a:spAutoFit/>
+          </a:bodyPr>
+          <a:lstStyle/>
+          <a:p>
+            <a:pPr algn="l"/>
+            <a:r>
+              <a:rPr sz="800" b="1" i="0">
+                <a:solidFill>
+                  <a:srgbClr val="A09668"/>
+                </a:solidFill>
+                <a:latin typeface="Calibri"/>
+              </a:rPr>
+              <a:t>VaughnMartin  ·  READINESS OS</a:t>
+            </a:r>
+          </a:p>
+        </p:txBody>
+      </p:sp>
+      <p:sp>
+        <p:nvSpPr>
+          <p:cNvPr id="14" name="Rectangle 13"/>
+          <p:cNvSpPr/>
+          <p:nvPr/>
+        </p:nvSpPr>
+        <p:spPr>
+          <a:xfrm>
+            <a:off x="5449824" y="731520"/>
+            <a:ext cx="6419088" cy="347472"/>
+          </a:xfrm>
+          <a:prstGeom prst="rect">
+            <a:avLst/>
+          </a:prstGeom>
+          <a:solidFill>
+            <a:srgbClr val="1E2035"/>
+          </a:solidFill>
+          <a:ln>
+            <a:noFill/>
+          </a:ln>
+        </p:spPr>
+        <p:style>
+          <a:lnRef idx="1">
+            <a:schemeClr val="accent1"/>
+          </a:lnRef>
+          <a:fillRef idx="3">
+            <a:schemeClr val="accent1"/>
+          </a:fillRef>
+          <a:effectRef idx="2">
+            <a:schemeClr val="accent1"/>
+          </a:effectRef>
+          <a:fontRef idx="minor">
+            <a:schemeClr val="lt1"/>
+          </a:fontRef>
+        </p:style>
+        <p:txBody>
+          <a:bodyPr rtlCol="0" anchor="ctr"/>
+          <a:lstStyle/>
+          <a:p>
+            <a:pPr algn="ctr"/>
+          </a:p>
+        </p:txBody>
+      </p:sp>
+      <p:sp>
+        <p:nvSpPr>
+          <p:cNvPr id="15" name="Oval 14"/>
+          <p:cNvSpPr/>
+          <p:nvPr/>
+        </p:nvSpPr>
+        <p:spPr>
+          <a:xfrm>
+            <a:off x="5586984" y="832104"/>
+            <a:ext cx="109728" cy="109728"/>
+          </a:xfrm>
+          <a:prstGeom prst="ellipse">
+            <a:avLst/>
+          </a:prstGeom>
+          <a:solidFill>
+            <a:srgbClr val="FF5F57"/>
+          </a:solidFill>
+          <a:ln>
+            <a:noFill/>
+          </a:ln>
+        </p:spPr>
+        <p:style>
+          <a:lnRef idx="1">
+            <a:schemeClr val="accent1"/>
+          </a:lnRef>
+          <a:fillRef idx="3">
+            <a:schemeClr val="accent1"/>
+          </a:fillRef>
+          <a:effectRef idx="2">
+            <a:schemeClr val="accent1"/>
+          </a:effectRef>
+          <a:fontRef idx="minor">
+            <a:schemeClr val="lt1"/>
+          </a:fontRef>
+        </p:style>
+        <p:txBody>
+          <a:bodyPr rtlCol="0" anchor="ctr"/>
+          <a:lstStyle/>
+          <a:p>
+            <a:pPr algn="ctr"/>
+          </a:p>
+        </p:txBody>
+      </p:sp>
+      <p:sp>
+        <p:nvSpPr>
+          <p:cNvPr id="16" name="Oval 15"/>
+          <p:cNvSpPr/>
+          <p:nvPr/>
+        </p:nvSpPr>
+        <p:spPr>
+          <a:xfrm>
+            <a:off x="5788152" y="832104"/>
+            <a:ext cx="109728" cy="109728"/>
+          </a:xfrm>
+          <a:prstGeom prst="ellipse">
+            <a:avLst/>
+          </a:prstGeom>
+          <a:solidFill>
+            <a:srgbClr val="FFBD2E"/>
+          </a:solidFill>
+          <a:ln>
+            <a:noFill/>
+          </a:ln>
+        </p:spPr>
+        <p:style>
+          <a:lnRef idx="1">
+            <a:schemeClr val="accent1"/>
+          </a:lnRef>
+          <a:fillRef idx="3">
+            <a:schemeClr val="accent1"/>
+          </a:fillRef>
+          <a:effectRef idx="2">
+            <a:schemeClr val="accent1"/>
+          </a:effectRef>
+          <a:fontRef idx="minor">
+            <a:schemeClr val="lt1"/>
+          </a:fontRef>
+        </p:style>
+        <p:txBody>
+          <a:bodyPr rtlCol="0" anchor="ctr"/>
+          <a:lstStyle/>
+          <a:p>
+            <a:pPr algn="ctr"/>
+          </a:p>
+        </p:txBody>
+      </p:sp>
+      <p:sp>
+        <p:nvSpPr>
+          <p:cNvPr id="17" name="Oval 16"/>
+          <p:cNvSpPr/>
+          <p:nvPr/>
+        </p:nvSpPr>
+        <p:spPr>
+          <a:xfrm>
+            <a:off x="5989320" y="832104"/>
+            <a:ext cx="109728" cy="109728"/>
+          </a:xfrm>
+          <a:prstGeom prst="ellipse">
+            <a:avLst/>
+          </a:prstGeom>
+          <a:solidFill>
+            <a:srgbClr val="28CA41"/>
+          </a:solidFill>
+          <a:ln>
+            <a:noFill/>
+          </a:ln>
+        </p:spPr>
+        <p:style>
+          <a:lnRef idx="1">
+            <a:schemeClr val="accent1"/>
+          </a:lnRef>
+          <a:fillRef idx="3">
+            <a:schemeClr val="accent1"/>
+          </a:fillRef>
+          <a:effectRef idx="2">
+            <a:schemeClr val="accent1"/>
+          </a:effectRef>
+          <a:fontRef idx="minor">
+            <a:schemeClr val="lt1"/>
+          </a:fontRef>
+        </p:style>
+        <p:txBody>
+          <a:bodyPr rtlCol="0" anchor="ctr"/>
+          <a:lstStyle/>
+          <a:p>
+            <a:pPr algn="ctr"/>
+          </a:p>
+        </p:txBody>
+      </p:sp>
+      <p:sp>
+        <p:nvSpPr>
+          <p:cNvPr id="18" name="Rectangle 17"/>
+          <p:cNvSpPr/>
+          <p:nvPr/>
+        </p:nvSpPr>
+        <p:spPr>
+          <a:xfrm>
+            <a:off x="6227064" y="786384"/>
+            <a:ext cx="5458968" cy="228600"/>
+          </a:xfrm>
+          <a:prstGeom prst="rect">
+            <a:avLst/>
+          </a:prstGeom>
+          <a:solidFill>
+            <a:srgbClr val="2A2D46"/>
+          </a:solidFill>
+          <a:ln>
+            <a:noFill/>
+          </a:ln>
+        </p:spPr>
+        <p:style>
+          <a:lnRef idx="1">
+            <a:schemeClr val="accent1"/>
+          </a:lnRef>
+          <a:fillRef idx="3">
+            <a:schemeClr val="accent1"/>
+          </a:fillRef>
+          <a:effectRef idx="2">
+            <a:schemeClr val="accent1"/>
+          </a:effectRef>
+          <a:fontRef idx="minor">
+            <a:schemeClr val="lt1"/>
+          </a:fontRef>
+        </p:style>
+        <p:txBody>
+          <a:bodyPr rtlCol="0" anchor="ctr"/>
+          <a:lstStyle/>
+          <a:p>
+            <a:pPr algn="ctr"/>
+          </a:p>
+        </p:txBody>
+      </p:sp>
+      <p:sp>
+        <p:nvSpPr>
+          <p:cNvPr id="19" name="TextBox 18"/>
+          <p:cNvSpPr txBox="1"/>
+          <p:nvPr/>
+        </p:nvSpPr>
+        <p:spPr>
+          <a:xfrm>
+            <a:off x="6272784" y="795528"/>
+            <a:ext cx="5413248" cy="219456"/>
+          </a:xfrm>
+          <a:prstGeom prst="rect">
+            <a:avLst/>
+          </a:prstGeom>
+          <a:noFill/>
+        </p:spPr>
+        <p:txBody>
+          <a:bodyPr wrap="square">
+            <a:spAutoFit/>
+          </a:bodyPr>
+          <a:lstStyle/>
+          <a:p>
+            <a:pPr algn="l"/>
+            <a:r>
+              <a:rPr sz="800" b="0" i="0">
+                <a:solidFill>
+                  <a:srgbClr val="808595"/>
+                </a:solidFill>
+                <a:latin typeface="Calibri"/>
+              </a:rPr>
+              <a:t>vaughnmartin.com</a:t>
+            </a:r>
+          </a:p>
+        </p:txBody>
+      </p:sp>
       <p:pic>
         <p:nvPicPr>
-          <p:cNvPr id="2" name="Picture 1" descr="01_title_hook.png"/>
+          <p:cNvPr id="20" name="Picture 19" descr="deck_signals.jpg"/>
           <p:cNvPicPr>
             <a:picLocks noChangeAspect="1"/>
           </p:cNvPicPr>
@@ -4620,134 +3873,8 @@
         </p:blipFill>
         <p:spPr>
           <a:xfrm>
-            <a:off x="0" y="0"/>
-            <a:ext cx="9144000" cy="5143500"/>
-          </a:xfrm>
-          <a:prstGeom prst="rect">
-            <a:avLst/>
-          </a:prstGeom>
-        </p:spPr>
-      </p:pic>
-    </p:spTree>
-  </p:cSld>
-  <p:clrMapOvr>
-    <a:masterClrMapping/>
-  </p:clrMapOvr>
-</p:sld>
-</file>
-
-<file path=ppt/slides/slide10.xml><?xml version="1.0" encoding="utf-8"?>
-<p:sld xmlns:a="http://schemas.openxmlformats.org/drawingml/2006/main" xmlns:p="http://schemas.openxmlformats.org/presentationml/2006/main" xmlns:r="http://schemas.openxmlformats.org/officeDocument/2006/relationships">
-  <p:cSld>
-    <p:spTree>
-      <p:nvGrpSpPr>
-        <p:cNvPr id="1" name=""/>
-        <p:cNvGrpSpPr/>
-        <p:nvPr/>
-      </p:nvGrpSpPr>
-      <p:grpSpPr/>
-      <p:pic>
-        <p:nvPicPr>
-          <p:cNvPr id="2" name="Picture 1" descr="10_product_reality.png"/>
-          <p:cNvPicPr>
-            <a:picLocks noChangeAspect="1"/>
-          </p:cNvPicPr>
-          <p:nvPr/>
-        </p:nvPicPr>
-        <p:blipFill>
-          <a:blip r:embed="rId2"/>
-          <a:stretch>
-            <a:fillRect/>
-          </a:stretch>
-        </p:blipFill>
-        <p:spPr>
-          <a:xfrm>
-            <a:off x="0" y="0"/>
-            <a:ext cx="9144000" cy="5143500"/>
-          </a:xfrm>
-          <a:prstGeom prst="rect">
-            <a:avLst/>
-          </a:prstGeom>
-        </p:spPr>
-      </p:pic>
-    </p:spTree>
-  </p:cSld>
-  <p:clrMapOvr>
-    <a:masterClrMapping/>
-  </p:clrMapOvr>
-</p:sld>
-</file>
-
-<file path=ppt/slides/slide11.xml><?xml version="1.0" encoding="utf-8"?>
-<p:sld xmlns:a="http://schemas.openxmlformats.org/drawingml/2006/main" xmlns:p="http://schemas.openxmlformats.org/presentationml/2006/main" xmlns:r="http://schemas.openxmlformats.org/officeDocument/2006/relationships">
-  <p:cSld>
-    <p:spTree>
-      <p:nvGrpSpPr>
-        <p:cNvPr id="1" name=""/>
-        <p:cNvGrpSpPr/>
-        <p:nvPr/>
-      </p:nvGrpSpPr>
-      <p:grpSpPr/>
-      <p:pic>
-        <p:nvPicPr>
-          <p:cNvPr id="2" name="Picture 1" descr="11_commercial_motion.png"/>
-          <p:cNvPicPr>
-            <a:picLocks noChangeAspect="1"/>
-          </p:cNvPicPr>
-          <p:nvPr/>
-        </p:nvPicPr>
-        <p:blipFill>
-          <a:blip r:embed="rId2"/>
-          <a:stretch>
-            <a:fillRect/>
-          </a:stretch>
-        </p:blipFill>
-        <p:spPr>
-          <a:xfrm>
-            <a:off x="0" y="0"/>
-            <a:ext cx="9144000" cy="5143500"/>
-          </a:xfrm>
-          <a:prstGeom prst="rect">
-            <a:avLst/>
-          </a:prstGeom>
-        </p:spPr>
-      </p:pic>
-    </p:spTree>
-  </p:cSld>
-  <p:clrMapOvr>
-    <a:masterClrMapping/>
-  </p:clrMapOvr>
-</p:sld>
-</file>
-
-<file path=ppt/slides/slide12.xml><?xml version="1.0" encoding="utf-8"?>
-<p:sld xmlns:a="http://schemas.openxmlformats.org/drawingml/2006/main" xmlns:p="http://schemas.openxmlformats.org/presentationml/2006/main" xmlns:r="http://schemas.openxmlformats.org/officeDocument/2006/relationships">
-  <p:cSld>
-    <p:spTree>
-      <p:nvGrpSpPr>
-        <p:cNvPr id="1" name=""/>
-        <p:cNvGrpSpPr/>
-        <p:nvPr/>
-      </p:nvGrpSpPr>
-      <p:grpSpPr/>
-      <p:pic>
-        <p:nvPicPr>
-          <p:cNvPr id="2" name="Picture 1" descr="12_ask_close.png"/>
-          <p:cNvPicPr>
-            <a:picLocks noChangeAspect="1"/>
-          </p:cNvPicPr>
-          <p:nvPr/>
-        </p:nvPicPr>
-        <p:blipFill>
-          <a:blip r:embed="rId2"/>
-          <a:stretch>
-            <a:fillRect/>
-          </a:stretch>
-        </p:blipFill>
-        <p:spPr>
-          <a:xfrm>
-            <a:off x="0" y="0"/>
-            <a:ext cx="9144000" cy="5143500"/>
+            <a:off x="5449824" y="1078992"/>
+            <a:ext cx="6419088" cy="5413248"/>
           </a:xfrm>
           <a:prstGeom prst="rect">
             <a:avLst/>
@@ -4772,9 +3899,789 @@
         <p:nvPr/>
       </p:nvGrpSpPr>
       <p:grpSpPr/>
+      <p:sp>
+        <p:nvSpPr>
+          <p:cNvPr id="2" name="Rectangle 1"/>
+          <p:cNvSpPr/>
+          <p:nvPr/>
+        </p:nvSpPr>
+        <p:spPr>
+          <a:xfrm>
+            <a:off x="0" y="0"/>
+            <a:ext cx="5120640" cy="6858000"/>
+          </a:xfrm>
+          <a:prstGeom prst="rect">
+            <a:avLst/>
+          </a:prstGeom>
+          <a:solidFill>
+            <a:srgbClr val="0A0F2E"/>
+          </a:solidFill>
+          <a:ln>
+            <a:noFill/>
+          </a:ln>
+        </p:spPr>
+        <p:style>
+          <a:lnRef idx="1">
+            <a:schemeClr val="accent1"/>
+          </a:lnRef>
+          <a:fillRef idx="3">
+            <a:schemeClr val="accent1"/>
+          </a:fillRef>
+          <a:effectRef idx="2">
+            <a:schemeClr val="accent1"/>
+          </a:effectRef>
+          <a:fontRef idx="minor">
+            <a:schemeClr val="lt1"/>
+          </a:fontRef>
+        </p:style>
+        <p:txBody>
+          <a:bodyPr rtlCol="0" anchor="ctr"/>
+          <a:lstStyle/>
+          <a:p>
+            <a:pPr algn="ctr"/>
+          </a:p>
+        </p:txBody>
+      </p:sp>
+      <p:sp>
+        <p:nvSpPr>
+          <p:cNvPr id="3" name="Rectangle 2"/>
+          <p:cNvSpPr/>
+          <p:nvPr/>
+        </p:nvSpPr>
+        <p:spPr>
+          <a:xfrm>
+            <a:off x="0" y="0"/>
+            <a:ext cx="54864" cy="6858000"/>
+          </a:xfrm>
+          <a:prstGeom prst="rect">
+            <a:avLst/>
+          </a:prstGeom>
+          <a:solidFill>
+            <a:srgbClr val="C9A84C"/>
+          </a:solidFill>
+          <a:ln>
+            <a:noFill/>
+          </a:ln>
+        </p:spPr>
+        <p:style>
+          <a:lnRef idx="1">
+            <a:schemeClr val="accent1"/>
+          </a:lnRef>
+          <a:fillRef idx="3">
+            <a:schemeClr val="accent1"/>
+          </a:fillRef>
+          <a:effectRef idx="2">
+            <a:schemeClr val="accent1"/>
+          </a:effectRef>
+          <a:fontRef idx="minor">
+            <a:schemeClr val="lt1"/>
+          </a:fontRef>
+        </p:style>
+        <p:txBody>
+          <a:bodyPr rtlCol="0" anchor="ctr"/>
+          <a:lstStyle/>
+          <a:p>
+            <a:pPr algn="ctr"/>
+          </a:p>
+        </p:txBody>
+      </p:sp>
+      <p:sp>
+        <p:nvSpPr>
+          <p:cNvPr id="4" name="Rectangle 3"/>
+          <p:cNvSpPr/>
+          <p:nvPr/>
+        </p:nvSpPr>
+        <p:spPr>
+          <a:xfrm>
+            <a:off x="5129784" y="0"/>
+            <a:ext cx="7059168" cy="6858000"/>
+          </a:xfrm>
+          <a:prstGeom prst="rect">
+            <a:avLst/>
+          </a:prstGeom>
+          <a:solidFill>
+            <a:srgbClr val="0D1436"/>
+          </a:solidFill>
+          <a:ln>
+            <a:noFill/>
+          </a:ln>
+        </p:spPr>
+        <p:style>
+          <a:lnRef idx="1">
+            <a:schemeClr val="accent1"/>
+          </a:lnRef>
+          <a:fillRef idx="3">
+            <a:schemeClr val="accent1"/>
+          </a:fillRef>
+          <a:effectRef idx="2">
+            <a:schemeClr val="accent1"/>
+          </a:effectRef>
+          <a:fontRef idx="minor">
+            <a:schemeClr val="lt1"/>
+          </a:fontRef>
+        </p:style>
+        <p:txBody>
+          <a:bodyPr rtlCol="0" anchor="ctr"/>
+          <a:lstStyle/>
+          <a:p>
+            <a:pPr algn="ctr"/>
+          </a:p>
+        </p:txBody>
+      </p:sp>
+      <p:sp>
+        <p:nvSpPr>
+          <p:cNvPr id="5" name="TextBox 4"/>
+          <p:cNvSpPr txBox="1"/>
+          <p:nvPr/>
+        </p:nvSpPr>
+        <p:spPr>
+          <a:xfrm>
+            <a:off x="457200" y="292608"/>
+            <a:ext cx="1828800" cy="274320"/>
+          </a:xfrm>
+          <a:prstGeom prst="rect">
+            <a:avLst/>
+          </a:prstGeom>
+          <a:noFill/>
+        </p:spPr>
+        <p:txBody>
+          <a:bodyPr wrap="square">
+            <a:spAutoFit/>
+          </a:bodyPr>
+          <a:lstStyle/>
+          <a:p>
+            <a:pPr algn="l"/>
+            <a:r>
+              <a:rPr sz="800" b="0" i="0">
+                <a:solidFill>
+                  <a:srgbClr val="807850"/>
+                </a:solidFill>
+                <a:latin typeface="Calibri"/>
+              </a:rPr>
+              <a:t>02 / 06</a:t>
+            </a:r>
+          </a:p>
+        </p:txBody>
+      </p:sp>
+      <p:sp>
+        <p:nvSpPr>
+          <p:cNvPr id="6" name="TextBox 5"/>
+          <p:cNvSpPr txBox="1"/>
+          <p:nvPr/>
+        </p:nvSpPr>
+        <p:spPr>
+          <a:xfrm>
+            <a:off x="457200" y="566928"/>
+            <a:ext cx="4114800" cy="320040"/>
+          </a:xfrm>
+          <a:prstGeom prst="rect">
+            <a:avLst/>
+          </a:prstGeom>
+          <a:noFill/>
+        </p:spPr>
+        <p:txBody>
+          <a:bodyPr wrap="square">
+            <a:spAutoFit/>
+          </a:bodyPr>
+          <a:lstStyle/>
+          <a:p>
+            <a:pPr algn="l"/>
+            <a:r>
+              <a:rPr sz="900" b="1" i="0">
+                <a:solidFill>
+                  <a:srgbClr val="C9A84C"/>
+                </a:solidFill>
+                <a:latin typeface="Calibri"/>
+              </a:rPr>
+              <a:t>THE PRODUCT</a:t>
+            </a:r>
+          </a:p>
+        </p:txBody>
+      </p:sp>
+      <p:sp>
+        <p:nvSpPr>
+          <p:cNvPr id="7" name="Rectangle 6"/>
+          <p:cNvSpPr/>
+          <p:nvPr/>
+        </p:nvSpPr>
+        <p:spPr>
+          <a:xfrm>
+            <a:off x="457200" y="886968"/>
+            <a:ext cx="457200" cy="36576"/>
+          </a:xfrm>
+          <a:prstGeom prst="rect">
+            <a:avLst/>
+          </a:prstGeom>
+          <a:solidFill>
+            <a:srgbClr val="C9A84C"/>
+          </a:solidFill>
+          <a:ln>
+            <a:noFill/>
+          </a:ln>
+        </p:spPr>
+        <p:style>
+          <a:lnRef idx="1">
+            <a:schemeClr val="accent1"/>
+          </a:lnRef>
+          <a:fillRef idx="3">
+            <a:schemeClr val="accent1"/>
+          </a:fillRef>
+          <a:effectRef idx="2">
+            <a:schemeClr val="accent1"/>
+          </a:effectRef>
+          <a:fontRef idx="minor">
+            <a:schemeClr val="lt1"/>
+          </a:fontRef>
+        </p:style>
+        <p:txBody>
+          <a:bodyPr rtlCol="0" anchor="ctr"/>
+          <a:lstStyle/>
+          <a:p>
+            <a:pPr algn="ctr"/>
+          </a:p>
+        </p:txBody>
+      </p:sp>
+      <p:sp>
+        <p:nvSpPr>
+          <p:cNvPr id="8" name="TextBox 7"/>
+          <p:cNvSpPr txBox="1"/>
+          <p:nvPr/>
+        </p:nvSpPr>
+        <p:spPr>
+          <a:xfrm>
+            <a:off x="457200" y="1005840"/>
+            <a:ext cx="4480560" cy="1737360"/>
+          </a:xfrm>
+          <a:prstGeom prst="rect">
+            <a:avLst/>
+          </a:prstGeom>
+          <a:noFill/>
+        </p:spPr>
+        <p:txBody>
+          <a:bodyPr wrap="square">
+            <a:spAutoFit/>
+          </a:bodyPr>
+          <a:lstStyle/>
+          <a:p>
+            <a:r>
+              <a:rPr sz="2400" b="1">
+                <a:solidFill>
+                  <a:srgbClr val="FFFFFF"/>
+                </a:solidFill>
+                <a:latin typeface="Calibri"/>
+              </a:rPr>
+              <a:t>Readiness OS:</a:t>
+            </a:r>
+          </a:p>
+          <a:p>
+            <a:r>
+              <a:rPr sz="2400" b="1">
+                <a:solidFill>
+                  <a:srgbClr val="FFFFFF"/>
+                </a:solidFill>
+                <a:latin typeface="Calibri"/>
+              </a:rPr>
+              <a:t>The response is ready before the trigger fires.</a:t>
+            </a:r>
+          </a:p>
+        </p:txBody>
+      </p:sp>
+      <p:sp>
+        <p:nvSpPr>
+          <p:cNvPr id="9" name="Rectangle 8"/>
+          <p:cNvSpPr/>
+          <p:nvPr/>
+        </p:nvSpPr>
+        <p:spPr>
+          <a:xfrm>
+            <a:off x="457200" y="2788920"/>
+            <a:ext cx="457200" cy="45720"/>
+          </a:xfrm>
+          <a:prstGeom prst="rect">
+            <a:avLst/>
+          </a:prstGeom>
+          <a:solidFill>
+            <a:srgbClr val="C9A84C"/>
+          </a:solidFill>
+          <a:ln>
+            <a:noFill/>
+          </a:ln>
+        </p:spPr>
+        <p:style>
+          <a:lnRef idx="1">
+            <a:schemeClr val="accent1"/>
+          </a:lnRef>
+          <a:fillRef idx="3">
+            <a:schemeClr val="accent1"/>
+          </a:fillRef>
+          <a:effectRef idx="2">
+            <a:schemeClr val="accent1"/>
+          </a:effectRef>
+          <a:fontRef idx="minor">
+            <a:schemeClr val="lt1"/>
+          </a:fontRef>
+        </p:style>
+        <p:txBody>
+          <a:bodyPr rtlCol="0" anchor="ctr"/>
+          <a:lstStyle/>
+          <a:p>
+            <a:pPr algn="ctr"/>
+          </a:p>
+        </p:txBody>
+      </p:sp>
+      <p:sp>
+        <p:nvSpPr>
+          <p:cNvPr id="10" name="TextBox 9"/>
+          <p:cNvSpPr txBox="1"/>
+          <p:nvPr/>
+        </p:nvSpPr>
+        <p:spPr>
+          <a:xfrm>
+            <a:off x="457200" y="2907792"/>
+            <a:ext cx="4480560" cy="1920240"/>
+          </a:xfrm>
+          <a:prstGeom prst="rect">
+            <a:avLst/>
+          </a:prstGeom>
+          <a:noFill/>
+        </p:spPr>
+        <p:txBody>
+          <a:bodyPr wrap="square">
+            <a:spAutoFit/>
+          </a:bodyPr>
+          <a:lstStyle/>
+          <a:p>
+            <a:pPr>
+              <a:spcAft>
+                <a:spcPts val="500"/>
+              </a:spcAft>
+            </a:pPr>
+            <a:r>
+              <a:rPr sz="1100">
+                <a:solidFill>
+                  <a:srgbClr val="CCCFD8"/>
+                </a:solidFill>
+                <a:latin typeface="Calibri"/>
+              </a:rPr>
+              <a:t>▶  170 Readiness Protocols pre-staged</a:t>
+            </a:r>
+          </a:p>
+          <a:p>
+            <a:pPr>
+              <a:spcAft>
+                <a:spcPts val="500"/>
+              </a:spcAft>
+            </a:pPr>
+            <a:r>
+              <a:rPr sz="1100">
+                <a:solidFill>
+                  <a:srgbClr val="CCCFD8"/>
+                </a:solidFill>
+                <a:latin typeface="Calibri"/>
+              </a:rPr>
+              <a:t>▶  221 trigger patterns mapped</a:t>
+            </a:r>
+          </a:p>
+          <a:p>
+            <a:pPr>
+              <a:spcAft>
+                <a:spcPts val="500"/>
+              </a:spcAft>
+            </a:pPr>
+            <a:r>
+              <a:rPr sz="1100">
+                <a:solidFill>
+                  <a:srgbClr val="CCCFD8"/>
+                </a:solidFill>
+                <a:latin typeface="Calibri"/>
+              </a:rPr>
+              <a:t>▶  248+ data points monitored every 15 minutes</a:t>
+            </a:r>
+          </a:p>
+          <a:p>
+            <a:pPr>
+              <a:spcAft>
+                <a:spcPts val="500"/>
+              </a:spcAft>
+            </a:pPr>
+            <a:r>
+              <a:rPr sz="1100">
+                <a:solidFill>
+                  <a:srgbClr val="CCCFD8"/>
+                </a:solidFill>
+                <a:latin typeface="Calibri"/>
+              </a:rPr>
+              <a:t>▶  AI monitors. Executives authorize.</a:t>
+            </a:r>
+          </a:p>
+        </p:txBody>
+      </p:sp>
+      <p:sp>
+        <p:nvSpPr>
+          <p:cNvPr id="11" name="TextBox 10"/>
+          <p:cNvSpPr txBox="1"/>
+          <p:nvPr/>
+        </p:nvSpPr>
+        <p:spPr>
+          <a:xfrm>
+            <a:off x="457200" y="5349240"/>
+            <a:ext cx="4480560" cy="960120"/>
+          </a:xfrm>
+          <a:prstGeom prst="rect">
+            <a:avLst/>
+          </a:prstGeom>
+          <a:noFill/>
+        </p:spPr>
+        <p:txBody>
+          <a:bodyPr wrap="square">
+            <a:spAutoFit/>
+          </a:bodyPr>
+          <a:lstStyle/>
+          <a:p>
+            <a:pPr algn="l"/>
+            <a:r>
+              <a:rPr sz="900" b="0" i="1">
+                <a:solidFill>
+                  <a:srgbClr val="888EA4"/>
+                </a:solidFill>
+                <a:latin typeface="Georgia"/>
+              </a:rPr>
+              <a:t>"We built Readiness OS to pre-stage the response architecture before pressure arrives. Authority remains human; mobilization becomes immediate."</a:t>
+            </a:r>
+          </a:p>
+        </p:txBody>
+      </p:sp>
+      <p:sp>
+        <p:nvSpPr>
+          <p:cNvPr id="12" name="Rectangle 11"/>
+          <p:cNvSpPr/>
+          <p:nvPr/>
+        </p:nvSpPr>
+        <p:spPr>
+          <a:xfrm>
+            <a:off x="0" y="6492240"/>
+            <a:ext cx="5120640" cy="365760"/>
+          </a:xfrm>
+          <a:prstGeom prst="rect">
+            <a:avLst/>
+          </a:prstGeom>
+          <a:solidFill>
+            <a:srgbClr val="06091E"/>
+          </a:solidFill>
+          <a:ln>
+            <a:noFill/>
+          </a:ln>
+        </p:spPr>
+        <p:style>
+          <a:lnRef idx="1">
+            <a:schemeClr val="accent1"/>
+          </a:lnRef>
+          <a:fillRef idx="3">
+            <a:schemeClr val="accent1"/>
+          </a:fillRef>
+          <a:effectRef idx="2">
+            <a:schemeClr val="accent1"/>
+          </a:effectRef>
+          <a:fontRef idx="minor">
+            <a:schemeClr val="lt1"/>
+          </a:fontRef>
+        </p:style>
+        <p:txBody>
+          <a:bodyPr rtlCol="0" anchor="ctr"/>
+          <a:lstStyle/>
+          <a:p>
+            <a:pPr algn="ctr"/>
+          </a:p>
+        </p:txBody>
+      </p:sp>
+      <p:sp>
+        <p:nvSpPr>
+          <p:cNvPr id="13" name="TextBox 12"/>
+          <p:cNvSpPr txBox="1"/>
+          <p:nvPr/>
+        </p:nvSpPr>
+        <p:spPr>
+          <a:xfrm>
+            <a:off x="457200" y="6510528"/>
+            <a:ext cx="4114800" cy="292608"/>
+          </a:xfrm>
+          <a:prstGeom prst="rect">
+            <a:avLst/>
+          </a:prstGeom>
+          <a:noFill/>
+        </p:spPr>
+        <p:txBody>
+          <a:bodyPr wrap="square">
+            <a:spAutoFit/>
+          </a:bodyPr>
+          <a:lstStyle/>
+          <a:p>
+            <a:pPr algn="l"/>
+            <a:r>
+              <a:rPr sz="800" b="1" i="0">
+                <a:solidFill>
+                  <a:srgbClr val="A09668"/>
+                </a:solidFill>
+                <a:latin typeface="Calibri"/>
+              </a:rPr>
+              <a:t>VaughnMartin  ·  READINESS OS</a:t>
+            </a:r>
+          </a:p>
+        </p:txBody>
+      </p:sp>
+      <p:sp>
+        <p:nvSpPr>
+          <p:cNvPr id="14" name="Rectangle 13"/>
+          <p:cNvSpPr/>
+          <p:nvPr/>
+        </p:nvSpPr>
+        <p:spPr>
+          <a:xfrm>
+            <a:off x="5449824" y="731520"/>
+            <a:ext cx="6419088" cy="347472"/>
+          </a:xfrm>
+          <a:prstGeom prst="rect">
+            <a:avLst/>
+          </a:prstGeom>
+          <a:solidFill>
+            <a:srgbClr val="1E2035"/>
+          </a:solidFill>
+          <a:ln>
+            <a:noFill/>
+          </a:ln>
+        </p:spPr>
+        <p:style>
+          <a:lnRef idx="1">
+            <a:schemeClr val="accent1"/>
+          </a:lnRef>
+          <a:fillRef idx="3">
+            <a:schemeClr val="accent1"/>
+          </a:fillRef>
+          <a:effectRef idx="2">
+            <a:schemeClr val="accent1"/>
+          </a:effectRef>
+          <a:fontRef idx="minor">
+            <a:schemeClr val="lt1"/>
+          </a:fontRef>
+        </p:style>
+        <p:txBody>
+          <a:bodyPr rtlCol="0" anchor="ctr"/>
+          <a:lstStyle/>
+          <a:p>
+            <a:pPr algn="ctr"/>
+          </a:p>
+        </p:txBody>
+      </p:sp>
+      <p:sp>
+        <p:nvSpPr>
+          <p:cNvPr id="15" name="Oval 14"/>
+          <p:cNvSpPr/>
+          <p:nvPr/>
+        </p:nvSpPr>
+        <p:spPr>
+          <a:xfrm>
+            <a:off x="5586984" y="832104"/>
+            <a:ext cx="109728" cy="109728"/>
+          </a:xfrm>
+          <a:prstGeom prst="ellipse">
+            <a:avLst/>
+          </a:prstGeom>
+          <a:solidFill>
+            <a:srgbClr val="FF5F57"/>
+          </a:solidFill>
+          <a:ln>
+            <a:noFill/>
+          </a:ln>
+        </p:spPr>
+        <p:style>
+          <a:lnRef idx="1">
+            <a:schemeClr val="accent1"/>
+          </a:lnRef>
+          <a:fillRef idx="3">
+            <a:schemeClr val="accent1"/>
+          </a:fillRef>
+          <a:effectRef idx="2">
+            <a:schemeClr val="accent1"/>
+          </a:effectRef>
+          <a:fontRef idx="minor">
+            <a:schemeClr val="lt1"/>
+          </a:fontRef>
+        </p:style>
+        <p:txBody>
+          <a:bodyPr rtlCol="0" anchor="ctr"/>
+          <a:lstStyle/>
+          <a:p>
+            <a:pPr algn="ctr"/>
+          </a:p>
+        </p:txBody>
+      </p:sp>
+      <p:sp>
+        <p:nvSpPr>
+          <p:cNvPr id="16" name="Oval 15"/>
+          <p:cNvSpPr/>
+          <p:nvPr/>
+        </p:nvSpPr>
+        <p:spPr>
+          <a:xfrm>
+            <a:off x="5788152" y="832104"/>
+            <a:ext cx="109728" cy="109728"/>
+          </a:xfrm>
+          <a:prstGeom prst="ellipse">
+            <a:avLst/>
+          </a:prstGeom>
+          <a:solidFill>
+            <a:srgbClr val="FFBD2E"/>
+          </a:solidFill>
+          <a:ln>
+            <a:noFill/>
+          </a:ln>
+        </p:spPr>
+        <p:style>
+          <a:lnRef idx="1">
+            <a:schemeClr val="accent1"/>
+          </a:lnRef>
+          <a:fillRef idx="3">
+            <a:schemeClr val="accent1"/>
+          </a:fillRef>
+          <a:effectRef idx="2">
+            <a:schemeClr val="accent1"/>
+          </a:effectRef>
+          <a:fontRef idx="minor">
+            <a:schemeClr val="lt1"/>
+          </a:fontRef>
+        </p:style>
+        <p:txBody>
+          <a:bodyPr rtlCol="0" anchor="ctr"/>
+          <a:lstStyle/>
+          <a:p>
+            <a:pPr algn="ctr"/>
+          </a:p>
+        </p:txBody>
+      </p:sp>
+      <p:sp>
+        <p:nvSpPr>
+          <p:cNvPr id="17" name="Oval 16"/>
+          <p:cNvSpPr/>
+          <p:nvPr/>
+        </p:nvSpPr>
+        <p:spPr>
+          <a:xfrm>
+            <a:off x="5989320" y="832104"/>
+            <a:ext cx="109728" cy="109728"/>
+          </a:xfrm>
+          <a:prstGeom prst="ellipse">
+            <a:avLst/>
+          </a:prstGeom>
+          <a:solidFill>
+            <a:srgbClr val="28CA41"/>
+          </a:solidFill>
+          <a:ln>
+            <a:noFill/>
+          </a:ln>
+        </p:spPr>
+        <p:style>
+          <a:lnRef idx="1">
+            <a:schemeClr val="accent1"/>
+          </a:lnRef>
+          <a:fillRef idx="3">
+            <a:schemeClr val="accent1"/>
+          </a:fillRef>
+          <a:effectRef idx="2">
+            <a:schemeClr val="accent1"/>
+          </a:effectRef>
+          <a:fontRef idx="minor">
+            <a:schemeClr val="lt1"/>
+          </a:fontRef>
+        </p:style>
+        <p:txBody>
+          <a:bodyPr rtlCol="0" anchor="ctr"/>
+          <a:lstStyle/>
+          <a:p>
+            <a:pPr algn="ctr"/>
+          </a:p>
+        </p:txBody>
+      </p:sp>
+      <p:sp>
+        <p:nvSpPr>
+          <p:cNvPr id="18" name="Rectangle 17"/>
+          <p:cNvSpPr/>
+          <p:nvPr/>
+        </p:nvSpPr>
+        <p:spPr>
+          <a:xfrm>
+            <a:off x="6227064" y="786384"/>
+            <a:ext cx="5458968" cy="228600"/>
+          </a:xfrm>
+          <a:prstGeom prst="rect">
+            <a:avLst/>
+          </a:prstGeom>
+          <a:solidFill>
+            <a:srgbClr val="2A2D46"/>
+          </a:solidFill>
+          <a:ln>
+            <a:noFill/>
+          </a:ln>
+        </p:spPr>
+        <p:style>
+          <a:lnRef idx="1">
+            <a:schemeClr val="accent1"/>
+          </a:lnRef>
+          <a:fillRef idx="3">
+            <a:schemeClr val="accent1"/>
+          </a:fillRef>
+          <a:effectRef idx="2">
+            <a:schemeClr val="accent1"/>
+          </a:effectRef>
+          <a:fontRef idx="minor">
+            <a:schemeClr val="lt1"/>
+          </a:fontRef>
+        </p:style>
+        <p:txBody>
+          <a:bodyPr rtlCol="0" anchor="ctr"/>
+          <a:lstStyle/>
+          <a:p>
+            <a:pPr algn="ctr"/>
+          </a:p>
+        </p:txBody>
+      </p:sp>
+      <p:sp>
+        <p:nvSpPr>
+          <p:cNvPr id="19" name="TextBox 18"/>
+          <p:cNvSpPr txBox="1"/>
+          <p:nvPr/>
+        </p:nvSpPr>
+        <p:spPr>
+          <a:xfrm>
+            <a:off x="6272784" y="795528"/>
+            <a:ext cx="5413248" cy="219456"/>
+          </a:xfrm>
+          <a:prstGeom prst="rect">
+            <a:avLst/>
+          </a:prstGeom>
+          <a:noFill/>
+        </p:spPr>
+        <p:txBody>
+          <a:bodyPr wrap="square">
+            <a:spAutoFit/>
+          </a:bodyPr>
+          <a:lstStyle/>
+          <a:p>
+            <a:pPr algn="l"/>
+            <a:r>
+              <a:rPr sz="800" b="0" i="0">
+                <a:solidFill>
+                  <a:srgbClr val="808595"/>
+                </a:solidFill>
+                <a:latin typeface="Calibri"/>
+              </a:rPr>
+              <a:t>vaughnmartin.com/how-it-executes</a:t>
+            </a:r>
+          </a:p>
+        </p:txBody>
+      </p:sp>
       <p:pic>
         <p:nvPicPr>
-          <p:cNvPr id="2" name="Picture 1" descr="02_the_problem.png"/>
+          <p:cNvPr id="20" name="Picture 19" descr="deck_activation.jpg"/>
           <p:cNvPicPr>
             <a:picLocks noChangeAspect="1"/>
           </p:cNvPicPr>
@@ -4788,8 +4695,8 @@
         </p:blipFill>
         <p:spPr>
           <a:xfrm>
-            <a:off x="0" y="0"/>
-            <a:ext cx="9144000" cy="5143500"/>
+            <a:off x="5449824" y="1078992"/>
+            <a:ext cx="6419088" cy="5413248"/>
           </a:xfrm>
           <a:prstGeom prst="rect">
             <a:avLst/>
@@ -4814,9 +4721,794 @@
         <p:nvPr/>
       </p:nvGrpSpPr>
       <p:grpSpPr/>
+      <p:sp>
+        <p:nvSpPr>
+          <p:cNvPr id="2" name="Rectangle 1"/>
+          <p:cNvSpPr/>
+          <p:nvPr/>
+        </p:nvSpPr>
+        <p:spPr>
+          <a:xfrm>
+            <a:off x="0" y="0"/>
+            <a:ext cx="5120640" cy="6858000"/>
+          </a:xfrm>
+          <a:prstGeom prst="rect">
+            <a:avLst/>
+          </a:prstGeom>
+          <a:solidFill>
+            <a:srgbClr val="0A0F2E"/>
+          </a:solidFill>
+          <a:ln>
+            <a:noFill/>
+          </a:ln>
+        </p:spPr>
+        <p:style>
+          <a:lnRef idx="1">
+            <a:schemeClr val="accent1"/>
+          </a:lnRef>
+          <a:fillRef idx="3">
+            <a:schemeClr val="accent1"/>
+          </a:fillRef>
+          <a:effectRef idx="2">
+            <a:schemeClr val="accent1"/>
+          </a:effectRef>
+          <a:fontRef idx="minor">
+            <a:schemeClr val="lt1"/>
+          </a:fontRef>
+        </p:style>
+        <p:txBody>
+          <a:bodyPr rtlCol="0" anchor="ctr"/>
+          <a:lstStyle/>
+          <a:p>
+            <a:pPr algn="ctr"/>
+          </a:p>
+        </p:txBody>
+      </p:sp>
+      <p:sp>
+        <p:nvSpPr>
+          <p:cNvPr id="3" name="Rectangle 2"/>
+          <p:cNvSpPr/>
+          <p:nvPr/>
+        </p:nvSpPr>
+        <p:spPr>
+          <a:xfrm>
+            <a:off x="0" y="0"/>
+            <a:ext cx="54864" cy="6858000"/>
+          </a:xfrm>
+          <a:prstGeom prst="rect">
+            <a:avLst/>
+          </a:prstGeom>
+          <a:solidFill>
+            <a:srgbClr val="2B8A6E"/>
+          </a:solidFill>
+          <a:ln>
+            <a:noFill/>
+          </a:ln>
+        </p:spPr>
+        <p:style>
+          <a:lnRef idx="1">
+            <a:schemeClr val="accent1"/>
+          </a:lnRef>
+          <a:fillRef idx="3">
+            <a:schemeClr val="accent1"/>
+          </a:fillRef>
+          <a:effectRef idx="2">
+            <a:schemeClr val="accent1"/>
+          </a:effectRef>
+          <a:fontRef idx="minor">
+            <a:schemeClr val="lt1"/>
+          </a:fontRef>
+        </p:style>
+        <p:txBody>
+          <a:bodyPr rtlCol="0" anchor="ctr"/>
+          <a:lstStyle/>
+          <a:p>
+            <a:pPr algn="ctr"/>
+          </a:p>
+        </p:txBody>
+      </p:sp>
+      <p:sp>
+        <p:nvSpPr>
+          <p:cNvPr id="4" name="Rectangle 3"/>
+          <p:cNvSpPr/>
+          <p:nvPr/>
+        </p:nvSpPr>
+        <p:spPr>
+          <a:xfrm>
+            <a:off x="5129784" y="0"/>
+            <a:ext cx="7059168" cy="6858000"/>
+          </a:xfrm>
+          <a:prstGeom prst="rect">
+            <a:avLst/>
+          </a:prstGeom>
+          <a:solidFill>
+            <a:srgbClr val="0D1436"/>
+          </a:solidFill>
+          <a:ln>
+            <a:noFill/>
+          </a:ln>
+        </p:spPr>
+        <p:style>
+          <a:lnRef idx="1">
+            <a:schemeClr val="accent1"/>
+          </a:lnRef>
+          <a:fillRef idx="3">
+            <a:schemeClr val="accent1"/>
+          </a:fillRef>
+          <a:effectRef idx="2">
+            <a:schemeClr val="accent1"/>
+          </a:effectRef>
+          <a:fontRef idx="minor">
+            <a:schemeClr val="lt1"/>
+          </a:fontRef>
+        </p:style>
+        <p:txBody>
+          <a:bodyPr rtlCol="0" anchor="ctr"/>
+          <a:lstStyle/>
+          <a:p>
+            <a:pPr algn="ctr"/>
+          </a:p>
+        </p:txBody>
+      </p:sp>
+      <p:sp>
+        <p:nvSpPr>
+          <p:cNvPr id="5" name="TextBox 4"/>
+          <p:cNvSpPr txBox="1"/>
+          <p:nvPr/>
+        </p:nvSpPr>
+        <p:spPr>
+          <a:xfrm>
+            <a:off x="457200" y="292608"/>
+            <a:ext cx="1828800" cy="274320"/>
+          </a:xfrm>
+          <a:prstGeom prst="rect">
+            <a:avLst/>
+          </a:prstGeom>
+          <a:noFill/>
+        </p:spPr>
+        <p:txBody>
+          <a:bodyPr wrap="square">
+            <a:spAutoFit/>
+          </a:bodyPr>
+          <a:lstStyle/>
+          <a:p>
+            <a:pPr algn="l"/>
+            <a:r>
+              <a:rPr sz="800" b="0" i="0">
+                <a:solidFill>
+                  <a:srgbClr val="807850"/>
+                </a:solidFill>
+                <a:latin typeface="Calibri"/>
+              </a:rPr>
+              <a:t>03 / 06</a:t>
+            </a:r>
+          </a:p>
+        </p:txBody>
+      </p:sp>
+      <p:sp>
+        <p:nvSpPr>
+          <p:cNvPr id="6" name="TextBox 5"/>
+          <p:cNvSpPr txBox="1"/>
+          <p:nvPr/>
+        </p:nvSpPr>
+        <p:spPr>
+          <a:xfrm>
+            <a:off x="457200" y="566928"/>
+            <a:ext cx="4114800" cy="320040"/>
+          </a:xfrm>
+          <a:prstGeom prst="rect">
+            <a:avLst/>
+          </a:prstGeom>
+          <a:noFill/>
+        </p:spPr>
+        <p:txBody>
+          <a:bodyPr wrap="square">
+            <a:spAutoFit/>
+          </a:bodyPr>
+          <a:lstStyle/>
+          <a:p>
+            <a:pPr algn="l"/>
+            <a:r>
+              <a:rPr sz="900" b="1" i="0">
+                <a:solidFill>
+                  <a:srgbClr val="2B8A6E"/>
+                </a:solidFill>
+                <a:latin typeface="Calibri"/>
+              </a:rPr>
+              <a:t>HOW IT WORKS</a:t>
+            </a:r>
+          </a:p>
+        </p:txBody>
+      </p:sp>
+      <p:sp>
+        <p:nvSpPr>
+          <p:cNvPr id="7" name="Rectangle 6"/>
+          <p:cNvSpPr/>
+          <p:nvPr/>
+        </p:nvSpPr>
+        <p:spPr>
+          <a:xfrm>
+            <a:off x="457200" y="886968"/>
+            <a:ext cx="457200" cy="36576"/>
+          </a:xfrm>
+          <a:prstGeom prst="rect">
+            <a:avLst/>
+          </a:prstGeom>
+          <a:solidFill>
+            <a:srgbClr val="2B8A6E"/>
+          </a:solidFill>
+          <a:ln>
+            <a:noFill/>
+          </a:ln>
+        </p:spPr>
+        <p:style>
+          <a:lnRef idx="1">
+            <a:schemeClr val="accent1"/>
+          </a:lnRef>
+          <a:fillRef idx="3">
+            <a:schemeClr val="accent1"/>
+          </a:fillRef>
+          <a:effectRef idx="2">
+            <a:schemeClr val="accent1"/>
+          </a:effectRef>
+          <a:fontRef idx="minor">
+            <a:schemeClr val="lt1"/>
+          </a:fontRef>
+        </p:style>
+        <p:txBody>
+          <a:bodyPr rtlCol="0" anchor="ctr"/>
+          <a:lstStyle/>
+          <a:p>
+            <a:pPr algn="ctr"/>
+          </a:p>
+        </p:txBody>
+      </p:sp>
+      <p:sp>
+        <p:nvSpPr>
+          <p:cNvPr id="8" name="TextBox 7"/>
+          <p:cNvSpPr txBox="1"/>
+          <p:nvPr/>
+        </p:nvSpPr>
+        <p:spPr>
+          <a:xfrm>
+            <a:off x="457200" y="1005840"/>
+            <a:ext cx="4480560" cy="1737360"/>
+          </a:xfrm>
+          <a:prstGeom prst="rect">
+            <a:avLst/>
+          </a:prstGeom>
+          <a:noFill/>
+        </p:spPr>
+        <p:txBody>
+          <a:bodyPr wrap="square">
+            <a:spAutoFit/>
+          </a:bodyPr>
+          <a:lstStyle/>
+          <a:p>
+            <a:r>
+              <a:rPr sz="2700" b="1">
+                <a:solidFill>
+                  <a:srgbClr val="FFFFFF"/>
+                </a:solidFill>
+                <a:latin typeface="Calibri"/>
+              </a:rPr>
+              <a:t>From trigger to coordinated execution in minutes.</a:t>
+            </a:r>
+          </a:p>
+        </p:txBody>
+      </p:sp>
+      <p:sp>
+        <p:nvSpPr>
+          <p:cNvPr id="9" name="Rectangle 8"/>
+          <p:cNvSpPr/>
+          <p:nvPr/>
+        </p:nvSpPr>
+        <p:spPr>
+          <a:xfrm>
+            <a:off x="457200" y="2788920"/>
+            <a:ext cx="457200" cy="45720"/>
+          </a:xfrm>
+          <a:prstGeom prst="rect">
+            <a:avLst/>
+          </a:prstGeom>
+          <a:solidFill>
+            <a:srgbClr val="2B8A6E"/>
+          </a:solidFill>
+          <a:ln>
+            <a:noFill/>
+          </a:ln>
+        </p:spPr>
+        <p:style>
+          <a:lnRef idx="1">
+            <a:schemeClr val="accent1"/>
+          </a:lnRef>
+          <a:fillRef idx="3">
+            <a:schemeClr val="accent1"/>
+          </a:fillRef>
+          <a:effectRef idx="2">
+            <a:schemeClr val="accent1"/>
+          </a:effectRef>
+          <a:fontRef idx="minor">
+            <a:schemeClr val="lt1"/>
+          </a:fontRef>
+        </p:style>
+        <p:txBody>
+          <a:bodyPr rtlCol="0" anchor="ctr"/>
+          <a:lstStyle/>
+          <a:p>
+            <a:pPr algn="ctr"/>
+          </a:p>
+        </p:txBody>
+      </p:sp>
+      <p:sp>
+        <p:nvSpPr>
+          <p:cNvPr id="10" name="TextBox 9"/>
+          <p:cNvSpPr txBox="1"/>
+          <p:nvPr/>
+        </p:nvSpPr>
+        <p:spPr>
+          <a:xfrm>
+            <a:off x="457200" y="2907792"/>
+            <a:ext cx="4480560" cy="1920240"/>
+          </a:xfrm>
+          <a:prstGeom prst="rect">
+            <a:avLst/>
+          </a:prstGeom>
+          <a:noFill/>
+        </p:spPr>
+        <p:txBody>
+          <a:bodyPr wrap="square">
+            <a:spAutoFit/>
+          </a:bodyPr>
+          <a:lstStyle/>
+          <a:p>
+            <a:pPr>
+              <a:spcAft>
+                <a:spcPts val="500"/>
+              </a:spcAft>
+            </a:pPr>
+            <a:r>
+              <a:rPr sz="1100">
+                <a:solidFill>
+                  <a:srgbClr val="CCCFD8"/>
+                </a:solidFill>
+                <a:latin typeface="Calibri"/>
+              </a:rPr>
+              <a:t>▶  ① Signal detected</a:t>
+            </a:r>
+          </a:p>
+          <a:p>
+            <a:pPr>
+              <a:spcAft>
+                <a:spcPts val="500"/>
+              </a:spcAft>
+            </a:pPr>
+            <a:r>
+              <a:rPr sz="1100">
+                <a:solidFill>
+                  <a:srgbClr val="CCCFD8"/>
+                </a:solidFill>
+                <a:latin typeface="Calibri"/>
+              </a:rPr>
+              <a:t>▶  ② Matching protocol staged</a:t>
+            </a:r>
+          </a:p>
+          <a:p>
+            <a:pPr>
+              <a:spcAft>
+                <a:spcPts val="500"/>
+              </a:spcAft>
+            </a:pPr>
+            <a:r>
+              <a:rPr sz="1100">
+                <a:solidFill>
+                  <a:srgbClr val="CCCFD8"/>
+                </a:solidFill>
+                <a:latin typeface="Calibri"/>
+              </a:rPr>
+              <a:t>▶  ③ Stakeholders notified</a:t>
+            </a:r>
+          </a:p>
+          <a:p>
+            <a:pPr>
+              <a:spcAft>
+                <a:spcPts val="500"/>
+              </a:spcAft>
+            </a:pPr>
+            <a:r>
+              <a:rPr sz="1100">
+                <a:solidFill>
+                  <a:srgbClr val="CCCFD8"/>
+                </a:solidFill>
+                <a:latin typeface="Calibri"/>
+              </a:rPr>
+              <a:t>▶  ④ Executive authorizes</a:t>
+            </a:r>
+          </a:p>
+          <a:p>
+            <a:pPr>
+              <a:spcAft>
+                <a:spcPts val="500"/>
+              </a:spcAft>
+            </a:pPr>
+            <a:r>
+              <a:rPr sz="1100">
+                <a:solidFill>
+                  <a:srgbClr val="CCCFD8"/>
+                </a:solidFill>
+                <a:latin typeface="Calibri"/>
+              </a:rPr>
+              <a:t>▶  ⑤ Execution launches</a:t>
+            </a:r>
+          </a:p>
+        </p:txBody>
+      </p:sp>
+      <p:sp>
+        <p:nvSpPr>
+          <p:cNvPr id="11" name="TextBox 10"/>
+          <p:cNvSpPr txBox="1"/>
+          <p:nvPr/>
+        </p:nvSpPr>
+        <p:spPr>
+          <a:xfrm>
+            <a:off x="457200" y="5349240"/>
+            <a:ext cx="4480560" cy="960120"/>
+          </a:xfrm>
+          <a:prstGeom prst="rect">
+            <a:avLst/>
+          </a:prstGeom>
+          <a:noFill/>
+        </p:spPr>
+        <p:txBody>
+          <a:bodyPr wrap="square">
+            <a:spAutoFit/>
+          </a:bodyPr>
+          <a:lstStyle/>
+          <a:p>
+            <a:pPr algn="l"/>
+            <a:r>
+              <a:rPr sz="900" b="0" i="1">
+                <a:solidFill>
+                  <a:srgbClr val="888EA4"/>
+                </a:solidFill>
+                <a:latin typeface="Georgia"/>
+              </a:rPr>
+              <a:t>"The key change is that coordination is pre-built, so when the trigger fires, execution starts."</a:t>
+            </a:r>
+          </a:p>
+        </p:txBody>
+      </p:sp>
+      <p:sp>
+        <p:nvSpPr>
+          <p:cNvPr id="12" name="Rectangle 11"/>
+          <p:cNvSpPr/>
+          <p:nvPr/>
+        </p:nvSpPr>
+        <p:spPr>
+          <a:xfrm>
+            <a:off x="0" y="6492240"/>
+            <a:ext cx="5120640" cy="365760"/>
+          </a:xfrm>
+          <a:prstGeom prst="rect">
+            <a:avLst/>
+          </a:prstGeom>
+          <a:solidFill>
+            <a:srgbClr val="06091E"/>
+          </a:solidFill>
+          <a:ln>
+            <a:noFill/>
+          </a:ln>
+        </p:spPr>
+        <p:style>
+          <a:lnRef idx="1">
+            <a:schemeClr val="accent1"/>
+          </a:lnRef>
+          <a:fillRef idx="3">
+            <a:schemeClr val="accent1"/>
+          </a:fillRef>
+          <a:effectRef idx="2">
+            <a:schemeClr val="accent1"/>
+          </a:effectRef>
+          <a:fontRef idx="minor">
+            <a:schemeClr val="lt1"/>
+          </a:fontRef>
+        </p:style>
+        <p:txBody>
+          <a:bodyPr rtlCol="0" anchor="ctr"/>
+          <a:lstStyle/>
+          <a:p>
+            <a:pPr algn="ctr"/>
+          </a:p>
+        </p:txBody>
+      </p:sp>
+      <p:sp>
+        <p:nvSpPr>
+          <p:cNvPr id="13" name="TextBox 12"/>
+          <p:cNvSpPr txBox="1"/>
+          <p:nvPr/>
+        </p:nvSpPr>
+        <p:spPr>
+          <a:xfrm>
+            <a:off x="457200" y="6510528"/>
+            <a:ext cx="4114800" cy="292608"/>
+          </a:xfrm>
+          <a:prstGeom prst="rect">
+            <a:avLst/>
+          </a:prstGeom>
+          <a:noFill/>
+        </p:spPr>
+        <p:txBody>
+          <a:bodyPr wrap="square">
+            <a:spAutoFit/>
+          </a:bodyPr>
+          <a:lstStyle/>
+          <a:p>
+            <a:pPr algn="l"/>
+            <a:r>
+              <a:rPr sz="800" b="1" i="0">
+                <a:solidFill>
+                  <a:srgbClr val="A09668"/>
+                </a:solidFill>
+                <a:latin typeface="Calibri"/>
+              </a:rPr>
+              <a:t>VaughnMartin  ·  READINESS OS</a:t>
+            </a:r>
+          </a:p>
+        </p:txBody>
+      </p:sp>
+      <p:sp>
+        <p:nvSpPr>
+          <p:cNvPr id="14" name="Rectangle 13"/>
+          <p:cNvSpPr/>
+          <p:nvPr/>
+        </p:nvSpPr>
+        <p:spPr>
+          <a:xfrm>
+            <a:off x="5449824" y="731520"/>
+            <a:ext cx="6419088" cy="347472"/>
+          </a:xfrm>
+          <a:prstGeom prst="rect">
+            <a:avLst/>
+          </a:prstGeom>
+          <a:solidFill>
+            <a:srgbClr val="1E2035"/>
+          </a:solidFill>
+          <a:ln>
+            <a:noFill/>
+          </a:ln>
+        </p:spPr>
+        <p:style>
+          <a:lnRef idx="1">
+            <a:schemeClr val="accent1"/>
+          </a:lnRef>
+          <a:fillRef idx="3">
+            <a:schemeClr val="accent1"/>
+          </a:fillRef>
+          <a:effectRef idx="2">
+            <a:schemeClr val="accent1"/>
+          </a:effectRef>
+          <a:fontRef idx="minor">
+            <a:schemeClr val="lt1"/>
+          </a:fontRef>
+        </p:style>
+        <p:txBody>
+          <a:bodyPr rtlCol="0" anchor="ctr"/>
+          <a:lstStyle/>
+          <a:p>
+            <a:pPr algn="ctr"/>
+          </a:p>
+        </p:txBody>
+      </p:sp>
+      <p:sp>
+        <p:nvSpPr>
+          <p:cNvPr id="15" name="Oval 14"/>
+          <p:cNvSpPr/>
+          <p:nvPr/>
+        </p:nvSpPr>
+        <p:spPr>
+          <a:xfrm>
+            <a:off x="5586984" y="832104"/>
+            <a:ext cx="109728" cy="109728"/>
+          </a:xfrm>
+          <a:prstGeom prst="ellipse">
+            <a:avLst/>
+          </a:prstGeom>
+          <a:solidFill>
+            <a:srgbClr val="FF5F57"/>
+          </a:solidFill>
+          <a:ln>
+            <a:noFill/>
+          </a:ln>
+        </p:spPr>
+        <p:style>
+          <a:lnRef idx="1">
+            <a:schemeClr val="accent1"/>
+          </a:lnRef>
+          <a:fillRef idx="3">
+            <a:schemeClr val="accent1"/>
+          </a:fillRef>
+          <a:effectRef idx="2">
+            <a:schemeClr val="accent1"/>
+          </a:effectRef>
+          <a:fontRef idx="minor">
+            <a:schemeClr val="lt1"/>
+          </a:fontRef>
+        </p:style>
+        <p:txBody>
+          <a:bodyPr rtlCol="0" anchor="ctr"/>
+          <a:lstStyle/>
+          <a:p>
+            <a:pPr algn="ctr"/>
+          </a:p>
+        </p:txBody>
+      </p:sp>
+      <p:sp>
+        <p:nvSpPr>
+          <p:cNvPr id="16" name="Oval 15"/>
+          <p:cNvSpPr/>
+          <p:nvPr/>
+        </p:nvSpPr>
+        <p:spPr>
+          <a:xfrm>
+            <a:off x="5788152" y="832104"/>
+            <a:ext cx="109728" cy="109728"/>
+          </a:xfrm>
+          <a:prstGeom prst="ellipse">
+            <a:avLst/>
+          </a:prstGeom>
+          <a:solidFill>
+            <a:srgbClr val="FFBD2E"/>
+          </a:solidFill>
+          <a:ln>
+            <a:noFill/>
+          </a:ln>
+        </p:spPr>
+        <p:style>
+          <a:lnRef idx="1">
+            <a:schemeClr val="accent1"/>
+          </a:lnRef>
+          <a:fillRef idx="3">
+            <a:schemeClr val="accent1"/>
+          </a:fillRef>
+          <a:effectRef idx="2">
+            <a:schemeClr val="accent1"/>
+          </a:effectRef>
+          <a:fontRef idx="minor">
+            <a:schemeClr val="lt1"/>
+          </a:fontRef>
+        </p:style>
+        <p:txBody>
+          <a:bodyPr rtlCol="0" anchor="ctr"/>
+          <a:lstStyle/>
+          <a:p>
+            <a:pPr algn="ctr"/>
+          </a:p>
+        </p:txBody>
+      </p:sp>
+      <p:sp>
+        <p:nvSpPr>
+          <p:cNvPr id="17" name="Oval 16"/>
+          <p:cNvSpPr/>
+          <p:nvPr/>
+        </p:nvSpPr>
+        <p:spPr>
+          <a:xfrm>
+            <a:off x="5989320" y="832104"/>
+            <a:ext cx="109728" cy="109728"/>
+          </a:xfrm>
+          <a:prstGeom prst="ellipse">
+            <a:avLst/>
+          </a:prstGeom>
+          <a:solidFill>
+            <a:srgbClr val="28CA41"/>
+          </a:solidFill>
+          <a:ln>
+            <a:noFill/>
+          </a:ln>
+        </p:spPr>
+        <p:style>
+          <a:lnRef idx="1">
+            <a:schemeClr val="accent1"/>
+          </a:lnRef>
+          <a:fillRef idx="3">
+            <a:schemeClr val="accent1"/>
+          </a:fillRef>
+          <a:effectRef idx="2">
+            <a:schemeClr val="accent1"/>
+          </a:effectRef>
+          <a:fontRef idx="minor">
+            <a:schemeClr val="lt1"/>
+          </a:fontRef>
+        </p:style>
+        <p:txBody>
+          <a:bodyPr rtlCol="0" anchor="ctr"/>
+          <a:lstStyle/>
+          <a:p>
+            <a:pPr algn="ctr"/>
+          </a:p>
+        </p:txBody>
+      </p:sp>
+      <p:sp>
+        <p:nvSpPr>
+          <p:cNvPr id="18" name="Rectangle 17"/>
+          <p:cNvSpPr/>
+          <p:nvPr/>
+        </p:nvSpPr>
+        <p:spPr>
+          <a:xfrm>
+            <a:off x="6227064" y="786384"/>
+            <a:ext cx="5458968" cy="228600"/>
+          </a:xfrm>
+          <a:prstGeom prst="rect">
+            <a:avLst/>
+          </a:prstGeom>
+          <a:solidFill>
+            <a:srgbClr val="2A2D46"/>
+          </a:solidFill>
+          <a:ln>
+            <a:noFill/>
+          </a:ln>
+        </p:spPr>
+        <p:style>
+          <a:lnRef idx="1">
+            <a:schemeClr val="accent1"/>
+          </a:lnRef>
+          <a:fillRef idx="3">
+            <a:schemeClr val="accent1"/>
+          </a:fillRef>
+          <a:effectRef idx="2">
+            <a:schemeClr val="accent1"/>
+          </a:effectRef>
+          <a:fontRef idx="minor">
+            <a:schemeClr val="lt1"/>
+          </a:fontRef>
+        </p:style>
+        <p:txBody>
+          <a:bodyPr rtlCol="0" anchor="ctr"/>
+          <a:lstStyle/>
+          <a:p>
+            <a:pPr algn="ctr"/>
+          </a:p>
+        </p:txBody>
+      </p:sp>
+      <p:sp>
+        <p:nvSpPr>
+          <p:cNvPr id="19" name="TextBox 18"/>
+          <p:cNvSpPr txBox="1"/>
+          <p:nvPr/>
+        </p:nvSpPr>
+        <p:spPr>
+          <a:xfrm>
+            <a:off x="6272784" y="795528"/>
+            <a:ext cx="5413248" cy="219456"/>
+          </a:xfrm>
+          <a:prstGeom prst="rect">
+            <a:avLst/>
+          </a:prstGeom>
+          <a:noFill/>
+        </p:spPr>
+        <p:txBody>
+          <a:bodyPr wrap="square">
+            <a:spAutoFit/>
+          </a:bodyPr>
+          <a:lstStyle/>
+          <a:p>
+            <a:pPr algn="l"/>
+            <a:r>
+              <a:rPr sz="800" b="0" i="0">
+                <a:solidFill>
+                  <a:srgbClr val="808595"/>
+                </a:solidFill>
+                <a:latin typeface="Calibri"/>
+              </a:rPr>
+              <a:t>vaughnmartin.com/how-it-executes</a:t>
+            </a:r>
+          </a:p>
+        </p:txBody>
+      </p:sp>
       <p:pic>
         <p:nvPicPr>
-          <p:cNvPr id="2" name="Picture 1" descr="03_two_stage_formula.png"/>
+          <p:cNvPr id="20" name="Picture 19" descr="deck_test_drive.jpg"/>
           <p:cNvPicPr>
             <a:picLocks noChangeAspect="1"/>
           </p:cNvPicPr>
@@ -4830,8 +5522,8 @@
         </p:blipFill>
         <p:spPr>
           <a:xfrm>
-            <a:off x="0" y="0"/>
-            <a:ext cx="9144000" cy="5143500"/>
+            <a:off x="5449824" y="1078992"/>
+            <a:ext cx="6419088" cy="5413248"/>
           </a:xfrm>
           <a:prstGeom prst="rect">
             <a:avLst/>
@@ -4856,9 +5548,773 @@
         <p:nvPr/>
       </p:nvGrpSpPr>
       <p:grpSpPr/>
+      <p:sp>
+        <p:nvSpPr>
+          <p:cNvPr id="2" name="Rectangle 1"/>
+          <p:cNvSpPr/>
+          <p:nvPr/>
+        </p:nvSpPr>
+        <p:spPr>
+          <a:xfrm>
+            <a:off x="0" y="0"/>
+            <a:ext cx="5120640" cy="6858000"/>
+          </a:xfrm>
+          <a:prstGeom prst="rect">
+            <a:avLst/>
+          </a:prstGeom>
+          <a:solidFill>
+            <a:srgbClr val="0A0F2E"/>
+          </a:solidFill>
+          <a:ln>
+            <a:noFill/>
+          </a:ln>
+        </p:spPr>
+        <p:style>
+          <a:lnRef idx="1">
+            <a:schemeClr val="accent1"/>
+          </a:lnRef>
+          <a:fillRef idx="3">
+            <a:schemeClr val="accent1"/>
+          </a:fillRef>
+          <a:effectRef idx="2">
+            <a:schemeClr val="accent1"/>
+          </a:effectRef>
+          <a:fontRef idx="minor">
+            <a:schemeClr val="lt1"/>
+          </a:fontRef>
+        </p:style>
+        <p:txBody>
+          <a:bodyPr rtlCol="0" anchor="ctr"/>
+          <a:lstStyle/>
+          <a:p>
+            <a:pPr algn="ctr"/>
+          </a:p>
+        </p:txBody>
+      </p:sp>
+      <p:sp>
+        <p:nvSpPr>
+          <p:cNvPr id="3" name="Rectangle 2"/>
+          <p:cNvSpPr/>
+          <p:nvPr/>
+        </p:nvSpPr>
+        <p:spPr>
+          <a:xfrm>
+            <a:off x="0" y="0"/>
+            <a:ext cx="54864" cy="6858000"/>
+          </a:xfrm>
+          <a:prstGeom prst="rect">
+            <a:avLst/>
+          </a:prstGeom>
+          <a:solidFill>
+            <a:srgbClr val="C9A84C"/>
+          </a:solidFill>
+          <a:ln>
+            <a:noFill/>
+          </a:ln>
+        </p:spPr>
+        <p:style>
+          <a:lnRef idx="1">
+            <a:schemeClr val="accent1"/>
+          </a:lnRef>
+          <a:fillRef idx="3">
+            <a:schemeClr val="accent1"/>
+          </a:fillRef>
+          <a:effectRef idx="2">
+            <a:schemeClr val="accent1"/>
+          </a:effectRef>
+          <a:fontRef idx="minor">
+            <a:schemeClr val="lt1"/>
+          </a:fontRef>
+        </p:style>
+        <p:txBody>
+          <a:bodyPr rtlCol="0" anchor="ctr"/>
+          <a:lstStyle/>
+          <a:p>
+            <a:pPr algn="ctr"/>
+          </a:p>
+        </p:txBody>
+      </p:sp>
+      <p:sp>
+        <p:nvSpPr>
+          <p:cNvPr id="4" name="Rectangle 3"/>
+          <p:cNvSpPr/>
+          <p:nvPr/>
+        </p:nvSpPr>
+        <p:spPr>
+          <a:xfrm>
+            <a:off x="5129784" y="0"/>
+            <a:ext cx="7059168" cy="6858000"/>
+          </a:xfrm>
+          <a:prstGeom prst="rect">
+            <a:avLst/>
+          </a:prstGeom>
+          <a:solidFill>
+            <a:srgbClr val="0D1436"/>
+          </a:solidFill>
+          <a:ln>
+            <a:noFill/>
+          </a:ln>
+        </p:spPr>
+        <p:style>
+          <a:lnRef idx="1">
+            <a:schemeClr val="accent1"/>
+          </a:lnRef>
+          <a:fillRef idx="3">
+            <a:schemeClr val="accent1"/>
+          </a:fillRef>
+          <a:effectRef idx="2">
+            <a:schemeClr val="accent1"/>
+          </a:effectRef>
+          <a:fontRef idx="minor">
+            <a:schemeClr val="lt1"/>
+          </a:fontRef>
+        </p:style>
+        <p:txBody>
+          <a:bodyPr rtlCol="0" anchor="ctr"/>
+          <a:lstStyle/>
+          <a:p>
+            <a:pPr algn="ctr"/>
+          </a:p>
+        </p:txBody>
+      </p:sp>
+      <p:sp>
+        <p:nvSpPr>
+          <p:cNvPr id="5" name="TextBox 4"/>
+          <p:cNvSpPr txBox="1"/>
+          <p:nvPr/>
+        </p:nvSpPr>
+        <p:spPr>
+          <a:xfrm>
+            <a:off x="457200" y="292608"/>
+            <a:ext cx="1828800" cy="274320"/>
+          </a:xfrm>
+          <a:prstGeom prst="rect">
+            <a:avLst/>
+          </a:prstGeom>
+          <a:noFill/>
+        </p:spPr>
+        <p:txBody>
+          <a:bodyPr wrap="square">
+            <a:spAutoFit/>
+          </a:bodyPr>
+          <a:lstStyle/>
+          <a:p>
+            <a:pPr algn="l"/>
+            <a:r>
+              <a:rPr sz="800" b="0" i="0">
+                <a:solidFill>
+                  <a:srgbClr val="807850"/>
+                </a:solidFill>
+                <a:latin typeface="Calibri"/>
+              </a:rPr>
+              <a:t>04 / 06</a:t>
+            </a:r>
+          </a:p>
+        </p:txBody>
+      </p:sp>
+      <p:sp>
+        <p:nvSpPr>
+          <p:cNvPr id="6" name="TextBox 5"/>
+          <p:cNvSpPr txBox="1"/>
+          <p:nvPr/>
+        </p:nvSpPr>
+        <p:spPr>
+          <a:xfrm>
+            <a:off x="457200" y="566928"/>
+            <a:ext cx="4114800" cy="320040"/>
+          </a:xfrm>
+          <a:prstGeom prst="rect">
+            <a:avLst/>
+          </a:prstGeom>
+          <a:noFill/>
+        </p:spPr>
+        <p:txBody>
+          <a:bodyPr wrap="square">
+            <a:spAutoFit/>
+          </a:bodyPr>
+          <a:lstStyle/>
+          <a:p>
+            <a:pPr algn="l"/>
+            <a:r>
+              <a:rPr sz="900" b="1" i="0">
+                <a:solidFill>
+                  <a:srgbClr val="C9A84C"/>
+                </a:solidFill>
+                <a:latin typeface="Calibri"/>
+              </a:rPr>
+              <a:t>PROOF — NOW, NOT ROADMAP</a:t>
+            </a:r>
+          </a:p>
+        </p:txBody>
+      </p:sp>
+      <p:sp>
+        <p:nvSpPr>
+          <p:cNvPr id="7" name="Rectangle 6"/>
+          <p:cNvSpPr/>
+          <p:nvPr/>
+        </p:nvSpPr>
+        <p:spPr>
+          <a:xfrm>
+            <a:off x="457200" y="886968"/>
+            <a:ext cx="457200" cy="36576"/>
+          </a:xfrm>
+          <a:prstGeom prst="rect">
+            <a:avLst/>
+          </a:prstGeom>
+          <a:solidFill>
+            <a:srgbClr val="C9A84C"/>
+          </a:solidFill>
+          <a:ln>
+            <a:noFill/>
+          </a:ln>
+        </p:spPr>
+        <p:style>
+          <a:lnRef idx="1">
+            <a:schemeClr val="accent1"/>
+          </a:lnRef>
+          <a:fillRef idx="3">
+            <a:schemeClr val="accent1"/>
+          </a:fillRef>
+          <a:effectRef idx="2">
+            <a:schemeClr val="accent1"/>
+          </a:effectRef>
+          <a:fontRef idx="minor">
+            <a:schemeClr val="lt1"/>
+          </a:fontRef>
+        </p:style>
+        <p:txBody>
+          <a:bodyPr rtlCol="0" anchor="ctr"/>
+          <a:lstStyle/>
+          <a:p>
+            <a:pPr algn="ctr"/>
+          </a:p>
+        </p:txBody>
+      </p:sp>
+      <p:sp>
+        <p:nvSpPr>
+          <p:cNvPr id="8" name="TextBox 7"/>
+          <p:cNvSpPr txBox="1"/>
+          <p:nvPr/>
+        </p:nvSpPr>
+        <p:spPr>
+          <a:xfrm>
+            <a:off x="457200" y="1005840"/>
+            <a:ext cx="4480560" cy="1737360"/>
+          </a:xfrm>
+          <a:prstGeom prst="rect">
+            <a:avLst/>
+          </a:prstGeom>
+          <a:noFill/>
+        </p:spPr>
+        <p:txBody>
+          <a:bodyPr wrap="square">
+            <a:spAutoFit/>
+          </a:bodyPr>
+          <a:lstStyle/>
+          <a:p>
+            <a:r>
+              <a:rPr sz="2700" b="1">
+                <a:solidFill>
+                  <a:srgbClr val="FFFFFF"/>
+                </a:solidFill>
+                <a:latin typeface="Calibri"/>
+              </a:rPr>
+              <a:t>Built. Live.</a:t>
+            </a:r>
+          </a:p>
+          <a:p>
+            <a:r>
+              <a:rPr sz="2700" b="1">
+                <a:solidFill>
+                  <a:srgbClr val="FFFFFF"/>
+                </a:solidFill>
+                <a:latin typeface="Calibri"/>
+              </a:rPr>
+              <a:t>In production now.</a:t>
+            </a:r>
+          </a:p>
+        </p:txBody>
+      </p:sp>
+      <p:sp>
+        <p:nvSpPr>
+          <p:cNvPr id="9" name="Rectangle 8"/>
+          <p:cNvSpPr/>
+          <p:nvPr/>
+        </p:nvSpPr>
+        <p:spPr>
+          <a:xfrm>
+            <a:off x="457200" y="2788920"/>
+            <a:ext cx="457200" cy="45720"/>
+          </a:xfrm>
+          <a:prstGeom prst="rect">
+            <a:avLst/>
+          </a:prstGeom>
+          <a:solidFill>
+            <a:srgbClr val="C9A84C"/>
+          </a:solidFill>
+          <a:ln>
+            <a:noFill/>
+          </a:ln>
+        </p:spPr>
+        <p:style>
+          <a:lnRef idx="1">
+            <a:schemeClr val="accent1"/>
+          </a:lnRef>
+          <a:fillRef idx="3">
+            <a:schemeClr val="accent1"/>
+          </a:fillRef>
+          <a:effectRef idx="2">
+            <a:schemeClr val="accent1"/>
+          </a:effectRef>
+          <a:fontRef idx="minor">
+            <a:schemeClr val="lt1"/>
+          </a:fontRef>
+        </p:style>
+        <p:txBody>
+          <a:bodyPr rtlCol="0" anchor="ctr"/>
+          <a:lstStyle/>
+          <a:p>
+            <a:pPr algn="ctr"/>
+          </a:p>
+        </p:txBody>
+      </p:sp>
+      <p:sp>
+        <p:nvSpPr>
+          <p:cNvPr id="10" name="TextBox 9"/>
+          <p:cNvSpPr txBox="1"/>
+          <p:nvPr/>
+        </p:nvSpPr>
+        <p:spPr>
+          <a:xfrm>
+            <a:off x="457200" y="2907792"/>
+            <a:ext cx="4480560" cy="1920240"/>
+          </a:xfrm>
+          <a:prstGeom prst="rect">
+            <a:avLst/>
+          </a:prstGeom>
+          <a:noFill/>
+        </p:spPr>
+        <p:txBody>
+          <a:bodyPr wrap="square">
+            <a:spAutoFit/>
+          </a:bodyPr>
+          <a:lstStyle/>
+          <a:p>
+            <a:pPr>
+              <a:spcAft>
+                <a:spcPts val="500"/>
+              </a:spcAft>
+            </a:pPr>
+            <a:r>
+              <a:rPr sz="1100">
+                <a:solidFill>
+                  <a:srgbClr val="CCCFD8"/>
+                </a:solidFill>
+                <a:latin typeface="Calibri"/>
+              </a:rPr>
+              <a:t>▶  Production platform live at vaughnmartin.com</a:t>
+            </a:r>
+          </a:p>
+          <a:p>
+            <a:pPr>
+              <a:spcAft>
+                <a:spcPts val="500"/>
+              </a:spcAft>
+            </a:pPr>
+            <a:r>
+              <a:rPr sz="1100">
+                <a:solidFill>
+                  <a:srgbClr val="CCCFD8"/>
+                </a:solidFill>
+                <a:latin typeface="Calibri"/>
+              </a:rPr>
+              <a:t>▶  Full public execution walkthrough available</a:t>
+            </a:r>
+          </a:p>
+          <a:p>
+            <a:pPr>
+              <a:spcAft>
+                <a:spcPts val="500"/>
+              </a:spcAft>
+            </a:pPr>
+            <a:r>
+              <a:rPr sz="1100">
+                <a:solidFill>
+                  <a:srgbClr val="CCCFD8"/>
+                </a:solidFill>
+                <a:latin typeface="Calibri"/>
+              </a:rPr>
+              <a:t>▶  Founding Partner cohort open for 90-day validation</a:t>
+            </a:r>
+          </a:p>
+        </p:txBody>
+      </p:sp>
+      <p:sp>
+        <p:nvSpPr>
+          <p:cNvPr id="11" name="TextBox 10"/>
+          <p:cNvSpPr txBox="1"/>
+          <p:nvPr/>
+        </p:nvSpPr>
+        <p:spPr>
+          <a:xfrm>
+            <a:off x="457200" y="5349240"/>
+            <a:ext cx="4480560" cy="960120"/>
+          </a:xfrm>
+          <a:prstGeom prst="rect">
+            <a:avLst/>
+          </a:prstGeom>
+          <a:noFill/>
+        </p:spPr>
+        <p:txBody>
+          <a:bodyPr wrap="square">
+            <a:spAutoFit/>
+          </a:bodyPr>
+          <a:lstStyle/>
+          <a:p>
+            <a:pPr algn="l"/>
+            <a:r>
+              <a:rPr sz="900" b="0" i="1">
+                <a:solidFill>
+                  <a:srgbClr val="888EA4"/>
+                </a:solidFill>
+                <a:latin typeface="Georgia"/>
+              </a:rPr>
+              <a:t>"This is not a roadmap concept. The platform is live and testable now."</a:t>
+            </a:r>
+          </a:p>
+        </p:txBody>
+      </p:sp>
+      <p:sp>
+        <p:nvSpPr>
+          <p:cNvPr id="12" name="Rectangle 11"/>
+          <p:cNvSpPr/>
+          <p:nvPr/>
+        </p:nvSpPr>
+        <p:spPr>
+          <a:xfrm>
+            <a:off x="0" y="6492240"/>
+            <a:ext cx="5120640" cy="365760"/>
+          </a:xfrm>
+          <a:prstGeom prst="rect">
+            <a:avLst/>
+          </a:prstGeom>
+          <a:solidFill>
+            <a:srgbClr val="06091E"/>
+          </a:solidFill>
+          <a:ln>
+            <a:noFill/>
+          </a:ln>
+        </p:spPr>
+        <p:style>
+          <a:lnRef idx="1">
+            <a:schemeClr val="accent1"/>
+          </a:lnRef>
+          <a:fillRef idx="3">
+            <a:schemeClr val="accent1"/>
+          </a:fillRef>
+          <a:effectRef idx="2">
+            <a:schemeClr val="accent1"/>
+          </a:effectRef>
+          <a:fontRef idx="minor">
+            <a:schemeClr val="lt1"/>
+          </a:fontRef>
+        </p:style>
+        <p:txBody>
+          <a:bodyPr rtlCol="0" anchor="ctr"/>
+          <a:lstStyle/>
+          <a:p>
+            <a:pPr algn="ctr"/>
+          </a:p>
+        </p:txBody>
+      </p:sp>
+      <p:sp>
+        <p:nvSpPr>
+          <p:cNvPr id="13" name="TextBox 12"/>
+          <p:cNvSpPr txBox="1"/>
+          <p:nvPr/>
+        </p:nvSpPr>
+        <p:spPr>
+          <a:xfrm>
+            <a:off x="457200" y="6510528"/>
+            <a:ext cx="4114800" cy="292608"/>
+          </a:xfrm>
+          <a:prstGeom prst="rect">
+            <a:avLst/>
+          </a:prstGeom>
+          <a:noFill/>
+        </p:spPr>
+        <p:txBody>
+          <a:bodyPr wrap="square">
+            <a:spAutoFit/>
+          </a:bodyPr>
+          <a:lstStyle/>
+          <a:p>
+            <a:pPr algn="l"/>
+            <a:r>
+              <a:rPr sz="800" b="1" i="0">
+                <a:solidFill>
+                  <a:srgbClr val="A09668"/>
+                </a:solidFill>
+                <a:latin typeface="Calibri"/>
+              </a:rPr>
+              <a:t>VaughnMartin  ·  READINESS OS</a:t>
+            </a:r>
+          </a:p>
+        </p:txBody>
+      </p:sp>
+      <p:sp>
+        <p:nvSpPr>
+          <p:cNvPr id="14" name="Rectangle 13"/>
+          <p:cNvSpPr/>
+          <p:nvPr/>
+        </p:nvSpPr>
+        <p:spPr>
+          <a:xfrm>
+            <a:off x="5449824" y="731520"/>
+            <a:ext cx="6419088" cy="347472"/>
+          </a:xfrm>
+          <a:prstGeom prst="rect">
+            <a:avLst/>
+          </a:prstGeom>
+          <a:solidFill>
+            <a:srgbClr val="1E2035"/>
+          </a:solidFill>
+          <a:ln>
+            <a:noFill/>
+          </a:ln>
+        </p:spPr>
+        <p:style>
+          <a:lnRef idx="1">
+            <a:schemeClr val="accent1"/>
+          </a:lnRef>
+          <a:fillRef idx="3">
+            <a:schemeClr val="accent1"/>
+          </a:fillRef>
+          <a:effectRef idx="2">
+            <a:schemeClr val="accent1"/>
+          </a:effectRef>
+          <a:fontRef idx="minor">
+            <a:schemeClr val="lt1"/>
+          </a:fontRef>
+        </p:style>
+        <p:txBody>
+          <a:bodyPr rtlCol="0" anchor="ctr"/>
+          <a:lstStyle/>
+          <a:p>
+            <a:pPr algn="ctr"/>
+          </a:p>
+        </p:txBody>
+      </p:sp>
+      <p:sp>
+        <p:nvSpPr>
+          <p:cNvPr id="15" name="Oval 14"/>
+          <p:cNvSpPr/>
+          <p:nvPr/>
+        </p:nvSpPr>
+        <p:spPr>
+          <a:xfrm>
+            <a:off x="5586984" y="832104"/>
+            <a:ext cx="109728" cy="109728"/>
+          </a:xfrm>
+          <a:prstGeom prst="ellipse">
+            <a:avLst/>
+          </a:prstGeom>
+          <a:solidFill>
+            <a:srgbClr val="FF5F57"/>
+          </a:solidFill>
+          <a:ln>
+            <a:noFill/>
+          </a:ln>
+        </p:spPr>
+        <p:style>
+          <a:lnRef idx="1">
+            <a:schemeClr val="accent1"/>
+          </a:lnRef>
+          <a:fillRef idx="3">
+            <a:schemeClr val="accent1"/>
+          </a:fillRef>
+          <a:effectRef idx="2">
+            <a:schemeClr val="accent1"/>
+          </a:effectRef>
+          <a:fontRef idx="minor">
+            <a:schemeClr val="lt1"/>
+          </a:fontRef>
+        </p:style>
+        <p:txBody>
+          <a:bodyPr rtlCol="0" anchor="ctr"/>
+          <a:lstStyle/>
+          <a:p>
+            <a:pPr algn="ctr"/>
+          </a:p>
+        </p:txBody>
+      </p:sp>
+      <p:sp>
+        <p:nvSpPr>
+          <p:cNvPr id="16" name="Oval 15"/>
+          <p:cNvSpPr/>
+          <p:nvPr/>
+        </p:nvSpPr>
+        <p:spPr>
+          <a:xfrm>
+            <a:off x="5788152" y="832104"/>
+            <a:ext cx="109728" cy="109728"/>
+          </a:xfrm>
+          <a:prstGeom prst="ellipse">
+            <a:avLst/>
+          </a:prstGeom>
+          <a:solidFill>
+            <a:srgbClr val="FFBD2E"/>
+          </a:solidFill>
+          <a:ln>
+            <a:noFill/>
+          </a:ln>
+        </p:spPr>
+        <p:style>
+          <a:lnRef idx="1">
+            <a:schemeClr val="accent1"/>
+          </a:lnRef>
+          <a:fillRef idx="3">
+            <a:schemeClr val="accent1"/>
+          </a:fillRef>
+          <a:effectRef idx="2">
+            <a:schemeClr val="accent1"/>
+          </a:effectRef>
+          <a:fontRef idx="minor">
+            <a:schemeClr val="lt1"/>
+          </a:fontRef>
+        </p:style>
+        <p:txBody>
+          <a:bodyPr rtlCol="0" anchor="ctr"/>
+          <a:lstStyle/>
+          <a:p>
+            <a:pPr algn="ctr"/>
+          </a:p>
+        </p:txBody>
+      </p:sp>
+      <p:sp>
+        <p:nvSpPr>
+          <p:cNvPr id="17" name="Oval 16"/>
+          <p:cNvSpPr/>
+          <p:nvPr/>
+        </p:nvSpPr>
+        <p:spPr>
+          <a:xfrm>
+            <a:off x="5989320" y="832104"/>
+            <a:ext cx="109728" cy="109728"/>
+          </a:xfrm>
+          <a:prstGeom prst="ellipse">
+            <a:avLst/>
+          </a:prstGeom>
+          <a:solidFill>
+            <a:srgbClr val="28CA41"/>
+          </a:solidFill>
+          <a:ln>
+            <a:noFill/>
+          </a:ln>
+        </p:spPr>
+        <p:style>
+          <a:lnRef idx="1">
+            <a:schemeClr val="accent1"/>
+          </a:lnRef>
+          <a:fillRef idx="3">
+            <a:schemeClr val="accent1"/>
+          </a:fillRef>
+          <a:effectRef idx="2">
+            <a:schemeClr val="accent1"/>
+          </a:effectRef>
+          <a:fontRef idx="minor">
+            <a:schemeClr val="lt1"/>
+          </a:fontRef>
+        </p:style>
+        <p:txBody>
+          <a:bodyPr rtlCol="0" anchor="ctr"/>
+          <a:lstStyle/>
+          <a:p>
+            <a:pPr algn="ctr"/>
+          </a:p>
+        </p:txBody>
+      </p:sp>
+      <p:sp>
+        <p:nvSpPr>
+          <p:cNvPr id="18" name="Rectangle 17"/>
+          <p:cNvSpPr/>
+          <p:nvPr/>
+        </p:nvSpPr>
+        <p:spPr>
+          <a:xfrm>
+            <a:off x="6227064" y="786384"/>
+            <a:ext cx="5458968" cy="228600"/>
+          </a:xfrm>
+          <a:prstGeom prst="rect">
+            <a:avLst/>
+          </a:prstGeom>
+          <a:solidFill>
+            <a:srgbClr val="2A2D46"/>
+          </a:solidFill>
+          <a:ln>
+            <a:noFill/>
+          </a:ln>
+        </p:spPr>
+        <p:style>
+          <a:lnRef idx="1">
+            <a:schemeClr val="accent1"/>
+          </a:lnRef>
+          <a:fillRef idx="3">
+            <a:schemeClr val="accent1"/>
+          </a:fillRef>
+          <a:effectRef idx="2">
+            <a:schemeClr val="accent1"/>
+          </a:effectRef>
+          <a:fontRef idx="minor">
+            <a:schemeClr val="lt1"/>
+          </a:fontRef>
+        </p:style>
+        <p:txBody>
+          <a:bodyPr rtlCol="0" anchor="ctr"/>
+          <a:lstStyle/>
+          <a:p>
+            <a:pPr algn="ctr"/>
+          </a:p>
+        </p:txBody>
+      </p:sp>
+      <p:sp>
+        <p:nvSpPr>
+          <p:cNvPr id="19" name="TextBox 18"/>
+          <p:cNvSpPr txBox="1"/>
+          <p:nvPr/>
+        </p:nvSpPr>
+        <p:spPr>
+          <a:xfrm>
+            <a:off x="6272784" y="795528"/>
+            <a:ext cx="5413248" cy="219456"/>
+          </a:xfrm>
+          <a:prstGeom prst="rect">
+            <a:avLst/>
+          </a:prstGeom>
+          <a:noFill/>
+        </p:spPr>
+        <p:txBody>
+          <a:bodyPr wrap="square">
+            <a:spAutoFit/>
+          </a:bodyPr>
+          <a:lstStyle/>
+          <a:p>
+            <a:pPr algn="l"/>
+            <a:r>
+              <a:rPr sz="800" b="0" i="0">
+                <a:solidFill>
+                  <a:srgbClr val="808595"/>
+                </a:solidFill>
+                <a:latin typeface="Calibri"/>
+              </a:rPr>
+              <a:t>vaughnmartin.com/executive-brief</a:t>
+            </a:r>
+          </a:p>
+        </p:txBody>
+      </p:sp>
       <p:pic>
         <p:nvPicPr>
-          <p:cNvPr id="2" name="Picture 1" descr="04_mission_control.png"/>
+          <p:cNvPr id="20" name="Picture 19" descr="deck_executive_brief.jpg"/>
           <p:cNvPicPr>
             <a:picLocks noChangeAspect="1"/>
           </p:cNvPicPr>
@@ -4872,8 +6328,8 @@
         </p:blipFill>
         <p:spPr>
           <a:xfrm>
-            <a:off x="0" y="0"/>
-            <a:ext cx="9144000" cy="5143500"/>
+            <a:off x="5449824" y="1078992"/>
+            <a:ext cx="6419088" cy="5413248"/>
           </a:xfrm>
           <a:prstGeom prst="rect">
             <a:avLst/>
@@ -4898,9 +6354,762 @@
         <p:nvPr/>
       </p:nvGrpSpPr>
       <p:grpSpPr/>
+      <p:sp>
+        <p:nvSpPr>
+          <p:cNvPr id="2" name="Rectangle 1"/>
+          <p:cNvSpPr/>
+          <p:nvPr/>
+        </p:nvSpPr>
+        <p:spPr>
+          <a:xfrm>
+            <a:off x="0" y="0"/>
+            <a:ext cx="5120640" cy="6858000"/>
+          </a:xfrm>
+          <a:prstGeom prst="rect">
+            <a:avLst/>
+          </a:prstGeom>
+          <a:solidFill>
+            <a:srgbClr val="0A0F2E"/>
+          </a:solidFill>
+          <a:ln>
+            <a:noFill/>
+          </a:ln>
+        </p:spPr>
+        <p:style>
+          <a:lnRef idx="1">
+            <a:schemeClr val="accent1"/>
+          </a:lnRef>
+          <a:fillRef idx="3">
+            <a:schemeClr val="accent1"/>
+          </a:fillRef>
+          <a:effectRef idx="2">
+            <a:schemeClr val="accent1"/>
+          </a:effectRef>
+          <a:fontRef idx="minor">
+            <a:schemeClr val="lt1"/>
+          </a:fontRef>
+        </p:style>
+        <p:txBody>
+          <a:bodyPr rtlCol="0" anchor="ctr"/>
+          <a:lstStyle/>
+          <a:p>
+            <a:pPr algn="ctr"/>
+          </a:p>
+        </p:txBody>
+      </p:sp>
+      <p:sp>
+        <p:nvSpPr>
+          <p:cNvPr id="3" name="Rectangle 2"/>
+          <p:cNvSpPr/>
+          <p:nvPr/>
+        </p:nvSpPr>
+        <p:spPr>
+          <a:xfrm>
+            <a:off x="0" y="0"/>
+            <a:ext cx="54864" cy="6858000"/>
+          </a:xfrm>
+          <a:prstGeom prst="rect">
+            <a:avLst/>
+          </a:prstGeom>
+          <a:solidFill>
+            <a:srgbClr val="C9A84C"/>
+          </a:solidFill>
+          <a:ln>
+            <a:noFill/>
+          </a:ln>
+        </p:spPr>
+        <p:style>
+          <a:lnRef idx="1">
+            <a:schemeClr val="accent1"/>
+          </a:lnRef>
+          <a:fillRef idx="3">
+            <a:schemeClr val="accent1"/>
+          </a:fillRef>
+          <a:effectRef idx="2">
+            <a:schemeClr val="accent1"/>
+          </a:effectRef>
+          <a:fontRef idx="minor">
+            <a:schemeClr val="lt1"/>
+          </a:fontRef>
+        </p:style>
+        <p:txBody>
+          <a:bodyPr rtlCol="0" anchor="ctr"/>
+          <a:lstStyle/>
+          <a:p>
+            <a:pPr algn="ctr"/>
+          </a:p>
+        </p:txBody>
+      </p:sp>
+      <p:sp>
+        <p:nvSpPr>
+          <p:cNvPr id="4" name="Rectangle 3"/>
+          <p:cNvSpPr/>
+          <p:nvPr/>
+        </p:nvSpPr>
+        <p:spPr>
+          <a:xfrm>
+            <a:off x="5129784" y="0"/>
+            <a:ext cx="7059168" cy="6858000"/>
+          </a:xfrm>
+          <a:prstGeom prst="rect">
+            <a:avLst/>
+          </a:prstGeom>
+          <a:solidFill>
+            <a:srgbClr val="0D1436"/>
+          </a:solidFill>
+          <a:ln>
+            <a:noFill/>
+          </a:ln>
+        </p:spPr>
+        <p:style>
+          <a:lnRef idx="1">
+            <a:schemeClr val="accent1"/>
+          </a:lnRef>
+          <a:fillRef idx="3">
+            <a:schemeClr val="accent1"/>
+          </a:fillRef>
+          <a:effectRef idx="2">
+            <a:schemeClr val="accent1"/>
+          </a:effectRef>
+          <a:fontRef idx="minor">
+            <a:schemeClr val="lt1"/>
+          </a:fontRef>
+        </p:style>
+        <p:txBody>
+          <a:bodyPr rtlCol="0" anchor="ctr"/>
+          <a:lstStyle/>
+          <a:p>
+            <a:pPr algn="ctr"/>
+          </a:p>
+        </p:txBody>
+      </p:sp>
+      <p:sp>
+        <p:nvSpPr>
+          <p:cNvPr id="5" name="TextBox 4"/>
+          <p:cNvSpPr txBox="1"/>
+          <p:nvPr/>
+        </p:nvSpPr>
+        <p:spPr>
+          <a:xfrm>
+            <a:off x="457200" y="292608"/>
+            <a:ext cx="1828800" cy="274320"/>
+          </a:xfrm>
+          <a:prstGeom prst="rect">
+            <a:avLst/>
+          </a:prstGeom>
+          <a:noFill/>
+        </p:spPr>
+        <p:txBody>
+          <a:bodyPr wrap="square">
+            <a:spAutoFit/>
+          </a:bodyPr>
+          <a:lstStyle/>
+          <a:p>
+            <a:pPr algn="l"/>
+            <a:r>
+              <a:rPr sz="800" b="0" i="0">
+                <a:solidFill>
+                  <a:srgbClr val="807850"/>
+                </a:solidFill>
+                <a:latin typeface="Calibri"/>
+              </a:rPr>
+              <a:t>05 / 06</a:t>
+            </a:r>
+          </a:p>
+        </p:txBody>
+      </p:sp>
+      <p:sp>
+        <p:nvSpPr>
+          <p:cNvPr id="6" name="TextBox 5"/>
+          <p:cNvSpPr txBox="1"/>
+          <p:nvPr/>
+        </p:nvSpPr>
+        <p:spPr>
+          <a:xfrm>
+            <a:off x="457200" y="566928"/>
+            <a:ext cx="4114800" cy="320040"/>
+          </a:xfrm>
+          <a:prstGeom prst="rect">
+            <a:avLst/>
+          </a:prstGeom>
+          <a:noFill/>
+        </p:spPr>
+        <p:txBody>
+          <a:bodyPr wrap="square">
+            <a:spAutoFit/>
+          </a:bodyPr>
+          <a:lstStyle/>
+          <a:p>
+            <a:pPr algn="l"/>
+            <a:r>
+              <a:rPr sz="900" b="1" i="0">
+                <a:solidFill>
+                  <a:srgbClr val="C9A84C"/>
+                </a:solidFill>
+                <a:latin typeface="Calibri"/>
+              </a:rPr>
+              <a:t>BUSINESS CASE</a:t>
+            </a:r>
+          </a:p>
+        </p:txBody>
+      </p:sp>
+      <p:sp>
+        <p:nvSpPr>
+          <p:cNvPr id="7" name="Rectangle 6"/>
+          <p:cNvSpPr/>
+          <p:nvPr/>
+        </p:nvSpPr>
+        <p:spPr>
+          <a:xfrm>
+            <a:off x="457200" y="886968"/>
+            <a:ext cx="457200" cy="36576"/>
+          </a:xfrm>
+          <a:prstGeom prst="rect">
+            <a:avLst/>
+          </a:prstGeom>
+          <a:solidFill>
+            <a:srgbClr val="C9A84C"/>
+          </a:solidFill>
+          <a:ln>
+            <a:noFill/>
+          </a:ln>
+        </p:spPr>
+        <p:style>
+          <a:lnRef idx="1">
+            <a:schemeClr val="accent1"/>
+          </a:lnRef>
+          <a:fillRef idx="3">
+            <a:schemeClr val="accent1"/>
+          </a:fillRef>
+          <a:effectRef idx="2">
+            <a:schemeClr val="accent1"/>
+          </a:effectRef>
+          <a:fontRef idx="minor">
+            <a:schemeClr val="lt1"/>
+          </a:fontRef>
+        </p:style>
+        <p:txBody>
+          <a:bodyPr rtlCol="0" anchor="ctr"/>
+          <a:lstStyle/>
+          <a:p>
+            <a:pPr algn="ctr"/>
+          </a:p>
+        </p:txBody>
+      </p:sp>
+      <p:sp>
+        <p:nvSpPr>
+          <p:cNvPr id="8" name="TextBox 7"/>
+          <p:cNvSpPr txBox="1"/>
+          <p:nvPr/>
+        </p:nvSpPr>
+        <p:spPr>
+          <a:xfrm>
+            <a:off x="457200" y="1005840"/>
+            <a:ext cx="4480560" cy="1737360"/>
+          </a:xfrm>
+          <a:prstGeom prst="rect">
+            <a:avLst/>
+          </a:prstGeom>
+          <a:noFill/>
+        </p:spPr>
+        <p:txBody>
+          <a:bodyPr wrap="square">
+            <a:spAutoFit/>
+          </a:bodyPr>
+          <a:lstStyle/>
+          <a:p>
+            <a:r>
+              <a:rPr sz="2400" b="1">
+                <a:solidFill>
+                  <a:srgbClr val="FFFFFF"/>
+                </a:solidFill>
+                <a:latin typeface="Calibri"/>
+              </a:rPr>
+              <a:t>Replace existing response spend with execution infrastructure.</a:t>
+            </a:r>
+          </a:p>
+        </p:txBody>
+      </p:sp>
+      <p:sp>
+        <p:nvSpPr>
+          <p:cNvPr id="9" name="Rectangle 8"/>
+          <p:cNvSpPr/>
+          <p:nvPr/>
+        </p:nvSpPr>
+        <p:spPr>
+          <a:xfrm>
+            <a:off x="457200" y="2788920"/>
+            <a:ext cx="457200" cy="45720"/>
+          </a:xfrm>
+          <a:prstGeom prst="rect">
+            <a:avLst/>
+          </a:prstGeom>
+          <a:solidFill>
+            <a:srgbClr val="C9A84C"/>
+          </a:solidFill>
+          <a:ln>
+            <a:noFill/>
+          </a:ln>
+        </p:spPr>
+        <p:style>
+          <a:lnRef idx="1">
+            <a:schemeClr val="accent1"/>
+          </a:lnRef>
+          <a:fillRef idx="3">
+            <a:schemeClr val="accent1"/>
+          </a:fillRef>
+          <a:effectRef idx="2">
+            <a:schemeClr val="accent1"/>
+          </a:effectRef>
+          <a:fontRef idx="minor">
+            <a:schemeClr val="lt1"/>
+          </a:fontRef>
+        </p:style>
+        <p:txBody>
+          <a:bodyPr rtlCol="0" anchor="ctr"/>
+          <a:lstStyle/>
+          <a:p>
+            <a:pPr algn="ctr"/>
+          </a:p>
+        </p:txBody>
+      </p:sp>
+      <p:sp>
+        <p:nvSpPr>
+          <p:cNvPr id="10" name="TextBox 9"/>
+          <p:cNvSpPr txBox="1"/>
+          <p:nvPr/>
+        </p:nvSpPr>
+        <p:spPr>
+          <a:xfrm>
+            <a:off x="457200" y="2907792"/>
+            <a:ext cx="4480560" cy="1920240"/>
+          </a:xfrm>
+          <a:prstGeom prst="rect">
+            <a:avLst/>
+          </a:prstGeom>
+          <a:noFill/>
+        </p:spPr>
+        <p:txBody>
+          <a:bodyPr wrap="square">
+            <a:spAutoFit/>
+          </a:bodyPr>
+          <a:lstStyle/>
+          <a:p>
+            <a:pPr>
+              <a:spcAft>
+                <a:spcPts val="500"/>
+              </a:spcAft>
+            </a:pPr>
+            <a:r>
+              <a:rPr sz="1100">
+                <a:solidFill>
+                  <a:srgbClr val="CCCFD8"/>
+                </a:solidFill>
+                <a:latin typeface="Calibri"/>
+              </a:rPr>
+              <a:t>▶  Existing budgets already fund reactive response motions</a:t>
+            </a:r>
+          </a:p>
+          <a:p>
+            <a:pPr>
+              <a:spcAft>
+                <a:spcPts val="500"/>
+              </a:spcAft>
+            </a:pPr>
+            <a:r>
+              <a:rPr sz="1100">
+                <a:solidFill>
+                  <a:srgbClr val="CCCFD8"/>
+                </a:solidFill>
+                <a:latin typeface="Calibri"/>
+              </a:rPr>
+              <a:t>▶  Readiness OS shifts spend to pre-staged execution readiness</a:t>
+            </a:r>
+          </a:p>
+          <a:p>
+            <a:pPr>
+              <a:spcAft>
+                <a:spcPts val="500"/>
+              </a:spcAft>
+            </a:pPr>
+            <a:r>
+              <a:rPr sz="1100">
+                <a:solidFill>
+                  <a:srgbClr val="CCCFD8"/>
+                </a:solidFill>
+                <a:latin typeface="Calibri"/>
+              </a:rPr>
+              <a:t>▶  One high-impact trigger handled well can justify annual investment</a:t>
+            </a:r>
+          </a:p>
+        </p:txBody>
+      </p:sp>
+      <p:sp>
+        <p:nvSpPr>
+          <p:cNvPr id="11" name="TextBox 10"/>
+          <p:cNvSpPr txBox="1"/>
+          <p:nvPr/>
+        </p:nvSpPr>
+        <p:spPr>
+          <a:xfrm>
+            <a:off x="457200" y="5349240"/>
+            <a:ext cx="4480560" cy="960120"/>
+          </a:xfrm>
+          <a:prstGeom prst="rect">
+            <a:avLst/>
+          </a:prstGeom>
+          <a:noFill/>
+        </p:spPr>
+        <p:txBody>
+          <a:bodyPr wrap="square">
+            <a:spAutoFit/>
+          </a:bodyPr>
+          <a:lstStyle/>
+          <a:p>
+            <a:pPr algn="l"/>
+            <a:r>
+              <a:rPr sz="900" b="0" i="1">
+                <a:solidFill>
+                  <a:srgbClr val="888EA4"/>
+                </a:solidFill>
+                <a:latin typeface="Georgia"/>
+              </a:rPr>
+              <a:t>"We are not asking enterprises to invent new budget. We are replacing existing response spend with a repeatable operating model."</a:t>
+            </a:r>
+          </a:p>
+        </p:txBody>
+      </p:sp>
+      <p:sp>
+        <p:nvSpPr>
+          <p:cNvPr id="12" name="Rectangle 11"/>
+          <p:cNvSpPr/>
+          <p:nvPr/>
+        </p:nvSpPr>
+        <p:spPr>
+          <a:xfrm>
+            <a:off x="0" y="6492240"/>
+            <a:ext cx="5120640" cy="365760"/>
+          </a:xfrm>
+          <a:prstGeom prst="rect">
+            <a:avLst/>
+          </a:prstGeom>
+          <a:solidFill>
+            <a:srgbClr val="06091E"/>
+          </a:solidFill>
+          <a:ln>
+            <a:noFill/>
+          </a:ln>
+        </p:spPr>
+        <p:style>
+          <a:lnRef idx="1">
+            <a:schemeClr val="accent1"/>
+          </a:lnRef>
+          <a:fillRef idx="3">
+            <a:schemeClr val="accent1"/>
+          </a:fillRef>
+          <a:effectRef idx="2">
+            <a:schemeClr val="accent1"/>
+          </a:effectRef>
+          <a:fontRef idx="minor">
+            <a:schemeClr val="lt1"/>
+          </a:fontRef>
+        </p:style>
+        <p:txBody>
+          <a:bodyPr rtlCol="0" anchor="ctr"/>
+          <a:lstStyle/>
+          <a:p>
+            <a:pPr algn="ctr"/>
+          </a:p>
+        </p:txBody>
+      </p:sp>
+      <p:sp>
+        <p:nvSpPr>
+          <p:cNvPr id="13" name="TextBox 12"/>
+          <p:cNvSpPr txBox="1"/>
+          <p:nvPr/>
+        </p:nvSpPr>
+        <p:spPr>
+          <a:xfrm>
+            <a:off x="457200" y="6510528"/>
+            <a:ext cx="4114800" cy="292608"/>
+          </a:xfrm>
+          <a:prstGeom prst="rect">
+            <a:avLst/>
+          </a:prstGeom>
+          <a:noFill/>
+        </p:spPr>
+        <p:txBody>
+          <a:bodyPr wrap="square">
+            <a:spAutoFit/>
+          </a:bodyPr>
+          <a:lstStyle/>
+          <a:p>
+            <a:pPr algn="l"/>
+            <a:r>
+              <a:rPr sz="800" b="1" i="0">
+                <a:solidFill>
+                  <a:srgbClr val="A09668"/>
+                </a:solidFill>
+                <a:latin typeface="Calibri"/>
+              </a:rPr>
+              <a:t>VaughnMartin  ·  READINESS OS</a:t>
+            </a:r>
+          </a:p>
+        </p:txBody>
+      </p:sp>
+      <p:sp>
+        <p:nvSpPr>
+          <p:cNvPr id="14" name="Rectangle 13"/>
+          <p:cNvSpPr/>
+          <p:nvPr/>
+        </p:nvSpPr>
+        <p:spPr>
+          <a:xfrm>
+            <a:off x="5449824" y="731520"/>
+            <a:ext cx="6419088" cy="347472"/>
+          </a:xfrm>
+          <a:prstGeom prst="rect">
+            <a:avLst/>
+          </a:prstGeom>
+          <a:solidFill>
+            <a:srgbClr val="1E2035"/>
+          </a:solidFill>
+          <a:ln>
+            <a:noFill/>
+          </a:ln>
+        </p:spPr>
+        <p:style>
+          <a:lnRef idx="1">
+            <a:schemeClr val="accent1"/>
+          </a:lnRef>
+          <a:fillRef idx="3">
+            <a:schemeClr val="accent1"/>
+          </a:fillRef>
+          <a:effectRef idx="2">
+            <a:schemeClr val="accent1"/>
+          </a:effectRef>
+          <a:fontRef idx="minor">
+            <a:schemeClr val="lt1"/>
+          </a:fontRef>
+        </p:style>
+        <p:txBody>
+          <a:bodyPr rtlCol="0" anchor="ctr"/>
+          <a:lstStyle/>
+          <a:p>
+            <a:pPr algn="ctr"/>
+          </a:p>
+        </p:txBody>
+      </p:sp>
+      <p:sp>
+        <p:nvSpPr>
+          <p:cNvPr id="15" name="Oval 14"/>
+          <p:cNvSpPr/>
+          <p:nvPr/>
+        </p:nvSpPr>
+        <p:spPr>
+          <a:xfrm>
+            <a:off x="5586984" y="832104"/>
+            <a:ext cx="109728" cy="109728"/>
+          </a:xfrm>
+          <a:prstGeom prst="ellipse">
+            <a:avLst/>
+          </a:prstGeom>
+          <a:solidFill>
+            <a:srgbClr val="FF5F57"/>
+          </a:solidFill>
+          <a:ln>
+            <a:noFill/>
+          </a:ln>
+        </p:spPr>
+        <p:style>
+          <a:lnRef idx="1">
+            <a:schemeClr val="accent1"/>
+          </a:lnRef>
+          <a:fillRef idx="3">
+            <a:schemeClr val="accent1"/>
+          </a:fillRef>
+          <a:effectRef idx="2">
+            <a:schemeClr val="accent1"/>
+          </a:effectRef>
+          <a:fontRef idx="minor">
+            <a:schemeClr val="lt1"/>
+          </a:fontRef>
+        </p:style>
+        <p:txBody>
+          <a:bodyPr rtlCol="0" anchor="ctr"/>
+          <a:lstStyle/>
+          <a:p>
+            <a:pPr algn="ctr"/>
+          </a:p>
+        </p:txBody>
+      </p:sp>
+      <p:sp>
+        <p:nvSpPr>
+          <p:cNvPr id="16" name="Oval 15"/>
+          <p:cNvSpPr/>
+          <p:nvPr/>
+        </p:nvSpPr>
+        <p:spPr>
+          <a:xfrm>
+            <a:off x="5788152" y="832104"/>
+            <a:ext cx="109728" cy="109728"/>
+          </a:xfrm>
+          <a:prstGeom prst="ellipse">
+            <a:avLst/>
+          </a:prstGeom>
+          <a:solidFill>
+            <a:srgbClr val="FFBD2E"/>
+          </a:solidFill>
+          <a:ln>
+            <a:noFill/>
+          </a:ln>
+        </p:spPr>
+        <p:style>
+          <a:lnRef idx="1">
+            <a:schemeClr val="accent1"/>
+          </a:lnRef>
+          <a:fillRef idx="3">
+            <a:schemeClr val="accent1"/>
+          </a:fillRef>
+          <a:effectRef idx="2">
+            <a:schemeClr val="accent1"/>
+          </a:effectRef>
+          <a:fontRef idx="minor">
+            <a:schemeClr val="lt1"/>
+          </a:fontRef>
+        </p:style>
+        <p:txBody>
+          <a:bodyPr rtlCol="0" anchor="ctr"/>
+          <a:lstStyle/>
+          <a:p>
+            <a:pPr algn="ctr"/>
+          </a:p>
+        </p:txBody>
+      </p:sp>
+      <p:sp>
+        <p:nvSpPr>
+          <p:cNvPr id="17" name="Oval 16"/>
+          <p:cNvSpPr/>
+          <p:nvPr/>
+        </p:nvSpPr>
+        <p:spPr>
+          <a:xfrm>
+            <a:off x="5989320" y="832104"/>
+            <a:ext cx="109728" cy="109728"/>
+          </a:xfrm>
+          <a:prstGeom prst="ellipse">
+            <a:avLst/>
+          </a:prstGeom>
+          <a:solidFill>
+            <a:srgbClr val="28CA41"/>
+          </a:solidFill>
+          <a:ln>
+            <a:noFill/>
+          </a:ln>
+        </p:spPr>
+        <p:style>
+          <a:lnRef idx="1">
+            <a:schemeClr val="accent1"/>
+          </a:lnRef>
+          <a:fillRef idx="3">
+            <a:schemeClr val="accent1"/>
+          </a:fillRef>
+          <a:effectRef idx="2">
+            <a:schemeClr val="accent1"/>
+          </a:effectRef>
+          <a:fontRef idx="minor">
+            <a:schemeClr val="lt1"/>
+          </a:fontRef>
+        </p:style>
+        <p:txBody>
+          <a:bodyPr rtlCol="0" anchor="ctr"/>
+          <a:lstStyle/>
+          <a:p>
+            <a:pPr algn="ctr"/>
+          </a:p>
+        </p:txBody>
+      </p:sp>
+      <p:sp>
+        <p:nvSpPr>
+          <p:cNvPr id="18" name="Rectangle 17"/>
+          <p:cNvSpPr/>
+          <p:nvPr/>
+        </p:nvSpPr>
+        <p:spPr>
+          <a:xfrm>
+            <a:off x="6227064" y="786384"/>
+            <a:ext cx="5458968" cy="228600"/>
+          </a:xfrm>
+          <a:prstGeom prst="rect">
+            <a:avLst/>
+          </a:prstGeom>
+          <a:solidFill>
+            <a:srgbClr val="2A2D46"/>
+          </a:solidFill>
+          <a:ln>
+            <a:noFill/>
+          </a:ln>
+        </p:spPr>
+        <p:style>
+          <a:lnRef idx="1">
+            <a:schemeClr val="accent1"/>
+          </a:lnRef>
+          <a:fillRef idx="3">
+            <a:schemeClr val="accent1"/>
+          </a:fillRef>
+          <a:effectRef idx="2">
+            <a:schemeClr val="accent1"/>
+          </a:effectRef>
+          <a:fontRef idx="minor">
+            <a:schemeClr val="lt1"/>
+          </a:fontRef>
+        </p:style>
+        <p:txBody>
+          <a:bodyPr rtlCol="0" anchor="ctr"/>
+          <a:lstStyle/>
+          <a:p>
+            <a:pPr algn="ctr"/>
+          </a:p>
+        </p:txBody>
+      </p:sp>
+      <p:sp>
+        <p:nvSpPr>
+          <p:cNvPr id="19" name="TextBox 18"/>
+          <p:cNvSpPr txBox="1"/>
+          <p:nvPr/>
+        </p:nvSpPr>
+        <p:spPr>
+          <a:xfrm>
+            <a:off x="6272784" y="795528"/>
+            <a:ext cx="5413248" cy="219456"/>
+          </a:xfrm>
+          <a:prstGeom prst="rect">
+            <a:avLst/>
+          </a:prstGeom>
+          <a:noFill/>
+        </p:spPr>
+        <p:txBody>
+          <a:bodyPr wrap="square">
+            <a:spAutoFit/>
+          </a:bodyPr>
+          <a:lstStyle/>
+          <a:p>
+            <a:pPr algn="l"/>
+            <a:r>
+              <a:rPr sz="800" b="0" i="0">
+                <a:solidFill>
+                  <a:srgbClr val="808595"/>
+                </a:solidFill>
+                <a:latin typeface="Calibri"/>
+              </a:rPr>
+              <a:t>vaughnmartin.com/roi-calculator</a:t>
+            </a:r>
+          </a:p>
+        </p:txBody>
+      </p:sp>
       <p:pic>
         <p:nvPicPr>
-          <p:cNvPr id="2" name="Picture 1" descr="05_trigger_architecture.png"/>
+          <p:cNvPr id="20" name="Picture 19" descr="deck_playbooks.jpg"/>
           <p:cNvPicPr>
             <a:picLocks noChangeAspect="1"/>
           </p:cNvPicPr>
@@ -4914,8 +7123,8 @@
         </p:blipFill>
         <p:spPr>
           <a:xfrm>
-            <a:off x="0" y="0"/>
-            <a:ext cx="9144000" cy="5143500"/>
+            <a:off x="5449824" y="1078992"/>
+            <a:ext cx="6419088" cy="5413248"/>
           </a:xfrm>
           <a:prstGeom prst="rect">
             <a:avLst/>
@@ -4940,9 +7149,825 @@
         <p:nvPr/>
       </p:nvGrpSpPr>
       <p:grpSpPr/>
+      <p:sp>
+        <p:nvSpPr>
+          <p:cNvPr id="2" name="Rectangle 1"/>
+          <p:cNvSpPr/>
+          <p:nvPr/>
+        </p:nvSpPr>
+        <p:spPr>
+          <a:xfrm>
+            <a:off x="0" y="0"/>
+            <a:ext cx="5120640" cy="6858000"/>
+          </a:xfrm>
+          <a:prstGeom prst="rect">
+            <a:avLst/>
+          </a:prstGeom>
+          <a:solidFill>
+            <a:srgbClr val="0A0F2E"/>
+          </a:solidFill>
+          <a:ln>
+            <a:noFill/>
+          </a:ln>
+        </p:spPr>
+        <p:style>
+          <a:lnRef idx="1">
+            <a:schemeClr val="accent1"/>
+          </a:lnRef>
+          <a:fillRef idx="3">
+            <a:schemeClr val="accent1"/>
+          </a:fillRef>
+          <a:effectRef idx="2">
+            <a:schemeClr val="accent1"/>
+          </a:effectRef>
+          <a:fontRef idx="minor">
+            <a:schemeClr val="lt1"/>
+          </a:fontRef>
+        </p:style>
+        <p:txBody>
+          <a:bodyPr rtlCol="0" anchor="ctr"/>
+          <a:lstStyle/>
+          <a:p>
+            <a:pPr algn="ctr"/>
+          </a:p>
+        </p:txBody>
+      </p:sp>
+      <p:sp>
+        <p:nvSpPr>
+          <p:cNvPr id="3" name="Rectangle 2"/>
+          <p:cNvSpPr/>
+          <p:nvPr/>
+        </p:nvSpPr>
+        <p:spPr>
+          <a:xfrm>
+            <a:off x="0" y="0"/>
+            <a:ext cx="54864" cy="6858000"/>
+          </a:xfrm>
+          <a:prstGeom prst="rect">
+            <a:avLst/>
+          </a:prstGeom>
+          <a:solidFill>
+            <a:srgbClr val="C9A84C"/>
+          </a:solidFill>
+          <a:ln>
+            <a:noFill/>
+          </a:ln>
+        </p:spPr>
+        <p:style>
+          <a:lnRef idx="1">
+            <a:schemeClr val="accent1"/>
+          </a:lnRef>
+          <a:fillRef idx="3">
+            <a:schemeClr val="accent1"/>
+          </a:fillRef>
+          <a:effectRef idx="2">
+            <a:schemeClr val="accent1"/>
+          </a:effectRef>
+          <a:fontRef idx="minor">
+            <a:schemeClr val="lt1"/>
+          </a:fontRef>
+        </p:style>
+        <p:txBody>
+          <a:bodyPr rtlCol="0" anchor="ctr"/>
+          <a:lstStyle/>
+          <a:p>
+            <a:pPr algn="ctr"/>
+          </a:p>
+        </p:txBody>
+      </p:sp>
+      <p:sp>
+        <p:nvSpPr>
+          <p:cNvPr id="4" name="Rectangle 3"/>
+          <p:cNvSpPr/>
+          <p:nvPr/>
+        </p:nvSpPr>
+        <p:spPr>
+          <a:xfrm>
+            <a:off x="5129784" y="0"/>
+            <a:ext cx="7059168" cy="6858000"/>
+          </a:xfrm>
+          <a:prstGeom prst="rect">
+            <a:avLst/>
+          </a:prstGeom>
+          <a:solidFill>
+            <a:srgbClr val="0D1436"/>
+          </a:solidFill>
+          <a:ln>
+            <a:noFill/>
+          </a:ln>
+        </p:spPr>
+        <p:style>
+          <a:lnRef idx="1">
+            <a:schemeClr val="accent1"/>
+          </a:lnRef>
+          <a:fillRef idx="3">
+            <a:schemeClr val="accent1"/>
+          </a:fillRef>
+          <a:effectRef idx="2">
+            <a:schemeClr val="accent1"/>
+          </a:effectRef>
+          <a:fontRef idx="minor">
+            <a:schemeClr val="lt1"/>
+          </a:fontRef>
+        </p:style>
+        <p:txBody>
+          <a:bodyPr rtlCol="0" anchor="ctr"/>
+          <a:lstStyle/>
+          <a:p>
+            <a:pPr algn="ctr"/>
+          </a:p>
+        </p:txBody>
+      </p:sp>
+      <p:sp>
+        <p:nvSpPr>
+          <p:cNvPr id="5" name="TextBox 4"/>
+          <p:cNvSpPr txBox="1"/>
+          <p:nvPr/>
+        </p:nvSpPr>
+        <p:spPr>
+          <a:xfrm>
+            <a:off x="457200" y="292608"/>
+            <a:ext cx="1828800" cy="274320"/>
+          </a:xfrm>
+          <a:prstGeom prst="rect">
+            <a:avLst/>
+          </a:prstGeom>
+          <a:noFill/>
+        </p:spPr>
+        <p:txBody>
+          <a:bodyPr wrap="square">
+            <a:spAutoFit/>
+          </a:bodyPr>
+          <a:lstStyle/>
+          <a:p>
+            <a:pPr algn="l"/>
+            <a:r>
+              <a:rPr sz="800" b="0" i="0">
+                <a:solidFill>
+                  <a:srgbClr val="807850"/>
+                </a:solidFill>
+                <a:latin typeface="Calibri"/>
+              </a:rPr>
+              <a:t>06 / 06</a:t>
+            </a:r>
+          </a:p>
+        </p:txBody>
+      </p:sp>
+      <p:sp>
+        <p:nvSpPr>
+          <p:cNvPr id="6" name="TextBox 5"/>
+          <p:cNvSpPr txBox="1"/>
+          <p:nvPr/>
+        </p:nvSpPr>
+        <p:spPr>
+          <a:xfrm>
+            <a:off x="457200" y="566928"/>
+            <a:ext cx="4114800" cy="320040"/>
+          </a:xfrm>
+          <a:prstGeom prst="rect">
+            <a:avLst/>
+          </a:prstGeom>
+          <a:noFill/>
+        </p:spPr>
+        <p:txBody>
+          <a:bodyPr wrap="square">
+            <a:spAutoFit/>
+          </a:bodyPr>
+          <a:lstStyle/>
+          <a:p>
+            <a:pPr algn="l"/>
+            <a:r>
+              <a:rPr sz="900" b="1" i="0">
+                <a:solidFill>
+                  <a:srgbClr val="C9A84C"/>
+                </a:solidFill>
+                <a:latin typeface="Calibri"/>
+              </a:rPr>
+              <a:t>ASK + CLOSE</a:t>
+            </a:r>
+          </a:p>
+        </p:txBody>
+      </p:sp>
+      <p:sp>
+        <p:nvSpPr>
+          <p:cNvPr id="7" name="Rectangle 6"/>
+          <p:cNvSpPr/>
+          <p:nvPr/>
+        </p:nvSpPr>
+        <p:spPr>
+          <a:xfrm>
+            <a:off x="457200" y="886968"/>
+            <a:ext cx="457200" cy="36576"/>
+          </a:xfrm>
+          <a:prstGeom prst="rect">
+            <a:avLst/>
+          </a:prstGeom>
+          <a:solidFill>
+            <a:srgbClr val="C9A84C"/>
+          </a:solidFill>
+          <a:ln>
+            <a:noFill/>
+          </a:ln>
+        </p:spPr>
+        <p:style>
+          <a:lnRef idx="1">
+            <a:schemeClr val="accent1"/>
+          </a:lnRef>
+          <a:fillRef idx="3">
+            <a:schemeClr val="accent1"/>
+          </a:fillRef>
+          <a:effectRef idx="2">
+            <a:schemeClr val="accent1"/>
+          </a:effectRef>
+          <a:fontRef idx="minor">
+            <a:schemeClr val="lt1"/>
+          </a:fontRef>
+        </p:style>
+        <p:txBody>
+          <a:bodyPr rtlCol="0" anchor="ctr"/>
+          <a:lstStyle/>
+          <a:p>
+            <a:pPr algn="ctr"/>
+          </a:p>
+        </p:txBody>
+      </p:sp>
+      <p:sp>
+        <p:nvSpPr>
+          <p:cNvPr id="8" name="TextBox 7"/>
+          <p:cNvSpPr txBox="1"/>
+          <p:nvPr/>
+        </p:nvSpPr>
+        <p:spPr>
+          <a:xfrm>
+            <a:off x="457200" y="1005840"/>
+            <a:ext cx="4480560" cy="1737360"/>
+          </a:xfrm>
+          <a:prstGeom prst="rect">
+            <a:avLst/>
+          </a:prstGeom>
+          <a:noFill/>
+        </p:spPr>
+        <p:txBody>
+          <a:bodyPr wrap="square">
+            <a:spAutoFit/>
+          </a:bodyPr>
+          <a:lstStyle/>
+          <a:p>
+            <a:r>
+              <a:rPr sz="2700" b="1">
+                <a:solidFill>
+                  <a:srgbClr val="FFFFFF"/>
+                </a:solidFill>
+                <a:latin typeface="Calibri"/>
+              </a:rPr>
+              <a:t>Category creation:</a:t>
+            </a:r>
+          </a:p>
+          <a:p>
+            <a:r>
+              <a:rPr sz="2700" b="1">
+                <a:solidFill>
+                  <a:srgbClr val="FFFFFF"/>
+                </a:solidFill>
+                <a:latin typeface="Calibri"/>
+              </a:rPr>
+              <a:t>Preparation Infrastructure</a:t>
+            </a:r>
+          </a:p>
+        </p:txBody>
+      </p:sp>
+      <p:sp>
+        <p:nvSpPr>
+          <p:cNvPr id="9" name="Rectangle 8"/>
+          <p:cNvSpPr/>
+          <p:nvPr/>
+        </p:nvSpPr>
+        <p:spPr>
+          <a:xfrm>
+            <a:off x="457200" y="2788920"/>
+            <a:ext cx="457200" cy="45720"/>
+          </a:xfrm>
+          <a:prstGeom prst="rect">
+            <a:avLst/>
+          </a:prstGeom>
+          <a:solidFill>
+            <a:srgbClr val="C9A84C"/>
+          </a:solidFill>
+          <a:ln>
+            <a:noFill/>
+          </a:ln>
+        </p:spPr>
+        <p:style>
+          <a:lnRef idx="1">
+            <a:schemeClr val="accent1"/>
+          </a:lnRef>
+          <a:fillRef idx="3">
+            <a:schemeClr val="accent1"/>
+          </a:fillRef>
+          <a:effectRef idx="2">
+            <a:schemeClr val="accent1"/>
+          </a:effectRef>
+          <a:fontRef idx="minor">
+            <a:schemeClr val="lt1"/>
+          </a:fontRef>
+        </p:style>
+        <p:txBody>
+          <a:bodyPr rtlCol="0" anchor="ctr"/>
+          <a:lstStyle/>
+          <a:p>
+            <a:pPr algn="ctr"/>
+          </a:p>
+        </p:txBody>
+      </p:sp>
+      <p:sp>
+        <p:nvSpPr>
+          <p:cNvPr id="10" name="TextBox 9"/>
+          <p:cNvSpPr txBox="1"/>
+          <p:nvPr/>
+        </p:nvSpPr>
+        <p:spPr>
+          <a:xfrm>
+            <a:off x="457200" y="2907792"/>
+            <a:ext cx="4480560" cy="1920240"/>
+          </a:xfrm>
+          <a:prstGeom prst="rect">
+            <a:avLst/>
+          </a:prstGeom>
+          <a:noFill/>
+        </p:spPr>
+        <p:txBody>
+          <a:bodyPr wrap="square">
+            <a:spAutoFit/>
+          </a:bodyPr>
+          <a:lstStyle/>
+          <a:p>
+            <a:pPr>
+              <a:spcAft>
+                <a:spcPts val="500"/>
+              </a:spcAft>
+            </a:pPr>
+            <a:r>
+              <a:rPr sz="1100">
+                <a:solidFill>
+                  <a:srgbClr val="CCCFD8"/>
+                </a:solidFill>
+                <a:latin typeface="Calibri"/>
+              </a:rPr>
+              <a:t>▶  Raise: $[AMOUNT]</a:t>
+            </a:r>
+          </a:p>
+          <a:p>
+            <a:pPr>
+              <a:spcAft>
+                <a:spcPts val="500"/>
+              </a:spcAft>
+            </a:pPr>
+            <a:r>
+              <a:rPr sz="1100">
+                <a:solidFill>
+                  <a:srgbClr val="CCCFD8"/>
+                </a:solidFill>
+                <a:latin typeface="Calibri"/>
+              </a:rPr>
+              <a:t>▶  Product hardening + enterprise controls</a:t>
+            </a:r>
+          </a:p>
+          <a:p>
+            <a:pPr>
+              <a:spcAft>
+                <a:spcPts val="500"/>
+              </a:spcAft>
+            </a:pPr>
+            <a:r>
+              <a:rPr sz="1100">
+                <a:solidFill>
+                  <a:srgbClr val="CCCFD8"/>
+                </a:solidFill>
+                <a:latin typeface="Calibri"/>
+              </a:rPr>
+              <a:t>▶  Founding Partner conversions</a:t>
+            </a:r>
+          </a:p>
+          <a:p>
+            <a:pPr>
+              <a:spcAft>
+                <a:spcPts val="500"/>
+              </a:spcAft>
+            </a:pPr>
+            <a:r>
+              <a:rPr sz="1100">
+                <a:solidFill>
+                  <a:srgbClr val="CCCFD8"/>
+                </a:solidFill>
+                <a:latin typeface="Calibri"/>
+              </a:rPr>
+              <a:t>▶  Repeatable GTM motion</a:t>
+            </a:r>
+          </a:p>
+        </p:txBody>
+      </p:sp>
+      <p:sp>
+        <p:nvSpPr>
+          <p:cNvPr id="11" name="TextBox 10"/>
+          <p:cNvSpPr txBox="1"/>
+          <p:nvPr/>
+        </p:nvSpPr>
+        <p:spPr>
+          <a:xfrm>
+            <a:off x="457200" y="4864608"/>
+            <a:ext cx="4480560" cy="640080"/>
+          </a:xfrm>
+          <a:prstGeom prst="rect">
+            <a:avLst/>
+          </a:prstGeom>
+          <a:noFill/>
+        </p:spPr>
+        <p:txBody>
+          <a:bodyPr wrap="square">
+            <a:spAutoFit/>
+          </a:bodyPr>
+          <a:lstStyle/>
+          <a:p>
+            <a:pPr algn="l"/>
+            <a:r>
+              <a:rPr sz="1500" b="1" i="0">
+                <a:solidFill>
+                  <a:srgbClr val="C9A84C"/>
+                </a:solidFill>
+                <a:latin typeface="Calibri"/>
+              </a:rPr>
+              <a:t>The response is ready
+before the trigger fires.</a:t>
+            </a:r>
+          </a:p>
+        </p:txBody>
+      </p:sp>
+      <p:sp>
+        <p:nvSpPr>
+          <p:cNvPr id="12" name="TextBox 11"/>
+          <p:cNvSpPr txBox="1"/>
+          <p:nvPr/>
+        </p:nvSpPr>
+        <p:spPr>
+          <a:xfrm>
+            <a:off x="457200" y="5349240"/>
+            <a:ext cx="4480560" cy="960120"/>
+          </a:xfrm>
+          <a:prstGeom prst="rect">
+            <a:avLst/>
+          </a:prstGeom>
+          <a:noFill/>
+        </p:spPr>
+        <p:txBody>
+          <a:bodyPr wrap="square">
+            <a:spAutoFit/>
+          </a:bodyPr>
+          <a:lstStyle/>
+          <a:p>
+            <a:pPr algn="l"/>
+            <a:r>
+              <a:rPr sz="900" b="0" i="1">
+                <a:solidFill>
+                  <a:srgbClr val="888EA4"/>
+                </a:solidFill>
+                <a:latin typeface="Georgia"/>
+              </a:rPr>
+              <a:t>"Every enterprise has AI capability. Very few have mobilization readiness. We built that layer. It's live now."</a:t>
+            </a:r>
+          </a:p>
+        </p:txBody>
+      </p:sp>
+      <p:sp>
+        <p:nvSpPr>
+          <p:cNvPr id="13" name="Rectangle 12"/>
+          <p:cNvSpPr/>
+          <p:nvPr/>
+        </p:nvSpPr>
+        <p:spPr>
+          <a:xfrm>
+            <a:off x="0" y="6492240"/>
+            <a:ext cx="5120640" cy="365760"/>
+          </a:xfrm>
+          <a:prstGeom prst="rect">
+            <a:avLst/>
+          </a:prstGeom>
+          <a:solidFill>
+            <a:srgbClr val="06091E"/>
+          </a:solidFill>
+          <a:ln>
+            <a:noFill/>
+          </a:ln>
+        </p:spPr>
+        <p:style>
+          <a:lnRef idx="1">
+            <a:schemeClr val="accent1"/>
+          </a:lnRef>
+          <a:fillRef idx="3">
+            <a:schemeClr val="accent1"/>
+          </a:fillRef>
+          <a:effectRef idx="2">
+            <a:schemeClr val="accent1"/>
+          </a:effectRef>
+          <a:fontRef idx="minor">
+            <a:schemeClr val="lt1"/>
+          </a:fontRef>
+        </p:style>
+        <p:txBody>
+          <a:bodyPr rtlCol="0" anchor="ctr"/>
+          <a:lstStyle/>
+          <a:p>
+            <a:pPr algn="ctr"/>
+          </a:p>
+        </p:txBody>
+      </p:sp>
+      <p:sp>
+        <p:nvSpPr>
+          <p:cNvPr id="14" name="TextBox 13"/>
+          <p:cNvSpPr txBox="1"/>
+          <p:nvPr/>
+        </p:nvSpPr>
+        <p:spPr>
+          <a:xfrm>
+            <a:off x="457200" y="6510528"/>
+            <a:ext cx="4114800" cy="292608"/>
+          </a:xfrm>
+          <a:prstGeom prst="rect">
+            <a:avLst/>
+          </a:prstGeom>
+          <a:noFill/>
+        </p:spPr>
+        <p:txBody>
+          <a:bodyPr wrap="square">
+            <a:spAutoFit/>
+          </a:bodyPr>
+          <a:lstStyle/>
+          <a:p>
+            <a:pPr algn="l"/>
+            <a:r>
+              <a:rPr sz="800" b="1" i="0">
+                <a:solidFill>
+                  <a:srgbClr val="A09668"/>
+                </a:solidFill>
+                <a:latin typeface="Calibri"/>
+              </a:rPr>
+              <a:t>VaughnMartin  ·  READINESS OS</a:t>
+            </a:r>
+          </a:p>
+        </p:txBody>
+      </p:sp>
+      <p:sp>
+        <p:nvSpPr>
+          <p:cNvPr id="15" name="Rectangle 14"/>
+          <p:cNvSpPr/>
+          <p:nvPr/>
+        </p:nvSpPr>
+        <p:spPr>
+          <a:xfrm>
+            <a:off x="5449824" y="731520"/>
+            <a:ext cx="6419088" cy="347472"/>
+          </a:xfrm>
+          <a:prstGeom prst="rect">
+            <a:avLst/>
+          </a:prstGeom>
+          <a:solidFill>
+            <a:srgbClr val="1E2035"/>
+          </a:solidFill>
+          <a:ln>
+            <a:noFill/>
+          </a:ln>
+        </p:spPr>
+        <p:style>
+          <a:lnRef idx="1">
+            <a:schemeClr val="accent1"/>
+          </a:lnRef>
+          <a:fillRef idx="3">
+            <a:schemeClr val="accent1"/>
+          </a:fillRef>
+          <a:effectRef idx="2">
+            <a:schemeClr val="accent1"/>
+          </a:effectRef>
+          <a:fontRef idx="minor">
+            <a:schemeClr val="lt1"/>
+          </a:fontRef>
+        </p:style>
+        <p:txBody>
+          <a:bodyPr rtlCol="0" anchor="ctr"/>
+          <a:lstStyle/>
+          <a:p>
+            <a:pPr algn="ctr"/>
+          </a:p>
+        </p:txBody>
+      </p:sp>
+      <p:sp>
+        <p:nvSpPr>
+          <p:cNvPr id="16" name="Oval 15"/>
+          <p:cNvSpPr/>
+          <p:nvPr/>
+        </p:nvSpPr>
+        <p:spPr>
+          <a:xfrm>
+            <a:off x="5586984" y="832104"/>
+            <a:ext cx="109728" cy="109728"/>
+          </a:xfrm>
+          <a:prstGeom prst="ellipse">
+            <a:avLst/>
+          </a:prstGeom>
+          <a:solidFill>
+            <a:srgbClr val="FF5F57"/>
+          </a:solidFill>
+          <a:ln>
+            <a:noFill/>
+          </a:ln>
+        </p:spPr>
+        <p:style>
+          <a:lnRef idx="1">
+            <a:schemeClr val="accent1"/>
+          </a:lnRef>
+          <a:fillRef idx="3">
+            <a:schemeClr val="accent1"/>
+          </a:fillRef>
+          <a:effectRef idx="2">
+            <a:schemeClr val="accent1"/>
+          </a:effectRef>
+          <a:fontRef idx="minor">
+            <a:schemeClr val="lt1"/>
+          </a:fontRef>
+        </p:style>
+        <p:txBody>
+          <a:bodyPr rtlCol="0" anchor="ctr"/>
+          <a:lstStyle/>
+          <a:p>
+            <a:pPr algn="ctr"/>
+          </a:p>
+        </p:txBody>
+      </p:sp>
+      <p:sp>
+        <p:nvSpPr>
+          <p:cNvPr id="17" name="Oval 16"/>
+          <p:cNvSpPr/>
+          <p:nvPr/>
+        </p:nvSpPr>
+        <p:spPr>
+          <a:xfrm>
+            <a:off x="5788152" y="832104"/>
+            <a:ext cx="109728" cy="109728"/>
+          </a:xfrm>
+          <a:prstGeom prst="ellipse">
+            <a:avLst/>
+          </a:prstGeom>
+          <a:solidFill>
+            <a:srgbClr val="FFBD2E"/>
+          </a:solidFill>
+          <a:ln>
+            <a:noFill/>
+          </a:ln>
+        </p:spPr>
+        <p:style>
+          <a:lnRef idx="1">
+            <a:schemeClr val="accent1"/>
+          </a:lnRef>
+          <a:fillRef idx="3">
+            <a:schemeClr val="accent1"/>
+          </a:fillRef>
+          <a:effectRef idx="2">
+            <a:schemeClr val="accent1"/>
+          </a:effectRef>
+          <a:fontRef idx="minor">
+            <a:schemeClr val="lt1"/>
+          </a:fontRef>
+        </p:style>
+        <p:txBody>
+          <a:bodyPr rtlCol="0" anchor="ctr"/>
+          <a:lstStyle/>
+          <a:p>
+            <a:pPr algn="ctr"/>
+          </a:p>
+        </p:txBody>
+      </p:sp>
+      <p:sp>
+        <p:nvSpPr>
+          <p:cNvPr id="18" name="Oval 17"/>
+          <p:cNvSpPr/>
+          <p:nvPr/>
+        </p:nvSpPr>
+        <p:spPr>
+          <a:xfrm>
+            <a:off x="5989320" y="832104"/>
+            <a:ext cx="109728" cy="109728"/>
+          </a:xfrm>
+          <a:prstGeom prst="ellipse">
+            <a:avLst/>
+          </a:prstGeom>
+          <a:solidFill>
+            <a:srgbClr val="28CA41"/>
+          </a:solidFill>
+          <a:ln>
+            <a:noFill/>
+          </a:ln>
+        </p:spPr>
+        <p:style>
+          <a:lnRef idx="1">
+            <a:schemeClr val="accent1"/>
+          </a:lnRef>
+          <a:fillRef idx="3">
+            <a:schemeClr val="accent1"/>
+          </a:fillRef>
+          <a:effectRef idx="2">
+            <a:schemeClr val="accent1"/>
+          </a:effectRef>
+          <a:fontRef idx="minor">
+            <a:schemeClr val="lt1"/>
+          </a:fontRef>
+        </p:style>
+        <p:txBody>
+          <a:bodyPr rtlCol="0" anchor="ctr"/>
+          <a:lstStyle/>
+          <a:p>
+            <a:pPr algn="ctr"/>
+          </a:p>
+        </p:txBody>
+      </p:sp>
+      <p:sp>
+        <p:nvSpPr>
+          <p:cNvPr id="19" name="Rectangle 18"/>
+          <p:cNvSpPr/>
+          <p:nvPr/>
+        </p:nvSpPr>
+        <p:spPr>
+          <a:xfrm>
+            <a:off x="6227064" y="786384"/>
+            <a:ext cx="5458968" cy="228600"/>
+          </a:xfrm>
+          <a:prstGeom prst="rect">
+            <a:avLst/>
+          </a:prstGeom>
+          <a:solidFill>
+            <a:srgbClr val="2A2D46"/>
+          </a:solidFill>
+          <a:ln>
+            <a:noFill/>
+          </a:ln>
+        </p:spPr>
+        <p:style>
+          <a:lnRef idx="1">
+            <a:schemeClr val="accent1"/>
+          </a:lnRef>
+          <a:fillRef idx="3">
+            <a:schemeClr val="accent1"/>
+          </a:fillRef>
+          <a:effectRef idx="2">
+            <a:schemeClr val="accent1"/>
+          </a:effectRef>
+          <a:fontRef idx="minor">
+            <a:schemeClr val="lt1"/>
+          </a:fontRef>
+        </p:style>
+        <p:txBody>
+          <a:bodyPr rtlCol="0" anchor="ctr"/>
+          <a:lstStyle/>
+          <a:p>
+            <a:pPr algn="ctr"/>
+          </a:p>
+        </p:txBody>
+      </p:sp>
+      <p:sp>
+        <p:nvSpPr>
+          <p:cNvPr id="20" name="TextBox 19"/>
+          <p:cNvSpPr txBox="1"/>
+          <p:nvPr/>
+        </p:nvSpPr>
+        <p:spPr>
+          <a:xfrm>
+            <a:off x="6272784" y="795528"/>
+            <a:ext cx="5413248" cy="219456"/>
+          </a:xfrm>
+          <a:prstGeom prst="rect">
+            <a:avLst/>
+          </a:prstGeom>
+          <a:noFill/>
+        </p:spPr>
+        <p:txBody>
+          <a:bodyPr wrap="square">
+            <a:spAutoFit/>
+          </a:bodyPr>
+          <a:lstStyle/>
+          <a:p>
+            <a:pPr algn="l"/>
+            <a:r>
+              <a:rPr sz="800" b="0" i="0">
+                <a:solidFill>
+                  <a:srgbClr val="808595"/>
+                </a:solidFill>
+                <a:latin typeface="Calibri"/>
+              </a:rPr>
+              <a:t>vaughnmartin.com/founding-partner-program</a:t>
+            </a:r>
+          </a:p>
+        </p:txBody>
+      </p:sp>
       <p:pic>
         <p:nvPicPr>
-          <p:cNvPr id="2" name="Picture 1" descr="06_decision_authority.png"/>
+          <p:cNvPr id="21" name="Picture 20" descr="deck_onboarding.jpg"/>
           <p:cNvPicPr>
             <a:picLocks noChangeAspect="1"/>
           </p:cNvPicPr>
@@ -4956,134 +7981,8 @@
         </p:blipFill>
         <p:spPr>
           <a:xfrm>
-            <a:off x="0" y="0"/>
-            <a:ext cx="9144000" cy="5143500"/>
-          </a:xfrm>
-          <a:prstGeom prst="rect">
-            <a:avLst/>
-          </a:prstGeom>
-        </p:spPr>
-      </p:pic>
-    </p:spTree>
-  </p:cSld>
-  <p:clrMapOvr>
-    <a:masterClrMapping/>
-  </p:clrMapOvr>
-</p:sld>
-</file>
-
-<file path=ppt/slides/slide7.xml><?xml version="1.0" encoding="utf-8"?>
-<p:sld xmlns:a="http://schemas.openxmlformats.org/drawingml/2006/main" xmlns:p="http://schemas.openxmlformats.org/presentationml/2006/main" xmlns:r="http://schemas.openxmlformats.org/officeDocument/2006/relationships">
-  <p:cSld>
-    <p:spTree>
-      <p:nvGrpSpPr>
-        <p:cNvPr id="1" name=""/>
-        <p:cNvGrpSpPr/>
-        <p:nvPr/>
-      </p:nvGrpSpPr>
-      <p:grpSpPr/>
-      <p:pic>
-        <p:nvPicPr>
-          <p:cNvPr id="2" name="Picture 1" descr="07_execution_orchestration.png"/>
-          <p:cNvPicPr>
-            <a:picLocks noChangeAspect="1"/>
-          </p:cNvPicPr>
-          <p:nvPr/>
-        </p:nvPicPr>
-        <p:blipFill>
-          <a:blip r:embed="rId2"/>
-          <a:stretch>
-            <a:fillRect/>
-          </a:stretch>
-        </p:blipFill>
-        <p:spPr>
-          <a:xfrm>
-            <a:off x="0" y="0"/>
-            <a:ext cx="9144000" cy="5143500"/>
-          </a:xfrm>
-          <a:prstGeom prst="rect">
-            <a:avLst/>
-          </a:prstGeom>
-        </p:spPr>
-      </p:pic>
-    </p:spTree>
-  </p:cSld>
-  <p:clrMapOvr>
-    <a:masterClrMapping/>
-  </p:clrMapOvr>
-</p:sld>
-</file>
-
-<file path=ppt/slides/slide8.xml><?xml version="1.0" encoding="utf-8"?>
-<p:sld xmlns:a="http://schemas.openxmlformats.org/drawingml/2006/main" xmlns:p="http://schemas.openxmlformats.org/presentationml/2006/main" xmlns:r="http://schemas.openxmlformats.org/officeDocument/2006/relationships">
-  <p:cSld>
-    <p:spTree>
-      <p:nvGrpSpPr>
-        <p:cNvPr id="1" name=""/>
-        <p:cNvGrpSpPr/>
-        <p:nvPr/>
-      </p:nvGrpSpPr>
-      <p:grpSpPr/>
-      <p:pic>
-        <p:nvPicPr>
-          <p:cNvPr id="2" name="Picture 1" descr="08_learn_loop.png"/>
-          <p:cNvPicPr>
-            <a:picLocks noChangeAspect="1"/>
-          </p:cNvPicPr>
-          <p:nvPr/>
-        </p:nvPicPr>
-        <p:blipFill>
-          <a:blip r:embed="rId2"/>
-          <a:stretch>
-            <a:fillRect/>
-          </a:stretch>
-        </p:blipFill>
-        <p:spPr>
-          <a:xfrm>
-            <a:off x="0" y="0"/>
-            <a:ext cx="9144000" cy="5143500"/>
-          </a:xfrm>
-          <a:prstGeom prst="rect">
-            <a:avLst/>
-          </a:prstGeom>
-        </p:spPr>
-      </p:pic>
-    </p:spTree>
-  </p:cSld>
-  <p:clrMapOvr>
-    <a:masterClrMapping/>
-  </p:clrMapOvr>
-</p:sld>
-</file>
-
-<file path=ppt/slides/slide9.xml><?xml version="1.0" encoding="utf-8"?>
-<p:sld xmlns:a="http://schemas.openxmlformats.org/drawingml/2006/main" xmlns:p="http://schemas.openxmlformats.org/presentationml/2006/main" xmlns:r="http://schemas.openxmlformats.org/officeDocument/2006/relationships">
-  <p:cSld>
-    <p:spTree>
-      <p:nvGrpSpPr>
-        <p:cNvPr id="1" name=""/>
-        <p:cNvGrpSpPr/>
-        <p:nvPr/>
-      </p:nvGrpSpPr>
-      <p:grpSpPr/>
-      <p:pic>
-        <p:nvPicPr>
-          <p:cNvPr id="2" name="Picture 1" descr="09_killer_scenario.png"/>
-          <p:cNvPicPr>
-            <a:picLocks noChangeAspect="1"/>
-          </p:cNvPicPr>
-          <p:nvPr/>
-        </p:nvPicPr>
-        <p:blipFill>
-          <a:blip r:embed="rId2"/>
-          <a:stretch>
-            <a:fillRect/>
-          </a:stretch>
-        </p:blipFill>
-        <p:spPr>
-          <a:xfrm>
-            <a:off x="0" y="0"/>
-            <a:ext cx="9144000" cy="5143500"/>
+            <a:off x="5449824" y="1078992"/>
+            <a:ext cx="6419088" cy="5413248"/>
           </a:xfrm>
           <a:prstGeom prst="rect">
             <a:avLst/>
@@ -5416,324 +8315,4 @@
   </a:objectDefaults>
   <a:extraClrSchemeLst/>
 </a:theme>
-</file>
-
-<file path=ppt/theme/theme2.xml><?xml version="1.0" encoding="utf-8"?>
-<a:theme xmlns:a="http://schemas.openxmlformats.org/drawingml/2006/main" name="Office Theme">
-  <a:themeElements>
-    <a:clrScheme name="Office">
-      <a:dk1>
-        <a:sysClr val="windowText" lastClr="000000"/>
-      </a:dk1>
-      <a:lt1>
-        <a:sysClr val="window" lastClr="FFFFFF"/>
-      </a:lt1>
-      <a:dk2>
-        <a:srgbClr val="1F497D"/>
-      </a:dk2>
-      <a:lt2>
-        <a:srgbClr val="EEECE1"/>
-      </a:lt2>
-      <a:accent1>
-        <a:srgbClr val="4F81BD"/>
-      </a:accent1>
-      <a:accent2>
-        <a:srgbClr val="C0504D"/>
-      </a:accent2>
-      <a:accent3>
-        <a:srgbClr val="9BBB59"/>
-      </a:accent3>
-      <a:accent4>
-        <a:srgbClr val="8064A2"/>
-      </a:accent4>
-      <a:accent5>
-        <a:srgbClr val="4BACC6"/>
-      </a:accent5>
-      <a:accent6>
-        <a:srgbClr val="F79646"/>
-      </a:accent6>
-      <a:hlink>
-        <a:srgbClr val="0000FF"/>
-      </a:hlink>
-      <a:folHlink>
-        <a:srgbClr val="800080"/>
-      </a:folHlink>
-    </a:clrScheme>
-    <a:fontScheme name="Office">
-      <a:majorFont>
-        <a:latin typeface="Calibri"/>
-        <a:ea typeface=""/>
-        <a:cs typeface=""/>
-        <a:font script="Jpan" typeface="ＭＳ Ｐゴシック"/>
-        <a:font script="Hang" typeface="맑은 고딕"/>
-        <a:font script="Hans" typeface="宋体"/>
-        <a:font script="Hant" typeface="新細明體"/>
-        <a:font script="Arab" typeface="Times New Roman"/>
-        <a:font script="Hebr" typeface="Times New Roman"/>
-        <a:font script="Thai" typeface="Angsana New"/>
-        <a:font script="Ethi" typeface="Nyala"/>
-        <a:font script="Beng" typeface="Vrinda"/>
-        <a:font script="Gujr" typeface="Shruti"/>
-        <a:font script="Khmr" typeface="MoolBoran"/>
-        <a:font script="Knda" typeface="Tunga"/>
-        <a:font script="Guru" typeface="Raavi"/>
-        <a:font script="Cans" typeface="Euphemia"/>
-        <a:font script="Cher" typeface="Plantagenet Cherokee"/>
-        <a:font script="Yiii" typeface="Microsoft Yi Baiti"/>
-        <a:font script="Tibt" typeface="Microsoft Himalaya"/>
-        <a:font script="Thaa" typeface="MV Boli"/>
-        <a:font script="Deva" typeface="Mangal"/>
-        <a:font script="Telu" typeface="Gautami"/>
-        <a:font script="Taml" typeface="Latha"/>
-        <a:font script="Syrc" typeface="Estrangelo Edessa"/>
-        <a:font script="Orya" typeface="Kalinga"/>
-        <a:font script="Mlym" typeface="Kartika"/>
-        <a:font script="Laoo" typeface="DokChampa"/>
-        <a:font script="Sinh" typeface="Iskoola Pota"/>
-        <a:font script="Mong" typeface="Mongolian Baiti"/>
-        <a:font script="Viet" typeface="Times New Roman"/>
-        <a:font script="Uigh" typeface="Microsoft Uighur"/>
-        <a:font script="Geor" typeface="Sylfaen"/>
-      </a:majorFont>
-      <a:minorFont>
-        <a:latin typeface="Calibri"/>
-        <a:ea typeface=""/>
-        <a:cs typeface=""/>
-        <a:font script="Jpan" typeface="ＭＳ Ｐゴシック"/>
-        <a:font script="Hang" typeface="맑은 고딕"/>
-        <a:font script="Hans" typeface="宋体"/>
-        <a:font script="Hant" typeface="新細明體"/>
-        <a:font script="Arab" typeface="Arial"/>
-        <a:font script="Hebr" typeface="Arial"/>
-        <a:font script="Thai" typeface="Cordia New"/>
-        <a:font script="Ethi" typeface="Nyala"/>
-        <a:font script="Beng" typeface="Vrinda"/>
-        <a:font script="Gujr" typeface="Shruti"/>
-        <a:font script="Khmr" typeface="DaunPenh"/>
-        <a:font script="Knda" typeface="Tunga"/>
-        <a:font script="Guru" typeface="Raavi"/>
-        <a:font script="Cans" typeface="Euphemia"/>
-        <a:font script="Cher" typeface="Plantagenet Cherokee"/>
-        <a:font script="Yiii" typeface="Microsoft Yi Baiti"/>
-        <a:font script="Tibt" typeface="Microsoft Himalaya"/>
-        <a:font script="Thaa" typeface="MV Boli"/>
-        <a:font script="Deva" typeface="Mangal"/>
-        <a:font script="Telu" typeface="Gautami"/>
-        <a:font script="Taml" typeface="Latha"/>
-        <a:font script="Syrc" typeface="Estrangelo Edessa"/>
-        <a:font script="Orya" typeface="Kalinga"/>
-        <a:font script="Mlym" typeface="Kartika"/>
-        <a:font script="Laoo" typeface="DokChampa"/>
-        <a:font script="Sinh" typeface="Iskoola Pota"/>
-        <a:font script="Mong" typeface="Mongolian Baiti"/>
-        <a:font script="Viet" typeface="Arial"/>
-        <a:font script="Uigh" typeface="Microsoft Uighur"/>
-        <a:font script="Geor" typeface="Sylfaen"/>
-      </a:minorFont>
-    </a:fontScheme>
-    <a:fmtScheme name="Office">
-      <a:fillStyleLst>
-        <a:solidFill>
-          <a:schemeClr val="phClr"/>
-        </a:solidFill>
-        <a:gradFill rotWithShape="1">
-          <a:gsLst>
-            <a:gs pos="0">
-              <a:schemeClr val="phClr">
-                <a:tint val="50000"/>
-                <a:satMod val="300000"/>
-              </a:schemeClr>
-            </a:gs>
-            <a:gs pos="35000">
-              <a:schemeClr val="phClr">
-                <a:tint val="37000"/>
-                <a:satMod val="300000"/>
-              </a:schemeClr>
-            </a:gs>
-            <a:gs pos="100000">
-              <a:schemeClr val="phClr">
-                <a:tint val="15000"/>
-                <a:satMod val="350000"/>
-              </a:schemeClr>
-            </a:gs>
-          </a:gsLst>
-          <a:lin ang="16200000" scaled="1"/>
-        </a:gradFill>
-        <a:gradFill rotWithShape="1">
-          <a:gsLst>
-            <a:gs pos="0">
-              <a:schemeClr val="phClr">
-                <a:tint val="100000"/>
-                <a:shade val="100000"/>
-                <a:satMod val="130000"/>
-              </a:schemeClr>
-            </a:gs>
-            <a:gs pos="100000">
-              <a:schemeClr val="phClr">
-                <a:tint val="50000"/>
-                <a:shade val="100000"/>
-                <a:satMod val="350000"/>
-              </a:schemeClr>
-            </a:gs>
-          </a:gsLst>
-          <a:lin ang="16200000" scaled="0"/>
-        </a:gradFill>
-      </a:fillStyleLst>
-      <a:lnStyleLst>
-        <a:ln w="9525" cap="flat" cmpd="sng" algn="ctr">
-          <a:solidFill>
-            <a:schemeClr val="phClr">
-              <a:shade val="95000"/>
-              <a:satMod val="105000"/>
-            </a:schemeClr>
-          </a:solidFill>
-          <a:prstDash val="solid"/>
-        </a:ln>
-        <a:ln w="25400" cap="flat" cmpd="sng" algn="ctr">
-          <a:solidFill>
-            <a:schemeClr val="phClr"/>
-          </a:solidFill>
-          <a:prstDash val="solid"/>
-        </a:ln>
-        <a:ln w="38100" cap="flat" cmpd="sng" algn="ctr">
-          <a:solidFill>
-            <a:schemeClr val="phClr"/>
-          </a:solidFill>
-          <a:prstDash val="solid"/>
-        </a:ln>
-      </a:lnStyleLst>
-      <a:effectStyleLst>
-        <a:effectStyle>
-          <a:effectLst>
-            <a:outerShdw blurRad="40000" dist="20000" dir="5400000" rotWithShape="0">
-              <a:srgbClr val="000000">
-                <a:alpha val="38000"/>
-              </a:srgbClr>
-            </a:outerShdw>
-          </a:effectLst>
-        </a:effectStyle>
-        <a:effectStyle>
-          <a:effectLst>
-            <a:outerShdw blurRad="40000" dist="23000" dir="5400000" rotWithShape="0">
-              <a:srgbClr val="000000">
-                <a:alpha val="35000"/>
-              </a:srgbClr>
-            </a:outerShdw>
-          </a:effectLst>
-        </a:effectStyle>
-        <a:effectStyle>
-          <a:effectLst>
-            <a:outerShdw blurRad="40000" dist="23000" dir="5400000" rotWithShape="0">
-              <a:srgbClr val="000000">
-                <a:alpha val="35000"/>
-              </a:srgbClr>
-            </a:outerShdw>
-          </a:effectLst>
-          <a:scene3d>
-            <a:camera prst="orthographicFront">
-              <a:rot lat="0" lon="0" rev="0"/>
-            </a:camera>
-            <a:lightRig rig="threePt" dir="t">
-              <a:rot lat="0" lon="0" rev="1200000"/>
-            </a:lightRig>
-          </a:scene3d>
-          <a:sp3d>
-            <a:bevelT w="63500" h="25400"/>
-          </a:sp3d>
-        </a:effectStyle>
-      </a:effectStyleLst>
-      <a:bgFillStyleLst>
-        <a:solidFill>
-          <a:schemeClr val="phClr"/>
-        </a:solidFill>
-        <a:gradFill rotWithShape="1">
-          <a:gsLst>
-            <a:gs pos="0">
-              <a:schemeClr val="phClr">
-                <a:tint val="40000"/>
-                <a:satMod val="350000"/>
-              </a:schemeClr>
-            </a:gs>
-            <a:gs pos="40000">
-              <a:schemeClr val="phClr">
-                <a:tint val="45000"/>
-                <a:shade val="99000"/>
-                <a:satMod val="350000"/>
-              </a:schemeClr>
-            </a:gs>
-            <a:gs pos="100000">
-              <a:schemeClr val="phClr">
-                <a:shade val="20000"/>
-                <a:satMod val="255000"/>
-              </a:schemeClr>
-            </a:gs>
-          </a:gsLst>
-          <a:path path="circle">
-            <a:fillToRect l="50000" t="-80000" r="50000" b="180000"/>
-          </a:path>
-        </a:gradFill>
-        <a:gradFill rotWithShape="1">
-          <a:gsLst>
-            <a:gs pos="0">
-              <a:schemeClr val="phClr">
-                <a:tint val="80000"/>
-                <a:satMod val="300000"/>
-              </a:schemeClr>
-            </a:gs>
-            <a:gs pos="100000">
-              <a:schemeClr val="phClr">
-                <a:shade val="30000"/>
-                <a:satMod val="200000"/>
-              </a:schemeClr>
-            </a:gs>
-          </a:gsLst>
-          <a:path path="circle">
-            <a:fillToRect l="50000" t="50000" r="50000" b="50000"/>
-          </a:path>
-        </a:gradFill>
-      </a:bgFillStyleLst>
-    </a:fmtScheme>
-  </a:themeElements>
-  <a:objectDefaults>
-    <a:spDef>
-      <a:spPr/>
-      <a:bodyPr/>
-      <a:lstStyle/>
-      <a:style>
-        <a:lnRef idx="1">
-          <a:schemeClr val="accent1"/>
-        </a:lnRef>
-        <a:fillRef idx="3">
-          <a:schemeClr val="accent1"/>
-        </a:fillRef>
-        <a:effectRef idx="2">
-          <a:schemeClr val="accent1"/>
-        </a:effectRef>
-        <a:fontRef idx="minor">
-          <a:schemeClr val="lt1"/>
-        </a:fontRef>
-      </a:style>
-    </a:spDef>
-    <a:lnDef>
-      <a:spPr/>
-      <a:bodyPr/>
-      <a:lstStyle/>
-      <a:style>
-        <a:lnRef idx="2">
-          <a:schemeClr val="accent1"/>
-        </a:lnRef>
-        <a:fillRef idx="0">
-          <a:schemeClr val="accent1"/>
-        </a:fillRef>
-        <a:effectRef idx="1">
-          <a:schemeClr val="accent1"/>
-        </a:effectRef>
-        <a:fontRef idx="minor">
-          <a:schemeClr val="tx1"/>
-        </a:fontRef>
-      </a:style>
-    </a:lnDef>
-  </a:objectDefaults>
-  <a:extraClrSchemeLst/>
-</a:theme>
 </file>